--- a/AI_Road_Accident_RiskZone_Detection_Review1_UPDATED_FIXED.pptx
+++ b/AI_Road_Accident_RiskZone_Detection_Review1_UPDATED_FIXED.pptx
@@ -1843,9 +1843,12 @@
         </p:spPr>
         <p:txBody>
           <a:bodyPr wrap="square">
-            <a:normAutofit/>
-          </a:bodyPr>
-          <a:p/>
+            <a:normAutofit fontScale="25000" lnSpcReduction="20000"/>
+          </a:bodyPr>
+          <a:lstStyle/>
+          <a:p>
+            <a:endParaRPr/>
+          </a:p>
         </p:txBody>
       </p:sp>
       <p:sp>
@@ -1867,7 +1870,7 @@
         </p:spPr>
         <p:txBody>
           <a:bodyPr wrap="square" lIns="25400" tIns="25400" rIns="25400" bIns="25400" rtlCol="0" anchor="t">
-            <a:normAutofit/>
+            <a:normAutofit fontScale="77500" lnSpcReduction="20000"/>
           </a:bodyPr>
           <a:lstStyle/>
           <a:p>
@@ -1875,7 +1878,7 @@
               <a:buNone/>
             </a:pPr>
             <a:r>
-              <a:rPr lang="en-US" sz="2025" b="1" kern="0" spc="450" dirty="0" smtClean="0">
+              <a:rPr lang="en-US" sz="2025" b="1" kern="0" spc="450" dirty="0">
                 <a:solidFill>
                   <a:srgbClr val="C8202E"/>
                 </a:solidFill>
@@ -1883,18 +1886,7 @@
                 <a:ea typeface="Bookman Old Style" pitchFamily="34" charset="-122"/>
                 <a:cs typeface="Bookman Old Style" pitchFamily="34" charset="-120"/>
               </a:rPr>
-              <a:t>MINI PROJECT </a:t>
-            </a:r>
-            <a:r>
-              <a:rPr lang="en-US" sz="2025" b="1" kern="0" spc="450" dirty="0">
-                <a:solidFill>
-                  <a:srgbClr val="C8202E"/>
-                </a:solidFill>
-                <a:latin typeface="Bookman Old Style" pitchFamily="34" charset="0"/>
-                <a:ea typeface="Bookman Old Style" pitchFamily="34" charset="-122"/>
-                <a:cs typeface="Bookman Old Style" pitchFamily="34" charset="-120"/>
-              </a:rPr>
-              <a:t>REVIEW — 1</a:t>
+              <a:t>MINI PROJECT REVIEW — 1</a:t>
             </a:r>
             <a:endParaRPr lang="en-US" sz="2025" dirty="0"/>
           </a:p>
@@ -1923,9 +1915,12 @@
         </p:spPr>
         <p:txBody>
           <a:bodyPr wrap="square">
-            <a:normAutofit/>
-          </a:bodyPr>
-          <a:p/>
+            <a:normAutofit fontScale="25000" lnSpcReduction="20000"/>
+          </a:bodyPr>
+          <a:lstStyle/>
+          <a:p>
+            <a:endParaRPr/>
+          </a:p>
         </p:txBody>
       </p:sp>
       <p:sp>
@@ -1947,7 +1942,7 @@
         </p:spPr>
         <p:txBody>
           <a:bodyPr wrap="square" lIns="25400" tIns="25400" rIns="25400" bIns="25400" rtlCol="0" anchor="t">
-            <a:normAutofit/>
+            <a:normAutofit fontScale="92500" lnSpcReduction="20000"/>
           </a:bodyPr>
           <a:lstStyle/>
           <a:p>
@@ -1991,7 +1986,7 @@
         </p:spPr>
         <p:txBody>
           <a:bodyPr wrap="square" lIns="25400" tIns="25400" rIns="25400" bIns="25400" rtlCol="0" anchor="t">
-            <a:normAutofit/>
+            <a:normAutofit fontScale="92500" lnSpcReduction="20000"/>
           </a:bodyPr>
           <a:lstStyle/>
           <a:p>
@@ -2041,7 +2036,10 @@
           <a:bodyPr wrap="square">
             <a:normAutofit/>
           </a:bodyPr>
-          <a:p/>
+          <a:lstStyle/>
+          <a:p>
+            <a:endParaRPr/>
+          </a:p>
         </p:txBody>
       </p:sp>
       <p:sp>
@@ -2063,7 +2061,7 @@
         </p:spPr>
         <p:txBody>
           <a:bodyPr wrap="square" lIns="25400" tIns="25400" rIns="25400" bIns="25400" rtlCol="0" anchor="t">
-            <a:normAutofit/>
+            <a:normAutofit lnSpcReduction="10000"/>
           </a:bodyPr>
           <a:lstStyle/>
           <a:p>
@@ -2122,7 +2120,10 @@
           <a:bodyPr wrap="square">
             <a:normAutofit/>
           </a:bodyPr>
-          <a:p/>
+          <a:lstStyle/>
+          <a:p>
+            <a:endParaRPr/>
+          </a:p>
         </p:txBody>
       </p:sp>
       <p:sp>
@@ -2133,8 +2134,8 @@
         </p:nvSpPr>
         <p:spPr>
           <a:xfrm>
-            <a:off x="4448175" y="5077867"/>
-            <a:ext cx="2202507" cy="704850"/>
+            <a:off x="4481214" y="5249317"/>
+            <a:ext cx="2169468" cy="533400"/>
           </a:xfrm>
           <a:prstGeom prst="rect">
             <a:avLst/>
@@ -2185,7 +2186,7 @@
         </p:spPr>
         <p:txBody>
           <a:bodyPr wrap="square" lIns="25400" tIns="25400" rIns="25400" bIns="25400" rtlCol="0" anchor="t">
-            <a:normAutofit/>
+            <a:normAutofit lnSpcReduction="10000"/>
           </a:bodyPr>
           <a:lstStyle/>
           <a:p>
@@ -2201,7 +2202,7 @@
                 <a:ea typeface="Bookman Old Style" pitchFamily="34" charset="-122"/>
                 <a:cs typeface="Bookman Old Style" pitchFamily="34" charset="-120"/>
               </a:rPr>
-              <a:t>Roll No: XXXXXXXX</a:t>
+              <a:t>Roll No: 23EG106B31</a:t>
             </a:r>
             <a:endParaRPr lang="en-US" sz="1875" dirty="0"/>
           </a:p>
@@ -2215,7 +2216,7 @@
         </p:nvSpPr>
         <p:spPr>
           <a:xfrm>
-            <a:off x="9286875" y="4858792"/>
+            <a:off x="9286875" y="4943475"/>
             <a:ext cx="4810125" cy="1104900"/>
           </a:xfrm>
           <a:prstGeom prst="roundRect">
@@ -2244,7 +2245,10 @@
           <a:bodyPr wrap="square">
             <a:normAutofit/>
           </a:bodyPr>
-          <a:p/>
+          <a:lstStyle/>
+          <a:p>
+            <a:endParaRPr/>
+          </a:p>
         </p:txBody>
       </p:sp>
       <p:sp>
@@ -2255,8 +2259,8 @@
         </p:nvSpPr>
         <p:spPr>
           <a:xfrm>
-            <a:off x="9544050" y="5077867"/>
-            <a:ext cx="2202507" cy="704850"/>
+            <a:off x="9577089" y="5249317"/>
+            <a:ext cx="2169468" cy="533400"/>
           </a:xfrm>
           <a:prstGeom prst="rect">
             <a:avLst/>
@@ -2274,15 +2278,13 @@
               <a:buNone/>
             </a:pPr>
             <a:r>
-              <a:rPr lang="en-US" sz="2250" b="1" dirty="0">
+              <a:rPr lang="en-US" sz="2250" b="1" dirty="0" err="1">
                 <a:solidFill>
                   <a:srgbClr val="000000"/>
                 </a:solidFill>
                 <a:latin typeface="Bookman Old Style" pitchFamily="34" charset="0"/>
-                <a:ea typeface="Bookman Old Style" pitchFamily="34" charset="-122"/>
-                <a:cs typeface="Bookman Old Style" pitchFamily="34" charset="-120"/>
-              </a:rPr>
-              <a:t>Team Member 2</a:t>
+              </a:rPr>
+              <a:t>Inderneel</a:t>
             </a:r>
             <a:endParaRPr lang="en-US" sz="2250" dirty="0"/>
           </a:p>
@@ -2307,13 +2309,11 @@
         </p:spPr>
         <p:txBody>
           <a:bodyPr wrap="square" lIns="25400" tIns="25400" rIns="25400" bIns="25400" rtlCol="0" anchor="t">
-            <a:normAutofit/>
-          </a:bodyPr>
-          <a:lstStyle/>
-          <a:p>
-            <a:pPr marL="0" indent="0" algn="ctr">
-              <a:buNone/>
-            </a:pPr>
+            <a:normAutofit lnSpcReduction="10000"/>
+          </a:bodyPr>
+          <a:lstStyle/>
+          <a:p>
+            <a:pPr algn="ctr"/>
             <a:r>
               <a:rPr lang="en-US" sz="1875" dirty="0">
                 <a:solidFill>
@@ -2323,7 +2323,7 @@
                 <a:ea typeface="Bookman Old Style" pitchFamily="34" charset="-122"/>
                 <a:cs typeface="Bookman Old Style" pitchFamily="34" charset="-120"/>
               </a:rPr>
-              <a:t>Roll No: XXXXXXXX</a:t>
+              <a:t>Roll No: 23EG106B59</a:t>
             </a:r>
             <a:endParaRPr lang="en-US" sz="1875" dirty="0"/>
           </a:p>
@@ -2366,7 +2366,10 @@
           <a:bodyPr wrap="square">
             <a:normAutofit/>
           </a:bodyPr>
-          <a:p/>
+          <a:lstStyle/>
+          <a:p>
+            <a:endParaRPr/>
+          </a:p>
         </p:txBody>
       </p:sp>
       <p:sp>
@@ -2377,8 +2380,8 @@
         </p:nvSpPr>
         <p:spPr>
           <a:xfrm>
-            <a:off x="4448175" y="6392317"/>
-            <a:ext cx="2202507" cy="704850"/>
+            <a:off x="4633280" y="6525667"/>
+            <a:ext cx="2017402" cy="571500"/>
           </a:xfrm>
           <a:prstGeom prst="rect">
             <a:avLst/>
@@ -2401,10 +2404,8 @@
                   <a:srgbClr val="000000"/>
                 </a:solidFill>
                 <a:latin typeface="Bookman Old Style" pitchFamily="34" charset="0"/>
-                <a:ea typeface="Bookman Old Style" pitchFamily="34" charset="-122"/>
-                <a:cs typeface="Bookman Old Style" pitchFamily="34" charset="-120"/>
-              </a:rPr>
-              <a:t>Team Member 3</a:t>
+              </a:rPr>
+              <a:t>Rithik Teja</a:t>
             </a:r>
             <a:endParaRPr lang="en-US" sz="2250" dirty="0"/>
           </a:p>
@@ -2429,13 +2430,11 @@
         </p:spPr>
         <p:txBody>
           <a:bodyPr wrap="square" lIns="25400" tIns="25400" rIns="25400" bIns="25400" rtlCol="0" anchor="t">
-            <a:normAutofit/>
-          </a:bodyPr>
-          <a:lstStyle/>
-          <a:p>
-            <a:pPr marL="0" indent="0" algn="ctr">
-              <a:buNone/>
-            </a:pPr>
+            <a:normAutofit lnSpcReduction="10000"/>
+          </a:bodyPr>
+          <a:lstStyle/>
+          <a:p>
+            <a:pPr algn="ctr"/>
             <a:r>
               <a:rPr lang="en-US" sz="1875" dirty="0">
                 <a:solidFill>
@@ -2445,7 +2444,7 @@
                 <a:ea typeface="Bookman Old Style" pitchFamily="34" charset="-122"/>
                 <a:cs typeface="Bookman Old Style" pitchFamily="34" charset="-120"/>
               </a:rPr>
-              <a:t>Roll No: XXXXXXXX</a:t>
+              <a:t>Roll No: 23EG106B60</a:t>
             </a:r>
             <a:endParaRPr lang="en-US" sz="1875" dirty="0"/>
           </a:p>
@@ -2459,7 +2458,7 @@
         </p:nvSpPr>
         <p:spPr>
           <a:xfrm>
-            <a:off x="9286875" y="6173242"/>
+            <a:off x="9265294" y="6257411"/>
             <a:ext cx="4810125" cy="1104900"/>
           </a:xfrm>
           <a:prstGeom prst="roundRect">
@@ -2488,7 +2487,10 @@
           <a:bodyPr wrap="square">
             <a:normAutofit/>
           </a:bodyPr>
-          <a:p/>
+          <a:lstStyle/>
+          <a:p>
+            <a:endParaRPr/>
+          </a:p>
         </p:txBody>
       </p:sp>
       <p:sp>
@@ -2499,8 +2501,8 @@
         </p:nvSpPr>
         <p:spPr>
           <a:xfrm>
-            <a:off x="9544050" y="6392317"/>
-            <a:ext cx="2202507" cy="704850"/>
+            <a:off x="9433728" y="6525667"/>
+            <a:ext cx="2236629" cy="514350"/>
           </a:xfrm>
           <a:prstGeom prst="rect">
             <a:avLst/>
@@ -2523,10 +2525,8 @@
                   <a:srgbClr val="000000"/>
                 </a:solidFill>
                 <a:latin typeface="Bookman Old Style" pitchFamily="34" charset="0"/>
-                <a:ea typeface="Bookman Old Style" pitchFamily="34" charset="-122"/>
-                <a:cs typeface="Bookman Old Style" pitchFamily="34" charset="-120"/>
-              </a:rPr>
-              <a:t>Team Member 4</a:t>
+              </a:rPr>
+              <a:t>Shanmukh</a:t>
             </a:r>
             <a:endParaRPr lang="en-US" sz="2250" dirty="0"/>
           </a:p>
@@ -2551,13 +2551,11 @@
         </p:spPr>
         <p:txBody>
           <a:bodyPr wrap="square" lIns="25400" tIns="25400" rIns="25400" bIns="25400" rtlCol="0" anchor="t">
-            <a:normAutofit/>
-          </a:bodyPr>
-          <a:lstStyle/>
-          <a:p>
-            <a:pPr marL="0" indent="0" algn="ctr">
-              <a:buNone/>
-            </a:pPr>
+            <a:normAutofit lnSpcReduction="10000"/>
+          </a:bodyPr>
+          <a:lstStyle/>
+          <a:p>
+            <a:pPr algn="ctr"/>
             <a:r>
               <a:rPr lang="en-US" sz="1875" dirty="0">
                 <a:solidFill>
@@ -2567,7 +2565,7 @@
                 <a:ea typeface="Bookman Old Style" pitchFamily="34" charset="-122"/>
                 <a:cs typeface="Bookman Old Style" pitchFamily="34" charset="-120"/>
               </a:rPr>
-              <a:t>Roll No: XXXXXXXX</a:t>
+              <a:t>Roll No: 23EG106B62</a:t>
             </a:r>
             <a:endParaRPr lang="en-US" sz="1875" dirty="0"/>
           </a:p>
@@ -2592,7 +2590,7 @@
         </p:spPr>
         <p:txBody>
           <a:bodyPr wrap="square" lIns="25400" tIns="25400" rIns="25400" bIns="25400" rtlCol="0" anchor="t">
-            <a:normAutofit/>
+            <a:normAutofit lnSpcReduction="10000"/>
           </a:bodyPr>
           <a:lstStyle/>
           <a:p>
@@ -2619,7 +2617,7 @@
                 <a:ea typeface="Bookman Old Style" pitchFamily="34" charset="-122"/>
                 <a:cs typeface="Bookman Old Style" pitchFamily="34" charset="-120"/>
               </a:rPr>
-              <a:t>Dr./Mr./Ms. Guide Name</a:t>
+              <a:t>Dr./Mr./Ravi Krishna</a:t>
             </a:r>
             <a:endParaRPr lang="en-US" sz="2250" dirty="0"/>
           </a:p>
@@ -2644,7 +2642,7 @@
         </p:spPr>
         <p:txBody>
           <a:bodyPr wrap="square" lIns="25400" tIns="25400" rIns="25400" bIns="25400" rtlCol="0" anchor="t">
-            <a:normAutofit/>
+            <a:normAutofit lnSpcReduction="10000"/>
           </a:bodyPr>
           <a:lstStyle/>
           <a:p>
@@ -2652,13 +2650,11 @@
               <a:buNone/>
             </a:pPr>
             <a:r>
-              <a:rPr lang="en-US" sz="1875" dirty="0" smtClean="0">
+              <a:rPr lang="en-US" sz="1875" dirty="0">
                 <a:solidFill>
                   <a:srgbClr val="000000"/>
                 </a:solidFill>
                 <a:latin typeface="Bookman Old Style" pitchFamily="34" charset="0"/>
-                <a:ea typeface="Bookman Old Style" pitchFamily="34" charset="-122"/>
-                <a:cs typeface="Bookman Old Style" pitchFamily="34" charset="-120"/>
               </a:rPr>
               <a:t>Designation</a:t>
             </a:r>
@@ -2689,9 +2685,12 @@
         </p:spPr>
         <p:txBody>
           <a:bodyPr wrap="square">
-            <a:normAutofit/>
-          </a:bodyPr>
-          <a:p/>
+            <a:normAutofit lnSpcReduction="10000"/>
+          </a:bodyPr>
+          <a:lstStyle/>
+          <a:p>
+            <a:endParaRPr/>
+          </a:p>
         </p:txBody>
       </p:sp>
       <p:sp>
@@ -2713,7 +2712,7 @@
         </p:spPr>
         <p:txBody>
           <a:bodyPr wrap="square" lIns="25400" tIns="25400" rIns="25400" bIns="25400" rtlCol="0" anchor="t">
-            <a:normAutofit/>
+            <a:normAutofit lnSpcReduction="10000"/>
           </a:bodyPr>
           <a:lstStyle/>
           <a:p>
@@ -2765,7 +2764,10 @@
           <a:bodyPr wrap="square">
             <a:normAutofit/>
           </a:bodyPr>
-          <a:p/>
+          <a:lstStyle/>
+          <a:p>
+            <a:endParaRPr/>
+          </a:p>
         </p:txBody>
       </p:sp>
       <p:sp>
@@ -2787,7 +2789,7 @@
         </p:spPr>
         <p:txBody>
           <a:bodyPr wrap="square" lIns="25400" tIns="25400" rIns="25400" bIns="25400" rtlCol="0" anchor="t">
-            <a:normAutofit/>
+            <a:normAutofit lnSpcReduction="10000"/>
           </a:bodyPr>
           <a:lstStyle/>
           <a:p>
@@ -2828,7 +2830,7 @@
         </p:spPr>
         <p:txBody>
           <a:bodyPr wrap="square" lIns="25400" tIns="25400" rIns="25400" bIns="25400" rtlCol="0" anchor="t">
-            <a:normAutofit/>
+            <a:normAutofit lnSpcReduction="10000"/>
           </a:bodyPr>
           <a:lstStyle/>
           <a:p>
@@ -2844,18 +2846,7 @@
                 <a:ea typeface="Bookman Old Style" pitchFamily="34" charset="-122"/>
                 <a:cs typeface="Bookman Old Style" pitchFamily="34" charset="-120"/>
               </a:rPr>
-              <a:t>1 / </a:t>
-            </a:r>
-            <a:r>
-              <a:rPr lang="en-US" sz="1800" kern="0" spc="75" dirty="0" smtClean="0">
-                <a:solidFill>
-                  <a:srgbClr val="8A92A4"/>
-                </a:solidFill>
-                <a:latin typeface="Bookman Old Style" pitchFamily="34" charset="0"/>
-                <a:ea typeface="Bookman Old Style" pitchFamily="34" charset="-122"/>
-                <a:cs typeface="Bookman Old Style" pitchFamily="34" charset="-120"/>
-              </a:rPr>
-              <a:t>14</a:t>
+              <a:t>1 / 14</a:t>
             </a:r>
             <a:endParaRPr lang="en-US" sz="1800" dirty="0"/>
           </a:p>
@@ -2866,13 +2857,6 @@
   <p:clrMapOvr>
     <a:masterClrMapping/>
   </p:clrMapOvr>
-  <p:timing>
-    <p:tnLst>
-      <p:par>
-        <p:cTn id="1" dur="indefinite" restart="never" nodeType="tmRoot"/>
-      </p:par>
-    </p:tnLst>
-  </p:timing>
 </p:sld>
 </file>
 
@@ -2939,9 +2923,12 @@
         </p:spPr>
         <p:txBody>
           <a:bodyPr wrap="square">
-            <a:normAutofit/>
-          </a:bodyPr>
-          <a:p/>
+            <a:normAutofit fontScale="25000" lnSpcReduction="20000"/>
+          </a:bodyPr>
+          <a:lstStyle/>
+          <a:p>
+            <a:endParaRPr/>
+          </a:p>
         </p:txBody>
       </p:sp>
       <p:sp>
@@ -2963,7 +2950,7 @@
         </p:spPr>
         <p:txBody>
           <a:bodyPr wrap="square" lIns="25400" tIns="25400" rIns="25400" bIns="25400" rtlCol="0" anchor="t">
-            <a:normAutofit/>
+            <a:normAutofit lnSpcReduction="10000"/>
           </a:bodyPr>
           <a:lstStyle/>
           <a:p>
@@ -3004,7 +2991,7 @@
         </p:spPr>
         <p:txBody>
           <a:bodyPr wrap="square" lIns="25400" tIns="25400" rIns="25400" bIns="25400" rtlCol="0" anchor="t">
-            <a:normAutofit/>
+            <a:normAutofit fontScale="92500" lnSpcReduction="20000"/>
           </a:bodyPr>
           <a:lstStyle/>
           <a:p>
@@ -3066,7 +3053,10 @@
           <a:bodyPr wrap="square">
             <a:normAutofit/>
           </a:bodyPr>
-          <a:p/>
+          <a:lstStyle/>
+          <a:p>
+            <a:endParaRPr/>
+          </a:p>
         </p:txBody>
       </p:sp>
       <p:sp>
@@ -3088,7 +3078,7 @@
         </p:spPr>
         <p:txBody>
           <a:bodyPr wrap="square" lIns="25400" tIns="25400" rIns="25400" bIns="25400" rtlCol="0" anchor="t">
-            <a:normAutofit/>
+            <a:normAutofit lnSpcReduction="10000"/>
           </a:bodyPr>
           <a:lstStyle/>
           <a:p>
@@ -3129,7 +3119,7 @@
         </p:spPr>
         <p:txBody>
           <a:bodyPr wrap="square" lIns="25400" tIns="25400" rIns="25400" bIns="25400" rtlCol="0" anchor="t">
-            <a:normAutofit/>
+            <a:normAutofit fontScale="92500"/>
           </a:bodyPr>
           <a:lstStyle/>
           <a:p>
@@ -3191,7 +3181,10 @@
           <a:bodyPr wrap="square">
             <a:normAutofit/>
           </a:bodyPr>
-          <a:p/>
+          <a:lstStyle/>
+          <a:p>
+            <a:endParaRPr/>
+          </a:p>
         </p:txBody>
       </p:sp>
       <p:sp>
@@ -3213,7 +3206,7 @@
         </p:spPr>
         <p:txBody>
           <a:bodyPr wrap="square" lIns="25400" tIns="25400" rIns="25400" bIns="25400" rtlCol="0" anchor="t">
-            <a:normAutofit/>
+            <a:normAutofit lnSpcReduction="10000"/>
           </a:bodyPr>
           <a:lstStyle/>
           <a:p>
@@ -3254,7 +3247,7 @@
         </p:spPr>
         <p:txBody>
           <a:bodyPr wrap="square" lIns="25400" tIns="25400" rIns="25400" bIns="25400" rtlCol="0" anchor="t">
-            <a:normAutofit/>
+            <a:normAutofit fontScale="92500" lnSpcReduction="20000"/>
           </a:bodyPr>
           <a:lstStyle/>
           <a:p>
@@ -3316,7 +3309,10 @@
           <a:bodyPr wrap="square">
             <a:normAutofit/>
           </a:bodyPr>
-          <a:p/>
+          <a:lstStyle/>
+          <a:p>
+            <a:endParaRPr/>
+          </a:p>
         </p:txBody>
       </p:sp>
       <p:sp>
@@ -3338,7 +3334,7 @@
         </p:spPr>
         <p:txBody>
           <a:bodyPr wrap="square" lIns="25400" tIns="25400" rIns="25400" bIns="25400" rtlCol="0" anchor="t">
-            <a:normAutofit/>
+            <a:normAutofit lnSpcReduction="10000"/>
           </a:bodyPr>
           <a:lstStyle/>
           <a:p>
@@ -3379,7 +3375,7 @@
         </p:spPr>
         <p:txBody>
           <a:bodyPr wrap="square" lIns="25400" tIns="25400" rIns="25400" bIns="25400" rtlCol="0" anchor="t">
-            <a:normAutofit/>
+            <a:normAutofit fontScale="92500" lnSpcReduction="20000"/>
           </a:bodyPr>
           <a:lstStyle/>
           <a:p>
@@ -3436,7 +3432,10 @@
           <a:bodyPr wrap="square">
             <a:normAutofit/>
           </a:bodyPr>
-          <a:p/>
+          <a:lstStyle/>
+          <a:p>
+            <a:endParaRPr/>
+          </a:p>
         </p:txBody>
       </p:sp>
       <p:sp>
@@ -3458,7 +3457,7 @@
         </p:spPr>
         <p:txBody>
           <a:bodyPr wrap="square" lIns="25400" tIns="25400" rIns="25400" bIns="25400" rtlCol="0" anchor="t">
-            <a:normAutofit/>
+            <a:normAutofit lnSpcReduction="10000"/>
           </a:bodyPr>
           <a:lstStyle/>
           <a:p>
@@ -3499,7 +3498,7 @@
         </p:spPr>
         <p:txBody>
           <a:bodyPr wrap="square" lIns="25400" tIns="25400" rIns="25400" bIns="25400" rtlCol="0" anchor="t">
-            <a:normAutofit/>
+            <a:normAutofit fontScale="85000" lnSpcReduction="10000"/>
           </a:bodyPr>
           <a:lstStyle/>
           <a:p>
@@ -3543,7 +3542,7 @@
         </p:spPr>
         <p:txBody>
           <a:bodyPr wrap="square" lIns="25400" tIns="25400" rIns="25400" bIns="25400" rtlCol="0" anchor="t">
-            <a:normAutofit/>
+            <a:normAutofit lnSpcReduction="10000"/>
           </a:bodyPr>
           <a:lstStyle/>
           <a:p>
@@ -3559,18 +3558,7 @@
                 <a:ea typeface="Bookman Old Style" pitchFamily="34" charset="-122"/>
                 <a:cs typeface="Bookman Old Style" pitchFamily="34" charset="-120"/>
               </a:rPr>
-              <a:t>10 / </a:t>
-            </a:r>
-            <a:r>
-              <a:rPr lang="en-US" sz="1800" kern="0" spc="75" dirty="0" smtClean="0">
-                <a:solidFill>
-                  <a:srgbClr val="8A92A4"/>
-                </a:solidFill>
-                <a:latin typeface="Bookman Old Style" pitchFamily="34" charset="0"/>
-                <a:ea typeface="Bookman Old Style" pitchFamily="34" charset="-122"/>
-                <a:cs typeface="Bookman Old Style" pitchFamily="34" charset="-120"/>
-              </a:rPr>
-              <a:t>14</a:t>
+              <a:t>10 / 14</a:t>
             </a:r>
             <a:endParaRPr lang="en-US" sz="1800" dirty="0"/>
           </a:p>
@@ -3581,13 +3569,6 @@
   <p:clrMapOvr>
     <a:masterClrMapping/>
   </p:clrMapOvr>
-  <p:timing>
-    <p:tnLst>
-      <p:par>
-        <p:cTn id="1" dur="indefinite" restart="never" nodeType="tmRoot"/>
-      </p:par>
-    </p:tnLst>
-  </p:timing>
 </p:sld>
 </file>
 
@@ -3654,9 +3635,12 @@
         </p:spPr>
         <p:txBody>
           <a:bodyPr wrap="square">
-            <a:normAutofit/>
-          </a:bodyPr>
-          <a:p/>
+            <a:normAutofit fontScale="25000" lnSpcReduction="20000"/>
+          </a:bodyPr>
+          <a:lstStyle/>
+          <a:p>
+            <a:endParaRPr/>
+          </a:p>
         </p:txBody>
       </p:sp>
       <p:sp>
@@ -3678,7 +3662,7 @@
         </p:spPr>
         <p:txBody>
           <a:bodyPr wrap="square" lIns="25400" tIns="25400" rIns="25400" bIns="25400" rtlCol="0" anchor="t">
-            <a:normAutofit/>
+            <a:normAutofit lnSpcReduction="10000"/>
           </a:bodyPr>
           <a:lstStyle/>
           <a:p>
@@ -3719,7 +3703,7 @@
         </p:spPr>
         <p:txBody>
           <a:bodyPr wrap="square" lIns="25400" tIns="25400" rIns="25400" bIns="25400" rtlCol="0" anchor="t">
-            <a:normAutofit/>
+            <a:normAutofit fontScale="92500" lnSpcReduction="20000"/>
           </a:bodyPr>
           <a:lstStyle/>
           <a:p>
@@ -3767,9 +3751,12 @@
         </p:spPr>
         <p:txBody>
           <a:bodyPr wrap="square">
-            <a:normAutofit/>
-          </a:bodyPr>
-          <a:p/>
+            <a:normAutofit fontScale="92500" lnSpcReduction="20000"/>
+          </a:bodyPr>
+          <a:lstStyle/>
+          <a:p>
+            <a:endParaRPr/>
+          </a:p>
         </p:txBody>
       </p:sp>
       <p:sp>
@@ -3791,7 +3778,7 @@
         </p:spPr>
         <p:txBody>
           <a:bodyPr wrap="square" lIns="25400" tIns="25400" rIns="25400" bIns="25400" rtlCol="0" anchor="t">
-            <a:normAutofit/>
+            <a:normAutofit lnSpcReduction="10000"/>
           </a:bodyPr>
           <a:lstStyle/>
           <a:p>
@@ -3832,7 +3819,7 @@
         </p:spPr>
         <p:txBody>
           <a:bodyPr wrap="square" lIns="25400" tIns="25400" rIns="25400" bIns="25400" rtlCol="0" anchor="t">
-            <a:normAutofit/>
+            <a:normAutofit fontScale="77500" lnSpcReduction="20000"/>
           </a:bodyPr>
           <a:lstStyle/>
           <a:p>
@@ -3883,7 +3870,10 @@
           <a:bodyPr wrap="square">
             <a:normAutofit/>
           </a:bodyPr>
-          <a:p/>
+          <a:lstStyle/>
+          <a:p>
+            <a:endParaRPr/>
+          </a:p>
         </p:txBody>
       </p:sp>
       <p:sp>
@@ -3909,7 +3899,10 @@
           <a:bodyPr wrap="square">
             <a:normAutofit/>
           </a:bodyPr>
-          <a:p/>
+          <a:lstStyle/>
+          <a:p>
+            <a:endParaRPr/>
+          </a:p>
         </p:txBody>
       </p:sp>
       <p:sp>
@@ -3931,7 +3924,7 @@
         </p:spPr>
         <p:txBody>
           <a:bodyPr wrap="square" lIns="25400" tIns="25400" rIns="25400" bIns="25400" rtlCol="0" anchor="ctr">
-            <a:normAutofit/>
+            <a:normAutofit lnSpcReduction="10000"/>
           </a:bodyPr>
           <a:lstStyle/>
           <a:p>
@@ -3972,7 +3965,7 @@
         </p:spPr>
         <p:txBody>
           <a:bodyPr wrap="square" lIns="25400" tIns="25400" rIns="25400" bIns="25400" rtlCol="0" anchor="ctr">
-            <a:normAutofit/>
+            <a:normAutofit fontScale="70000" lnSpcReduction="20000"/>
           </a:bodyPr>
           <a:lstStyle/>
           <a:p>
@@ -4013,7 +4006,7 @@
         </p:spPr>
         <p:txBody>
           <a:bodyPr wrap="square" lIns="25400" tIns="25400" rIns="25400" bIns="25400" rtlCol="0" anchor="ctr">
-            <a:normAutofit/>
+            <a:normAutofit fontScale="85000" lnSpcReduction="10000"/>
           </a:bodyPr>
           <a:lstStyle/>
           <a:p>
@@ -4054,7 +4047,7 @@
         </p:spPr>
         <p:txBody>
           <a:bodyPr wrap="square" lIns="25400" tIns="25400" rIns="25400" bIns="25400" rtlCol="0" anchor="ctr">
-            <a:normAutofit/>
+            <a:normAutofit fontScale="70000" lnSpcReduction="20000"/>
           </a:bodyPr>
           <a:lstStyle/>
           <a:p>
@@ -4099,7 +4092,10 @@
           <a:bodyPr wrap="square">
             <a:normAutofit/>
           </a:bodyPr>
-          <a:p/>
+          <a:lstStyle/>
+          <a:p>
+            <a:endParaRPr/>
+          </a:p>
         </p:txBody>
       </p:sp>
       <p:sp>
@@ -4121,7 +4117,7 @@
         </p:spPr>
         <p:txBody>
           <a:bodyPr wrap="square" lIns="25400" tIns="25400" rIns="25400" bIns="25400" rtlCol="0" anchor="ctr">
-            <a:normAutofit/>
+            <a:normAutofit lnSpcReduction="10000"/>
           </a:bodyPr>
           <a:lstStyle/>
           <a:p>
@@ -4170,15 +4166,13 @@
               <a:buNone/>
             </a:pPr>
             <a:r>
-              <a:rPr lang="en-US" sz="1800" dirty="0">
+              <a:rPr lang="en-US" dirty="0">
                 <a:solidFill>
                   <a:srgbClr val="9AA1B0"/>
                 </a:solidFill>
                 <a:latin typeface="Bookman Old Style" pitchFamily="34" charset="0"/>
-                <a:ea typeface="Bookman Old Style" pitchFamily="34" charset="-122"/>
-                <a:cs typeface="Bookman Old Style" pitchFamily="34" charset="-120"/>
-              </a:rPr>
-              <a:t>TBD</a:t>
+              </a:rPr>
+              <a:t>No clusters</a:t>
             </a:r>
             <a:endParaRPr lang="en-US" sz="1800" dirty="0"/>
           </a:p>
@@ -4211,15 +4205,13 @@
               <a:buNone/>
             </a:pPr>
             <a:r>
-              <a:rPr lang="en-US" sz="1800" dirty="0">
+              <a:rPr lang="en-US" dirty="0">
                 <a:solidFill>
                   <a:srgbClr val="9AA1B0"/>
                 </a:solidFill>
                 <a:latin typeface="Bookman Old Style" pitchFamily="34" charset="0"/>
-                <a:ea typeface="Bookman Old Style" pitchFamily="34" charset="-122"/>
-                <a:cs typeface="Bookman Old Style" pitchFamily="34" charset="-120"/>
-              </a:rPr>
-              <a:t>TBD</a:t>
+              </a:rPr>
+              <a:t>0.65</a:t>
             </a:r>
             <a:endParaRPr lang="en-US" sz="1800" dirty="0"/>
           </a:p>
@@ -4252,15 +4244,13 @@
               <a:buNone/>
             </a:pPr>
             <a:r>
-              <a:rPr lang="en-US" sz="1800" dirty="0">
+              <a:rPr lang="en-US" dirty="0">
                 <a:solidFill>
                   <a:srgbClr val="000000"/>
                 </a:solidFill>
                 <a:latin typeface="Bookman Old Style" pitchFamily="34" charset="0"/>
-                <a:ea typeface="Bookman Old Style" pitchFamily="34" charset="-122"/>
-                <a:cs typeface="Bookman Old Style" pitchFamily="34" charset="-120"/>
-              </a:rPr>
-              <a:t>TBD</a:t>
+              </a:rPr>
+              <a:t>10ms</a:t>
             </a:r>
             <a:endParaRPr lang="en-US" sz="1800" dirty="0"/>
           </a:p>
@@ -4289,7 +4279,10 @@
           <a:bodyPr wrap="square">
             <a:normAutofit/>
           </a:bodyPr>
-          <a:p/>
+          <a:lstStyle/>
+          <a:p>
+            <a:endParaRPr/>
+          </a:p>
         </p:txBody>
       </p:sp>
       <p:sp>
@@ -4311,7 +4304,7 @@
         </p:spPr>
         <p:txBody>
           <a:bodyPr wrap="square" lIns="25400" tIns="25400" rIns="25400" bIns="25400" rtlCol="0" anchor="ctr">
-            <a:normAutofit/>
+            <a:normAutofit lnSpcReduction="10000"/>
           </a:bodyPr>
           <a:lstStyle/>
           <a:p>
@@ -4360,15 +4353,13 @@
               <a:buNone/>
             </a:pPr>
             <a:r>
-              <a:rPr lang="en-US" sz="1800" dirty="0">
+              <a:rPr lang="en-US" dirty="0">
                 <a:solidFill>
                   <a:srgbClr val="9AA1B0"/>
                 </a:solidFill>
                 <a:latin typeface="Bookman Old Style" pitchFamily="34" charset="0"/>
-                <a:ea typeface="Bookman Old Style" pitchFamily="34" charset="-122"/>
-                <a:cs typeface="Bookman Old Style" pitchFamily="34" charset="-120"/>
-              </a:rPr>
-              <a:t>TBD</a:t>
+              </a:rPr>
+              <a:t>0.48</a:t>
             </a:r>
             <a:endParaRPr lang="en-US" sz="1800" dirty="0"/>
           </a:p>
@@ -4401,15 +4392,13 @@
               <a:buNone/>
             </a:pPr>
             <a:r>
-              <a:rPr lang="en-US" sz="1800" dirty="0">
+              <a:rPr lang="en-US" dirty="0">
                 <a:solidFill>
                   <a:srgbClr val="9AA1B0"/>
                 </a:solidFill>
                 <a:latin typeface="Bookman Old Style" pitchFamily="34" charset="0"/>
-                <a:ea typeface="Bookman Old Style" pitchFamily="34" charset="-122"/>
-                <a:cs typeface="Bookman Old Style" pitchFamily="34" charset="-120"/>
-              </a:rPr>
-              <a:t>TBD</a:t>
+              </a:rPr>
+              <a:t>0.68</a:t>
             </a:r>
             <a:endParaRPr lang="en-US" sz="1800" dirty="0"/>
           </a:p>
@@ -4442,15 +4431,13 @@
               <a:buNone/>
             </a:pPr>
             <a:r>
-              <a:rPr lang="en-US" sz="1800" dirty="0">
+              <a:rPr lang="en-US" dirty="0">
                 <a:solidFill>
                   <a:srgbClr val="000000"/>
                 </a:solidFill>
                 <a:latin typeface="Bookman Old Style" pitchFamily="34" charset="0"/>
-                <a:ea typeface="Bookman Old Style" pitchFamily="34" charset="-122"/>
-                <a:cs typeface="Bookman Old Style" pitchFamily="34" charset="-120"/>
-              </a:rPr>
-              <a:t>TBD</a:t>
+              </a:rPr>
+              <a:t>45ms</a:t>
             </a:r>
             <a:endParaRPr lang="en-US" sz="1800" dirty="0"/>
           </a:p>
@@ -4479,7 +4466,10 @@
           <a:bodyPr wrap="square">
             <a:normAutofit/>
           </a:bodyPr>
-          <a:p/>
+          <a:lstStyle/>
+          <a:p>
+            <a:endParaRPr/>
+          </a:p>
         </p:txBody>
       </p:sp>
       <p:sp>
@@ -4501,7 +4491,7 @@
         </p:spPr>
         <p:txBody>
           <a:bodyPr wrap="square" lIns="25400" tIns="25400" rIns="25400" bIns="25400" rtlCol="0" anchor="ctr">
-            <a:normAutofit/>
+            <a:normAutofit fontScale="92500" lnSpcReduction="10000"/>
           </a:bodyPr>
           <a:lstStyle/>
           <a:p>
@@ -4550,15 +4540,13 @@
               <a:buNone/>
             </a:pPr>
             <a:r>
-              <a:rPr lang="en-US" sz="1800" dirty="0">
+              <a:rPr lang="en-US" dirty="0">
                 <a:solidFill>
                   <a:srgbClr val="9AA1B0"/>
                 </a:solidFill>
                 <a:latin typeface="Bookman Old Style" pitchFamily="34" charset="0"/>
-                <a:ea typeface="Bookman Old Style" pitchFamily="34" charset="-122"/>
-                <a:cs typeface="Bookman Old Style" pitchFamily="34" charset="-120"/>
-              </a:rPr>
-              <a:t>TBD</a:t>
+              </a:rPr>
+              <a:t>0.65</a:t>
             </a:r>
             <a:endParaRPr lang="en-US" sz="1800" dirty="0"/>
           </a:p>
@@ -4591,15 +4579,13 @@
               <a:buNone/>
             </a:pPr>
             <a:r>
-              <a:rPr lang="en-US" sz="1800" dirty="0">
+              <a:rPr lang="en-US" dirty="0">
                 <a:solidFill>
                   <a:srgbClr val="9AA1B0"/>
                 </a:solidFill>
                 <a:latin typeface="Bookman Old Style" pitchFamily="34" charset="0"/>
-                <a:ea typeface="Bookman Old Style" pitchFamily="34" charset="-122"/>
-                <a:cs typeface="Bookman Old Style" pitchFamily="34" charset="-120"/>
-              </a:rPr>
-              <a:t>TBD</a:t>
+              </a:rPr>
+              <a:t>0.72</a:t>
             </a:r>
             <a:endParaRPr lang="en-US" sz="1800" dirty="0"/>
           </a:p>
@@ -4632,15 +4618,13 @@
               <a:buNone/>
             </a:pPr>
             <a:r>
-              <a:rPr lang="en-US" sz="1800" dirty="0">
+              <a:rPr lang="en-US" dirty="0">
                 <a:solidFill>
                   <a:srgbClr val="000000"/>
                 </a:solidFill>
                 <a:latin typeface="Bookman Old Style" pitchFamily="34" charset="0"/>
-                <a:ea typeface="Bookman Old Style" pitchFamily="34" charset="-122"/>
-                <a:cs typeface="Bookman Old Style" pitchFamily="34" charset="-120"/>
-              </a:rPr>
-              <a:t>TBD</a:t>
+              </a:rPr>
+              <a:t>5ms</a:t>
             </a:r>
             <a:endParaRPr lang="en-US" sz="1800" dirty="0"/>
           </a:p>
@@ -4669,7 +4653,10 @@
           <a:bodyPr wrap="square">
             <a:normAutofit/>
           </a:bodyPr>
-          <a:p/>
+          <a:lstStyle/>
+          <a:p>
+            <a:endParaRPr/>
+          </a:p>
         </p:txBody>
       </p:sp>
       <p:sp>
@@ -4691,7 +4678,7 @@
         </p:spPr>
         <p:txBody>
           <a:bodyPr wrap="square" lIns="25400" tIns="25400" rIns="25400" bIns="25400" rtlCol="0" anchor="ctr">
-            <a:normAutofit/>
+            <a:normAutofit fontScale="55000" lnSpcReduction="20000"/>
           </a:bodyPr>
           <a:lstStyle/>
           <a:p>
@@ -4740,15 +4727,13 @@
               <a:buNone/>
             </a:pPr>
             <a:r>
-              <a:rPr lang="en-US" sz="1800" b="1" dirty="0">
+              <a:rPr lang="en-US" b="1" dirty="0">
                 <a:solidFill>
                   <a:srgbClr val="1E2A55"/>
                 </a:solidFill>
                 <a:latin typeface="Bookman Old Style" pitchFamily="34" charset="0"/>
-                <a:ea typeface="Bookman Old Style" pitchFamily="34" charset="-122"/>
-                <a:cs typeface="Bookman Old Style" pitchFamily="34" charset="-120"/>
-              </a:rPr>
-              <a:t>TBD</a:t>
+              </a:rPr>
+              <a:t>0.65</a:t>
             </a:r>
             <a:endParaRPr lang="en-US" sz="1800" dirty="0"/>
           </a:p>
@@ -4781,15 +4766,13 @@
               <a:buNone/>
             </a:pPr>
             <a:r>
-              <a:rPr lang="en-US" sz="1800" b="1" dirty="0">
+              <a:rPr lang="en-US" b="1" dirty="0">
                 <a:solidFill>
                   <a:srgbClr val="1E2A55"/>
                 </a:solidFill>
                 <a:latin typeface="Bookman Old Style" pitchFamily="34" charset="0"/>
-                <a:ea typeface="Bookman Old Style" pitchFamily="34" charset="-122"/>
-                <a:cs typeface="Bookman Old Style" pitchFamily="34" charset="-120"/>
-              </a:rPr>
-              <a:t>TBD</a:t>
+              </a:rPr>
+              <a:t>082</a:t>
             </a:r>
             <a:endParaRPr lang="en-US" sz="1800" dirty="0"/>
           </a:p>
@@ -4822,15 +4805,13 @@
               <a:buNone/>
             </a:pPr>
             <a:r>
-              <a:rPr lang="en-US" sz="1800" b="1" dirty="0">
+              <a:rPr lang="en-US" b="1" dirty="0">
                 <a:solidFill>
                   <a:srgbClr val="1E2A55"/>
                 </a:solidFill>
                 <a:latin typeface="Bookman Old Style" pitchFamily="34" charset="0"/>
-                <a:ea typeface="Bookman Old Style" pitchFamily="34" charset="-122"/>
-                <a:cs typeface="Bookman Old Style" pitchFamily="34" charset="-120"/>
-              </a:rPr>
-              <a:t>TBD</a:t>
+              </a:rPr>
+              <a:t>12ms</a:t>
             </a:r>
             <a:endParaRPr lang="en-US" sz="1800" dirty="0"/>
           </a:p>
@@ -4859,9 +4840,12 @@
         </p:spPr>
         <p:txBody>
           <a:bodyPr wrap="square">
-            <a:normAutofit/>
-          </a:bodyPr>
-          <a:p/>
+            <a:normAutofit fontScale="92500" lnSpcReduction="20000"/>
+          </a:bodyPr>
+          <a:lstStyle/>
+          <a:p>
+            <a:endParaRPr/>
+          </a:p>
         </p:txBody>
       </p:sp>
       <p:sp>
@@ -4883,7 +4867,7 @@
         </p:spPr>
         <p:txBody>
           <a:bodyPr wrap="square" lIns="25400" tIns="25400" rIns="25400" bIns="25400" rtlCol="0" anchor="t">
-            <a:normAutofit/>
+            <a:normAutofit lnSpcReduction="10000"/>
           </a:bodyPr>
           <a:lstStyle/>
           <a:p>
@@ -4924,7 +4908,7 @@
         </p:spPr>
         <p:txBody>
           <a:bodyPr wrap="square" lIns="25400" tIns="25400" rIns="25400" bIns="25400" rtlCol="0" anchor="t">
-            <a:normAutofit/>
+            <a:normAutofit fontScale="85000" lnSpcReduction="10000"/>
           </a:bodyPr>
           <a:lstStyle/>
           <a:p>
@@ -4975,7 +4959,10 @@
           <a:bodyPr wrap="square">
             <a:normAutofit/>
           </a:bodyPr>
-          <a:p/>
+          <a:lstStyle/>
+          <a:p>
+            <a:endParaRPr/>
+          </a:p>
         </p:txBody>
       </p:sp>
       <p:sp>
@@ -5001,7 +4988,10 @@
           <a:bodyPr wrap="square">
             <a:normAutofit/>
           </a:bodyPr>
-          <a:p/>
+          <a:lstStyle/>
+          <a:p>
+            <a:endParaRPr/>
+          </a:p>
         </p:txBody>
       </p:sp>
       <p:sp>
@@ -5023,7 +5013,7 @@
         </p:spPr>
         <p:txBody>
           <a:bodyPr wrap="square" lIns="25400" tIns="25400" rIns="25400" bIns="25400" rtlCol="0" anchor="ctr">
-            <a:normAutofit/>
+            <a:normAutofit lnSpcReduction="10000"/>
           </a:bodyPr>
           <a:lstStyle/>
           <a:p>
@@ -5064,7 +5054,7 @@
         </p:spPr>
         <p:txBody>
           <a:bodyPr wrap="square" lIns="25400" tIns="25400" rIns="25400" bIns="25400" rtlCol="0" anchor="ctr">
-            <a:normAutofit/>
+            <a:normAutofit fontScale="70000" lnSpcReduction="20000"/>
           </a:bodyPr>
           <a:lstStyle/>
           <a:p>
@@ -5105,7 +5095,7 @@
         </p:spPr>
         <p:txBody>
           <a:bodyPr wrap="square" lIns="25400" tIns="25400" rIns="25400" bIns="25400" rtlCol="0" anchor="ctr">
-            <a:normAutofit/>
+            <a:normAutofit fontScale="85000" lnSpcReduction="10000"/>
           </a:bodyPr>
           <a:lstStyle/>
           <a:p>
@@ -5146,7 +5136,7 @@
         </p:spPr>
         <p:txBody>
           <a:bodyPr wrap="square" lIns="25400" tIns="25400" rIns="25400" bIns="25400" rtlCol="0" anchor="ctr">
-            <a:normAutofit/>
+            <a:normAutofit fontScale="70000" lnSpcReduction="20000"/>
           </a:bodyPr>
           <a:lstStyle/>
           <a:p>
@@ -5191,7 +5181,10 @@
           <a:bodyPr wrap="square">
             <a:normAutofit/>
           </a:bodyPr>
-          <a:p/>
+          <a:lstStyle/>
+          <a:p>
+            <a:endParaRPr/>
+          </a:p>
         </p:txBody>
       </p:sp>
       <p:sp>
@@ -5213,7 +5206,7 @@
         </p:spPr>
         <p:txBody>
           <a:bodyPr wrap="square" lIns="25400" tIns="25400" rIns="25400" bIns="25400" rtlCol="0" anchor="ctr">
-            <a:normAutofit/>
+            <a:normAutofit lnSpcReduction="10000"/>
           </a:bodyPr>
           <a:lstStyle/>
           <a:p>
@@ -5262,15 +5255,13 @@
               <a:buNone/>
             </a:pPr>
             <a:r>
-              <a:rPr lang="en-US" sz="1800" dirty="0">
+              <a:rPr lang="en-US" dirty="0">
                 <a:solidFill>
                   <a:srgbClr val="9AA1B0"/>
                 </a:solidFill>
                 <a:latin typeface="Bookman Old Style" pitchFamily="34" charset="0"/>
-                <a:ea typeface="Bookman Old Style" pitchFamily="34" charset="-122"/>
-                <a:cs typeface="Bookman Old Style" pitchFamily="34" charset="-120"/>
-              </a:rPr>
-              <a:t>TBD</a:t>
+              </a:rPr>
+              <a:t>No clusters</a:t>
             </a:r>
             <a:endParaRPr lang="en-US" sz="1800" dirty="0"/>
           </a:p>
@@ -5303,15 +5294,13 @@
               <a:buNone/>
             </a:pPr>
             <a:r>
-              <a:rPr lang="en-US" sz="1800" dirty="0">
+              <a:rPr lang="en-US" dirty="0">
                 <a:solidFill>
                   <a:srgbClr val="9AA1B0"/>
                 </a:solidFill>
                 <a:latin typeface="Bookman Old Style" pitchFamily="34" charset="0"/>
-                <a:ea typeface="Bookman Old Style" pitchFamily="34" charset="-122"/>
-                <a:cs typeface="Bookman Old Style" pitchFamily="34" charset="-120"/>
-              </a:rPr>
-              <a:t>TBD</a:t>
+              </a:rPr>
+              <a:t>0.58</a:t>
             </a:r>
             <a:endParaRPr lang="en-US" sz="1800" dirty="0"/>
           </a:p>
@@ -5344,15 +5333,13 @@
               <a:buNone/>
             </a:pPr>
             <a:r>
-              <a:rPr lang="en-US" sz="1800" dirty="0">
+              <a:rPr lang="en-US" dirty="0">
                 <a:solidFill>
                   <a:srgbClr val="000000"/>
                 </a:solidFill>
                 <a:latin typeface="Bookman Old Style" pitchFamily="34" charset="0"/>
-                <a:ea typeface="Bookman Old Style" pitchFamily="34" charset="-122"/>
-                <a:cs typeface="Bookman Old Style" pitchFamily="34" charset="-120"/>
-              </a:rPr>
-              <a:t>TBD</a:t>
+              </a:rPr>
+              <a:t>10ms</a:t>
             </a:r>
             <a:endParaRPr lang="en-US" sz="1800" dirty="0"/>
           </a:p>
@@ -5381,7 +5368,10 @@
           <a:bodyPr wrap="square">
             <a:normAutofit/>
           </a:bodyPr>
-          <a:p/>
+          <a:lstStyle/>
+          <a:p>
+            <a:endParaRPr/>
+          </a:p>
         </p:txBody>
       </p:sp>
       <p:sp>
@@ -5403,7 +5393,7 @@
         </p:spPr>
         <p:txBody>
           <a:bodyPr wrap="square" lIns="25400" tIns="25400" rIns="25400" bIns="25400" rtlCol="0" anchor="ctr">
-            <a:normAutofit/>
+            <a:normAutofit lnSpcReduction="10000"/>
           </a:bodyPr>
           <a:lstStyle/>
           <a:p>
@@ -5452,15 +5442,13 @@
               <a:buNone/>
             </a:pPr>
             <a:r>
-              <a:rPr lang="en-US" sz="1800" dirty="0">
+              <a:rPr lang="en-US" dirty="0">
                 <a:solidFill>
                   <a:srgbClr val="9AA1B0"/>
                 </a:solidFill>
                 <a:latin typeface="Bookman Old Style" pitchFamily="34" charset="0"/>
-                <a:ea typeface="Bookman Old Style" pitchFamily="34" charset="-122"/>
-                <a:cs typeface="Bookman Old Style" pitchFamily="34" charset="-120"/>
-              </a:rPr>
-              <a:t>TBD</a:t>
+              </a:rPr>
+              <a:t>0.45</a:t>
             </a:r>
             <a:endParaRPr lang="en-US" sz="1800" dirty="0"/>
           </a:p>
@@ -5493,15 +5481,13 @@
               <a:buNone/>
             </a:pPr>
             <a:r>
-              <a:rPr lang="en-US" sz="1800" dirty="0">
+              <a:rPr lang="en-US" dirty="0">
                 <a:solidFill>
                   <a:srgbClr val="9AA1B0"/>
                 </a:solidFill>
                 <a:latin typeface="Bookman Old Style" pitchFamily="34" charset="0"/>
-                <a:ea typeface="Bookman Old Style" pitchFamily="34" charset="-122"/>
-                <a:cs typeface="Bookman Old Style" pitchFamily="34" charset="-120"/>
-              </a:rPr>
-              <a:t>TBD</a:t>
+              </a:rPr>
+              <a:t>0.64</a:t>
             </a:r>
             <a:endParaRPr lang="en-US" sz="1800" dirty="0"/>
           </a:p>
@@ -5534,15 +5520,13 @@
               <a:buNone/>
             </a:pPr>
             <a:r>
-              <a:rPr lang="en-US" sz="1800" dirty="0">
+              <a:rPr lang="en-US" dirty="0">
                 <a:solidFill>
                   <a:srgbClr val="000000"/>
                 </a:solidFill>
                 <a:latin typeface="Bookman Old Style" pitchFamily="34" charset="0"/>
-                <a:ea typeface="Bookman Old Style" pitchFamily="34" charset="-122"/>
-                <a:cs typeface="Bookman Old Style" pitchFamily="34" charset="-120"/>
-              </a:rPr>
-              <a:t>TBD</a:t>
+              </a:rPr>
+              <a:t>48ms</a:t>
             </a:r>
             <a:endParaRPr lang="en-US" sz="1800" dirty="0"/>
           </a:p>
@@ -5571,7 +5555,10 @@
           <a:bodyPr wrap="square">
             <a:normAutofit/>
           </a:bodyPr>
-          <a:p/>
+          <a:lstStyle/>
+          <a:p>
+            <a:endParaRPr/>
+          </a:p>
         </p:txBody>
       </p:sp>
       <p:sp>
@@ -5593,7 +5580,7 @@
         </p:spPr>
         <p:txBody>
           <a:bodyPr wrap="square" lIns="25400" tIns="25400" rIns="25400" bIns="25400" rtlCol="0" anchor="ctr">
-            <a:normAutofit/>
+            <a:normAutofit fontScale="92500" lnSpcReduction="10000"/>
           </a:bodyPr>
           <a:lstStyle/>
           <a:p>
@@ -5642,15 +5629,13 @@
               <a:buNone/>
             </a:pPr>
             <a:r>
-              <a:rPr lang="en-US" sz="1800" dirty="0">
+              <a:rPr lang="en-US" dirty="0">
                 <a:solidFill>
                   <a:srgbClr val="9AA1B0"/>
                 </a:solidFill>
                 <a:latin typeface="Bookman Old Style" pitchFamily="34" charset="0"/>
-                <a:ea typeface="Bookman Old Style" pitchFamily="34" charset="-122"/>
-                <a:cs typeface="Bookman Old Style" pitchFamily="34" charset="-120"/>
-              </a:rPr>
-              <a:t>TBD</a:t>
+              </a:rPr>
+              <a:t>0.65</a:t>
             </a:r>
             <a:endParaRPr lang="en-US" sz="1800" dirty="0"/>
           </a:p>
@@ -5683,15 +5668,13 @@
               <a:buNone/>
             </a:pPr>
             <a:r>
-              <a:rPr lang="en-US" sz="1800" dirty="0">
+              <a:rPr lang="en-US" dirty="0">
                 <a:solidFill>
                   <a:srgbClr val="9AA1B0"/>
                 </a:solidFill>
                 <a:latin typeface="Bookman Old Style" pitchFamily="34" charset="0"/>
-                <a:ea typeface="Bookman Old Style" pitchFamily="34" charset="-122"/>
-                <a:cs typeface="Bookman Old Style" pitchFamily="34" charset="-120"/>
-              </a:rPr>
-              <a:t>TBD</a:t>
+              </a:rPr>
+              <a:t>0.70</a:t>
             </a:r>
             <a:endParaRPr lang="en-US" sz="1800" dirty="0"/>
           </a:p>
@@ -5724,15 +5707,13 @@
               <a:buNone/>
             </a:pPr>
             <a:r>
-              <a:rPr lang="en-US" sz="1800" dirty="0">
+              <a:rPr lang="en-US" dirty="0">
                 <a:solidFill>
                   <a:srgbClr val="000000"/>
                 </a:solidFill>
                 <a:latin typeface="Bookman Old Style" pitchFamily="34" charset="0"/>
-                <a:ea typeface="Bookman Old Style" pitchFamily="34" charset="-122"/>
-                <a:cs typeface="Bookman Old Style" pitchFamily="34" charset="-120"/>
-              </a:rPr>
-              <a:t>TBD</a:t>
+              </a:rPr>
+              <a:t>5ms</a:t>
             </a:r>
             <a:endParaRPr lang="en-US" sz="1800" dirty="0"/>
           </a:p>
@@ -5761,7 +5742,10 @@
           <a:bodyPr wrap="square">
             <a:normAutofit/>
           </a:bodyPr>
-          <a:p/>
+          <a:lstStyle/>
+          <a:p>
+            <a:endParaRPr/>
+          </a:p>
         </p:txBody>
       </p:sp>
       <p:sp>
@@ -5783,7 +5767,7 @@
         </p:spPr>
         <p:txBody>
           <a:bodyPr wrap="square" lIns="25400" tIns="25400" rIns="25400" bIns="25400" rtlCol="0" anchor="ctr">
-            <a:normAutofit/>
+            <a:normAutofit fontScale="55000" lnSpcReduction="20000"/>
           </a:bodyPr>
           <a:lstStyle/>
           <a:p>
@@ -5832,15 +5816,13 @@
               <a:buNone/>
             </a:pPr>
             <a:r>
-              <a:rPr lang="en-US" sz="1800" b="1" dirty="0">
+              <a:rPr lang="en-US" b="1" dirty="0">
                 <a:solidFill>
                   <a:srgbClr val="1E2A55"/>
                 </a:solidFill>
                 <a:latin typeface="Bookman Old Style" pitchFamily="34" charset="0"/>
-                <a:ea typeface="Bookman Old Style" pitchFamily="34" charset="-122"/>
-                <a:cs typeface="Bookman Old Style" pitchFamily="34" charset="-120"/>
-              </a:rPr>
-              <a:t>TBD</a:t>
+              </a:rPr>
+              <a:t>0.65</a:t>
             </a:r>
             <a:endParaRPr lang="en-US" sz="1800" dirty="0"/>
           </a:p>
@@ -5873,15 +5855,13 @@
               <a:buNone/>
             </a:pPr>
             <a:r>
-              <a:rPr lang="en-US" sz="1800" b="1" dirty="0">
+              <a:rPr lang="en-US" b="1" dirty="0">
                 <a:solidFill>
                   <a:srgbClr val="1E2A55"/>
                 </a:solidFill>
                 <a:latin typeface="Bookman Old Style" pitchFamily="34" charset="0"/>
-                <a:ea typeface="Bookman Old Style" pitchFamily="34" charset="-122"/>
-                <a:cs typeface="Bookman Old Style" pitchFamily="34" charset="-120"/>
-              </a:rPr>
-              <a:t>TBD</a:t>
+              </a:rPr>
+              <a:t>0.79</a:t>
             </a:r>
             <a:endParaRPr lang="en-US" sz="1800" dirty="0"/>
           </a:p>
@@ -5914,15 +5894,13 @@
               <a:buNone/>
             </a:pPr>
             <a:r>
-              <a:rPr lang="en-US" sz="1800" b="1" dirty="0">
+              <a:rPr lang="en-US" b="1" dirty="0">
                 <a:solidFill>
                   <a:srgbClr val="1E2A55"/>
                 </a:solidFill>
                 <a:latin typeface="Bookman Old Style" pitchFamily="34" charset="0"/>
-                <a:ea typeface="Bookman Old Style" pitchFamily="34" charset="-122"/>
-                <a:cs typeface="Bookman Old Style" pitchFamily="34" charset="-120"/>
-              </a:rPr>
-              <a:t>TBD</a:t>
+              </a:rPr>
+              <a:t>12ms</a:t>
             </a:r>
             <a:endParaRPr lang="en-US" sz="1800" dirty="0"/>
           </a:p>
@@ -5949,9 +5927,12 @@
         </p:spPr>
         <p:txBody>
           <a:bodyPr wrap="square">
-            <a:normAutofit/>
-          </a:bodyPr>
-          <a:p/>
+            <a:normAutofit fontScale="25000" lnSpcReduction="20000"/>
+          </a:bodyPr>
+          <a:lstStyle/>
+          <a:p>
+            <a:endParaRPr/>
+          </a:p>
         </p:txBody>
       </p:sp>
       <p:sp>
@@ -5973,7 +5954,7 @@
         </p:spPr>
         <p:txBody>
           <a:bodyPr wrap="square" lIns="25400" tIns="25400" rIns="25400" bIns="25400" rtlCol="0" anchor="t">
-            <a:normAutofit/>
+            <a:normAutofit fontScale="92500"/>
           </a:bodyPr>
           <a:lstStyle/>
           <a:p>
@@ -6025,7 +6006,7 @@
         </p:spPr>
         <p:txBody>
           <a:bodyPr wrap="square" lIns="25400" tIns="25400" rIns="25400" bIns="25400" rtlCol="0" anchor="t">
-            <a:normAutofit/>
+            <a:normAutofit lnSpcReduction="10000"/>
           </a:bodyPr>
           <a:lstStyle/>
           <a:p>
@@ -6041,18 +6022,7 @@
                 <a:ea typeface="Bookman Old Style" pitchFamily="34" charset="-122"/>
                 <a:cs typeface="Bookman Old Style" pitchFamily="34" charset="-120"/>
               </a:rPr>
-              <a:t>11 / </a:t>
-            </a:r>
-            <a:r>
-              <a:rPr lang="en-US" sz="1800" kern="0" spc="75" dirty="0" smtClean="0">
-                <a:solidFill>
-                  <a:srgbClr val="8A92A4"/>
-                </a:solidFill>
-                <a:latin typeface="Bookman Old Style" pitchFamily="34" charset="0"/>
-                <a:ea typeface="Bookman Old Style" pitchFamily="34" charset="-122"/>
-                <a:cs typeface="Bookman Old Style" pitchFamily="34" charset="-120"/>
-              </a:rPr>
-              <a:t>14</a:t>
+              <a:t>11 / 14</a:t>
             </a:r>
             <a:endParaRPr lang="en-US" sz="1800" dirty="0"/>
           </a:p>
@@ -6063,13 +6033,6 @@
   <p:clrMapOvr>
     <a:masterClrMapping/>
   </p:clrMapOvr>
-  <p:timing>
-    <p:tnLst>
-      <p:par>
-        <p:cTn id="1" dur="indefinite" restart="never" nodeType="tmRoot"/>
-      </p:par>
-    </p:tnLst>
-  </p:timing>
 </p:sld>
 </file>
 
@@ -6136,9 +6099,12 @@
         </p:spPr>
         <p:txBody>
           <a:bodyPr wrap="square">
-            <a:normAutofit/>
-          </a:bodyPr>
-          <a:p/>
+            <a:normAutofit fontScale="25000" lnSpcReduction="20000"/>
+          </a:bodyPr>
+          <a:lstStyle/>
+          <a:p>
+            <a:endParaRPr/>
+          </a:p>
         </p:txBody>
       </p:sp>
       <p:sp>
@@ -6160,7 +6126,7 @@
         </p:spPr>
         <p:txBody>
           <a:bodyPr wrap="square" lIns="25400" tIns="25400" rIns="25400" bIns="25400" rtlCol="0" anchor="t">
-            <a:normAutofit/>
+            <a:normAutofit lnSpcReduction="10000"/>
           </a:bodyPr>
           <a:lstStyle/>
           <a:p>
@@ -6201,7 +6167,7 @@
         </p:spPr>
         <p:txBody>
           <a:bodyPr wrap="square" lIns="25400" tIns="25400" rIns="25400" bIns="25400" rtlCol="0" anchor="t">
-            <a:normAutofit/>
+            <a:normAutofit fontScale="92500" lnSpcReduction="20000"/>
           </a:bodyPr>
           <a:lstStyle/>
           <a:p>
@@ -6249,7 +6215,10 @@
           <a:bodyPr wrap="square">
             <a:normAutofit/>
           </a:bodyPr>
-          <a:p/>
+          <a:lstStyle/>
+          <a:p>
+            <a:endParaRPr/>
+          </a:p>
         </p:txBody>
       </p:sp>
       <p:sp>
@@ -6275,7 +6244,10 @@
           <a:bodyPr wrap="square">
             <a:normAutofit/>
           </a:bodyPr>
-          <a:p/>
+          <a:lstStyle/>
+          <a:p>
+            <a:endParaRPr/>
+          </a:p>
         </p:txBody>
       </p:sp>
       <p:sp>
@@ -6297,7 +6269,7 @@
         </p:spPr>
         <p:txBody>
           <a:bodyPr wrap="square" lIns="25400" tIns="25400" rIns="25400" bIns="25400" rtlCol="0" anchor="t">
-            <a:normAutofit/>
+            <a:normAutofit lnSpcReduction="10000"/>
           </a:bodyPr>
           <a:lstStyle/>
           <a:p>
@@ -6356,7 +6328,10 @@
           <a:bodyPr wrap="square">
             <a:normAutofit/>
           </a:bodyPr>
-          <a:p/>
+          <a:lstStyle/>
+          <a:p>
+            <a:endParaRPr/>
+          </a:p>
         </p:txBody>
       </p:sp>
       <p:sp>
@@ -6378,7 +6353,7 @@
         </p:spPr>
         <p:txBody>
           <a:bodyPr wrap="square" lIns="25400" tIns="25400" rIns="25400" bIns="25400" rtlCol="0" anchor="t">
-            <a:normAutofit/>
+            <a:normAutofit lnSpcReduction="10000"/>
           </a:bodyPr>
           <a:lstStyle/>
           <a:p>
@@ -6419,7 +6394,7 @@
         </p:spPr>
         <p:txBody>
           <a:bodyPr wrap="square" lIns="25400" tIns="25400" rIns="25400" bIns="25400" rtlCol="0" anchor="t">
-            <a:normAutofit/>
+            <a:normAutofit fontScale="92500"/>
           </a:bodyPr>
           <a:lstStyle/>
           <a:p>
@@ -6464,9 +6439,12 @@
         </p:spPr>
         <p:txBody>
           <a:bodyPr wrap="square">
-            <a:normAutofit/>
-          </a:bodyPr>
-          <a:p/>
+            <a:normAutofit fontScale="92500" lnSpcReduction="10000"/>
+          </a:bodyPr>
+          <a:lstStyle/>
+          <a:p>
+            <a:endParaRPr/>
+          </a:p>
         </p:txBody>
       </p:sp>
       <p:sp>
@@ -6488,7 +6466,7 @@
         </p:spPr>
         <p:txBody>
           <a:bodyPr wrap="square" lIns="25400" tIns="25400" rIns="25400" bIns="25400" rtlCol="0" anchor="t">
-            <a:normAutofit/>
+            <a:normAutofit lnSpcReduction="10000"/>
           </a:bodyPr>
           <a:lstStyle/>
           <a:p>
@@ -6533,7 +6511,10 @@
           <a:bodyPr wrap="square">
             <a:normAutofit/>
           </a:bodyPr>
-          <a:p/>
+          <a:lstStyle/>
+          <a:p>
+            <a:endParaRPr/>
+          </a:p>
         </p:txBody>
       </p:sp>
       <p:sp>
@@ -6555,7 +6536,7 @@
         </p:spPr>
         <p:txBody>
           <a:bodyPr wrap="square" lIns="25400" tIns="25400" rIns="25400" bIns="25400" rtlCol="0" anchor="t">
-            <a:normAutofit/>
+            <a:normAutofit lnSpcReduction="10000"/>
           </a:bodyPr>
           <a:lstStyle/>
           <a:p>
@@ -6614,7 +6595,10 @@
           <a:bodyPr wrap="square">
             <a:normAutofit/>
           </a:bodyPr>
-          <a:p/>
+          <a:lstStyle/>
+          <a:p>
+            <a:endParaRPr/>
+          </a:p>
         </p:txBody>
       </p:sp>
       <p:sp>
@@ -6636,7 +6620,7 @@
         </p:spPr>
         <p:txBody>
           <a:bodyPr wrap="square" lIns="25400" tIns="25400" rIns="25400" bIns="25400" rtlCol="0" anchor="t">
-            <a:normAutofit/>
+            <a:normAutofit lnSpcReduction="10000"/>
           </a:bodyPr>
           <a:lstStyle/>
           <a:p>
@@ -6649,10 +6633,8 @@
                   <a:srgbClr val="1E2A55"/>
                 </a:solidFill>
                 <a:latin typeface="Bookman Old Style" pitchFamily="34" charset="0"/>
-                <a:ea typeface="Bookman Old Style" pitchFamily="34" charset="-122"/>
-                <a:cs typeface="Bookman Old Style" pitchFamily="34" charset="-120"/>
-              </a:rPr>
-              <a:t>Team Member 2</a:t>
+              </a:rPr>
+              <a:t>Shanmukh</a:t>
             </a:r>
             <a:endParaRPr lang="en-US" sz="2175" dirty="0"/>
           </a:p>
@@ -6666,18 +6648,18 @@
         </p:nvSpPr>
         <p:spPr>
           <a:xfrm>
-            <a:off x="2524125" y="5197525"/>
-            <a:ext cx="8135942" cy="419100"/>
-          </a:xfrm>
-          <a:prstGeom prst="rect">
-            <a:avLst/>
-          </a:prstGeom>
-          <a:noFill/>
-          <a:ln/>
-        </p:spPr>
-        <p:txBody>
-          <a:bodyPr wrap="square" lIns="25400" tIns="25400" rIns="25400" bIns="25400" rtlCol="0" anchor="t">
-            <a:normAutofit/>
+            <a:off x="2524125" y="5197524"/>
+            <a:ext cx="10416020" cy="476249"/>
+          </a:xfrm>
+          <a:prstGeom prst="rect">
+            <a:avLst/>
+          </a:prstGeom>
+          <a:noFill/>
+          <a:ln/>
+        </p:spPr>
+        <p:txBody>
+          <a:bodyPr wrap="square" lIns="25400" tIns="25400" rIns="25400" bIns="25400" rtlCol="0" anchor="t">
+            <a:noAutofit/>
           </a:bodyPr>
           <a:lstStyle/>
           <a:p>
@@ -6685,7 +6667,7 @@
               <a:buNone/>
             </a:pPr>
             <a:r>
-              <a:rPr lang="en-US" sz="2550" dirty="0">
+              <a:rPr lang="en-US" sz="2400" dirty="0">
                 <a:solidFill>
                   <a:srgbClr val="000000"/>
                 </a:solidFill>
@@ -6695,7 +6677,7 @@
               </a:rPr>
               <a:t>Clustering &amp; risk-classification model design, training &amp; evaluation</a:t>
             </a:r>
-            <a:endParaRPr lang="en-US" sz="2550" dirty="0"/>
+            <a:endParaRPr lang="en-US" sz="2400" dirty="0"/>
           </a:p>
         </p:txBody>
       </p:sp>
@@ -6722,9 +6704,12 @@
         </p:spPr>
         <p:txBody>
           <a:bodyPr wrap="square">
-            <a:normAutofit/>
-          </a:bodyPr>
-          <a:p/>
+            <a:normAutofit fontScale="92500" lnSpcReduction="10000"/>
+          </a:bodyPr>
+          <a:lstStyle/>
+          <a:p>
+            <a:endParaRPr/>
+          </a:p>
         </p:txBody>
       </p:sp>
       <p:sp>
@@ -6746,7 +6731,7 @@
         </p:spPr>
         <p:txBody>
           <a:bodyPr wrap="square" lIns="25400" tIns="25400" rIns="25400" bIns="25400" rtlCol="0" anchor="t">
-            <a:normAutofit/>
+            <a:normAutofit lnSpcReduction="10000"/>
           </a:bodyPr>
           <a:lstStyle/>
           <a:p>
@@ -6791,7 +6776,10 @@
           <a:bodyPr wrap="square">
             <a:normAutofit/>
           </a:bodyPr>
-          <a:p/>
+          <a:lstStyle/>
+          <a:p>
+            <a:endParaRPr/>
+          </a:p>
         </p:txBody>
       </p:sp>
       <p:sp>
@@ -6813,7 +6801,7 @@
         </p:spPr>
         <p:txBody>
           <a:bodyPr wrap="square" lIns="25400" tIns="25400" rIns="25400" bIns="25400" rtlCol="0" anchor="t">
-            <a:normAutofit/>
+            <a:normAutofit lnSpcReduction="10000"/>
           </a:bodyPr>
           <a:lstStyle/>
           <a:p>
@@ -6872,7 +6860,10 @@
           <a:bodyPr wrap="square">
             <a:normAutofit/>
           </a:bodyPr>
-          <a:p/>
+          <a:lstStyle/>
+          <a:p>
+            <a:endParaRPr/>
+          </a:p>
         </p:txBody>
       </p:sp>
       <p:sp>
@@ -6894,7 +6885,7 @@
         </p:spPr>
         <p:txBody>
           <a:bodyPr wrap="square" lIns="25400" tIns="25400" rIns="25400" bIns="25400" rtlCol="0" anchor="t">
-            <a:normAutofit/>
+            <a:normAutofit lnSpcReduction="10000"/>
           </a:bodyPr>
           <a:lstStyle/>
           <a:p>
@@ -6907,10 +6898,8 @@
                   <a:srgbClr val="1E2A55"/>
                 </a:solidFill>
                 <a:latin typeface="Bookman Old Style" pitchFamily="34" charset="0"/>
-                <a:ea typeface="Bookman Old Style" pitchFamily="34" charset="-122"/>
-                <a:cs typeface="Bookman Old Style" pitchFamily="34" charset="-120"/>
-              </a:rPr>
-              <a:t>Team Member 3</a:t>
+              </a:rPr>
+              <a:t>Rithik</a:t>
             </a:r>
             <a:endParaRPr lang="en-US" sz="2175" dirty="0"/>
           </a:p>
@@ -6925,17 +6914,17 @@
         <p:spPr>
           <a:xfrm>
             <a:off x="2524125" y="6689675"/>
-            <a:ext cx="6639624" cy="419100"/>
-          </a:xfrm>
-          <a:prstGeom prst="rect">
-            <a:avLst/>
-          </a:prstGeom>
-          <a:noFill/>
-          <a:ln/>
-        </p:spPr>
-        <p:txBody>
-          <a:bodyPr wrap="square" lIns="25400" tIns="25400" rIns="25400" bIns="25400" rtlCol="0" anchor="t">
-            <a:normAutofit/>
+            <a:ext cx="10719688" cy="390525"/>
+          </a:xfrm>
+          <a:prstGeom prst="rect">
+            <a:avLst/>
+          </a:prstGeom>
+          <a:noFill/>
+          <a:ln/>
+        </p:spPr>
+        <p:txBody>
+          <a:bodyPr wrap="square" lIns="25400" tIns="25400" rIns="25400" bIns="25400" rtlCol="0" anchor="t">
+            <a:noAutofit/>
           </a:bodyPr>
           <a:lstStyle/>
           <a:p>
@@ -6943,7 +6932,7 @@
               <a:buNone/>
             </a:pPr>
             <a:r>
-              <a:rPr lang="en-US" sz="2550" dirty="0">
+              <a:rPr lang="en-US" sz="2400" dirty="0">
                 <a:solidFill>
                   <a:srgbClr val="000000"/>
                 </a:solidFill>
@@ -6953,7 +6942,7 @@
               </a:rPr>
               <a:t>Real-time alert web interface (React, Tailwind &amp; FastAPI) + integration</a:t>
             </a:r>
-            <a:endParaRPr lang="en-US" sz="2550" dirty="0"/>
+            <a:endParaRPr lang="en-US" sz="2400" dirty="0"/>
           </a:p>
         </p:txBody>
       </p:sp>
@@ -6980,9 +6969,12 @@
         </p:spPr>
         <p:txBody>
           <a:bodyPr wrap="square">
-            <a:normAutofit/>
-          </a:bodyPr>
-          <a:p/>
+            <a:normAutofit fontScale="92500" lnSpcReduction="10000"/>
+          </a:bodyPr>
+          <a:lstStyle/>
+          <a:p>
+            <a:endParaRPr/>
+          </a:p>
         </p:txBody>
       </p:sp>
       <p:sp>
@@ -7004,7 +6996,7 @@
         </p:spPr>
         <p:txBody>
           <a:bodyPr wrap="square" lIns="25400" tIns="25400" rIns="25400" bIns="25400" rtlCol="0" anchor="t">
-            <a:normAutofit/>
+            <a:normAutofit lnSpcReduction="10000"/>
           </a:bodyPr>
           <a:lstStyle/>
           <a:p>
@@ -7049,7 +7041,10 @@
           <a:bodyPr wrap="square">
             <a:normAutofit/>
           </a:bodyPr>
-          <a:p/>
+          <a:lstStyle/>
+          <a:p>
+            <a:endParaRPr/>
+          </a:p>
         </p:txBody>
       </p:sp>
       <p:sp>
@@ -7071,7 +7066,7 @@
         </p:spPr>
         <p:txBody>
           <a:bodyPr wrap="square" lIns="25400" tIns="25400" rIns="25400" bIns="25400" rtlCol="0" anchor="t">
-            <a:normAutofit/>
+            <a:normAutofit lnSpcReduction="10000"/>
           </a:bodyPr>
           <a:lstStyle/>
           <a:p>
@@ -7130,7 +7125,10 @@
           <a:bodyPr wrap="square">
             <a:normAutofit/>
           </a:bodyPr>
-          <a:p/>
+          <a:lstStyle/>
+          <a:p>
+            <a:endParaRPr/>
+          </a:p>
         </p:txBody>
       </p:sp>
       <p:sp>
@@ -7152,7 +7150,7 @@
         </p:spPr>
         <p:txBody>
           <a:bodyPr wrap="square" lIns="25400" tIns="25400" rIns="25400" bIns="25400" rtlCol="0" anchor="t">
-            <a:normAutofit/>
+            <a:normAutofit lnSpcReduction="10000"/>
           </a:bodyPr>
           <a:lstStyle/>
           <a:p>
@@ -7160,7 +7158,7 @@
               <a:buNone/>
             </a:pPr>
             <a:r>
-              <a:rPr lang="en-US" sz="2175" b="1" dirty="0">
+              <a:rPr lang="en-US" sz="2175" b="1" dirty="0" err="1">
                 <a:solidFill>
                   <a:srgbClr val="1E2A55"/>
                 </a:solidFill>
@@ -7168,7 +7166,7 @@
                 <a:ea typeface="Bookman Old Style" pitchFamily="34" charset="-122"/>
                 <a:cs typeface="Bookman Old Style" pitchFamily="34" charset="-120"/>
               </a:rPr>
-              <a:t>Team Member 4</a:t>
+              <a:t>Inderneel</a:t>
             </a:r>
             <a:endParaRPr lang="en-US" sz="2175" dirty="0"/>
           </a:p>
@@ -7183,17 +7181,17 @@
         <p:spPr>
           <a:xfrm>
             <a:off x="2524125" y="8181975"/>
-            <a:ext cx="7551822" cy="419100"/>
-          </a:xfrm>
-          <a:prstGeom prst="rect">
-            <a:avLst/>
-          </a:prstGeom>
-          <a:noFill/>
-          <a:ln/>
-        </p:spPr>
-        <p:txBody>
-          <a:bodyPr wrap="square" lIns="25400" tIns="25400" rIns="25400" bIns="25400" rtlCol="0" anchor="t">
-            <a:normAutofit/>
+            <a:ext cx="10416020" cy="419100"/>
+          </a:xfrm>
+          <a:prstGeom prst="rect">
+            <a:avLst/>
+          </a:prstGeom>
+          <a:noFill/>
+          <a:ln/>
+        </p:spPr>
+        <p:txBody>
+          <a:bodyPr wrap="square" lIns="25400" tIns="25400" rIns="25400" bIns="25400" rtlCol="0" anchor="t">
+            <a:noAutofit/>
           </a:bodyPr>
           <a:lstStyle/>
           <a:p>
@@ -7201,7 +7199,7 @@
               <a:buNone/>
             </a:pPr>
             <a:r>
-              <a:rPr lang="en-US" sz="2550" dirty="0">
+              <a:rPr lang="en-US" sz="2400" dirty="0">
                 <a:solidFill>
                   <a:srgbClr val="000000"/>
                 </a:solidFill>
@@ -7211,7 +7209,7 @@
               </a:rPr>
               <a:t>Live data integration (weather/traffic API), testing &amp; ablation</a:t>
             </a:r>
-            <a:endParaRPr lang="en-US" sz="2550" dirty="0"/>
+            <a:endParaRPr lang="en-US" sz="2400" dirty="0"/>
           </a:p>
         </p:txBody>
       </p:sp>
@@ -7238,9 +7236,12 @@
         </p:spPr>
         <p:txBody>
           <a:bodyPr wrap="square">
-            <a:normAutofit/>
-          </a:bodyPr>
-          <a:p/>
+            <a:normAutofit fontScale="92500" lnSpcReduction="10000"/>
+          </a:bodyPr>
+          <a:lstStyle/>
+          <a:p>
+            <a:endParaRPr/>
+          </a:p>
         </p:txBody>
       </p:sp>
       <p:sp>
@@ -7262,7 +7263,7 @@
         </p:spPr>
         <p:txBody>
           <a:bodyPr wrap="square" lIns="25400" tIns="25400" rIns="25400" bIns="25400" rtlCol="0" anchor="t">
-            <a:normAutofit/>
+            <a:normAutofit lnSpcReduction="10000"/>
           </a:bodyPr>
           <a:lstStyle/>
           <a:p>
@@ -7309,7 +7310,10 @@
           <a:bodyPr wrap="square">
             <a:normAutofit/>
           </a:bodyPr>
-          <a:p/>
+          <a:lstStyle/>
+          <a:p>
+            <a:endParaRPr/>
+          </a:p>
         </p:txBody>
       </p:sp>
       <p:sp>
@@ -7335,7 +7339,10 @@
           <a:bodyPr wrap="square">
             <a:normAutofit/>
           </a:bodyPr>
-          <a:p/>
+          <a:lstStyle/>
+          <a:p>
+            <a:endParaRPr/>
+          </a:p>
         </p:txBody>
       </p:sp>
       <p:sp>
@@ -7357,7 +7364,7 @@
         </p:spPr>
         <p:txBody>
           <a:bodyPr wrap="square" lIns="25400" tIns="25400" rIns="25400" bIns="25400" rtlCol="0" anchor="t">
-            <a:normAutofit/>
+            <a:normAutofit lnSpcReduction="10000"/>
           </a:bodyPr>
           <a:lstStyle/>
           <a:p>
@@ -7420,7 +7427,7 @@
         </p:spPr>
         <p:txBody>
           <a:bodyPr wrap="square" lIns="25400" tIns="25400" rIns="25400" bIns="25400" rtlCol="0" anchor="t">
-            <a:normAutofit/>
+            <a:normAutofit lnSpcReduction="10000"/>
           </a:bodyPr>
           <a:lstStyle/>
           <a:p>
@@ -7428,7 +7435,7 @@
               <a:buNone/>
             </a:pPr>
             <a:r>
-              <a:rPr lang="en-US" sz="1800" kern="0" spc="75" dirty="0" smtClean="0">
+              <a:rPr lang="en-US" sz="1800" kern="0" spc="75" dirty="0">
                 <a:solidFill>
                   <a:srgbClr val="8A92A4"/>
                 </a:solidFill>
@@ -7436,29 +7443,7 @@
                 <a:ea typeface="Bookman Old Style" pitchFamily="34" charset="-122"/>
                 <a:cs typeface="Bookman Old Style" pitchFamily="34" charset="-120"/>
               </a:rPr>
-              <a:t>12 </a:t>
-            </a:r>
-            <a:r>
-              <a:rPr lang="en-US" sz="1800" kern="0" spc="75" dirty="0">
-                <a:solidFill>
-                  <a:srgbClr val="8A92A4"/>
-                </a:solidFill>
-                <a:latin typeface="Bookman Old Style" pitchFamily="34" charset="0"/>
-                <a:ea typeface="Bookman Old Style" pitchFamily="34" charset="-122"/>
-                <a:cs typeface="Bookman Old Style" pitchFamily="34" charset="-120"/>
-              </a:rPr>
-              <a:t>/ </a:t>
-            </a:r>
-            <a:r>
-              <a:rPr lang="en-US" sz="1800" kern="0" spc="75" dirty="0" smtClean="0">
-                <a:solidFill>
-                  <a:srgbClr val="8A92A4"/>
-                </a:solidFill>
-                <a:latin typeface="Bookman Old Style" pitchFamily="34" charset="0"/>
-                <a:ea typeface="Bookman Old Style" pitchFamily="34" charset="-122"/>
-                <a:cs typeface="Bookman Old Style" pitchFamily="34" charset="-120"/>
-              </a:rPr>
-              <a:t>14</a:t>
+              <a:t>12 / 14</a:t>
             </a:r>
             <a:endParaRPr lang="en-US" sz="1800" dirty="0"/>
           </a:p>
@@ -7469,13 +7454,6 @@
   <p:clrMapOvr>
     <a:masterClrMapping/>
   </p:clrMapOvr>
-  <p:timing>
-    <p:tnLst>
-      <p:par>
-        <p:cTn id="1" dur="indefinite" restart="never" nodeType="tmRoot"/>
-      </p:par>
-    </p:tnLst>
-  </p:timing>
 </p:sld>
 </file>
 
@@ -7542,9 +7520,12 @@
         </p:spPr>
         <p:txBody>
           <a:bodyPr wrap="square">
-            <a:normAutofit/>
-          </a:bodyPr>
-          <a:p/>
+            <a:normAutofit fontScale="25000" lnSpcReduction="20000"/>
+          </a:bodyPr>
+          <a:lstStyle/>
+          <a:p>
+            <a:endParaRPr/>
+          </a:p>
         </p:txBody>
       </p:sp>
       <p:sp>
@@ -7566,7 +7547,7 @@
         </p:spPr>
         <p:txBody>
           <a:bodyPr wrap="square" lIns="25400" tIns="25400" rIns="25400" bIns="25400" rtlCol="0" anchor="t">
-            <a:normAutofit/>
+            <a:normAutofit lnSpcReduction="10000"/>
           </a:bodyPr>
           <a:lstStyle/>
           <a:p>
@@ -7607,7 +7588,7 @@
         </p:spPr>
         <p:txBody>
           <a:bodyPr wrap="square" lIns="25400" tIns="25400" rIns="25400" bIns="25400" rtlCol="0" anchor="t">
-            <a:normAutofit/>
+            <a:normAutofit fontScale="92500" lnSpcReduction="20000"/>
           </a:bodyPr>
           <a:lstStyle/>
           <a:p>
@@ -7669,7 +7650,10 @@
           <a:bodyPr wrap="square">
             <a:normAutofit/>
           </a:bodyPr>
-          <a:p/>
+          <a:lstStyle/>
+          <a:p>
+            <a:endParaRPr/>
+          </a:p>
         </p:txBody>
       </p:sp>
       <p:sp>
@@ -7691,7 +7675,7 @@
         </p:spPr>
         <p:txBody>
           <a:bodyPr wrap="square" lIns="25400" tIns="25400" rIns="25400" bIns="25400" rtlCol="0" anchor="t">
-            <a:normAutofit/>
+            <a:normAutofit lnSpcReduction="10000"/>
           </a:bodyPr>
           <a:lstStyle/>
           <a:p>
@@ -7732,7 +7716,7 @@
         </p:spPr>
         <p:txBody>
           <a:bodyPr wrap="square" lIns="25400" tIns="25400" rIns="25400" bIns="25400" rtlCol="0" anchor="t">
-            <a:normAutofit/>
+            <a:normAutofit fontScale="92500" lnSpcReduction="10000"/>
           </a:bodyPr>
           <a:lstStyle/>
           <a:p>
@@ -7816,7 +7800,10 @@
           <a:bodyPr wrap="square">
             <a:normAutofit/>
           </a:bodyPr>
-          <a:p/>
+          <a:lstStyle/>
+          <a:p>
+            <a:endParaRPr/>
+          </a:p>
         </p:txBody>
       </p:sp>
       <p:sp>
@@ -7838,7 +7825,7 @@
         </p:spPr>
         <p:txBody>
           <a:bodyPr wrap="square" lIns="25400" tIns="25400" rIns="25400" bIns="25400" rtlCol="0" anchor="t">
-            <a:normAutofit/>
+            <a:normAutofit lnSpcReduction="10000"/>
           </a:bodyPr>
           <a:lstStyle/>
           <a:p>
@@ -7879,7 +7866,7 @@
         </p:spPr>
         <p:txBody>
           <a:bodyPr wrap="square" lIns="25400" tIns="25400" rIns="25400" bIns="25400" rtlCol="0" anchor="t">
-            <a:normAutofit/>
+            <a:normAutofit fontScale="92500" lnSpcReduction="10000"/>
           </a:bodyPr>
           <a:lstStyle/>
           <a:p>
@@ -7963,7 +7950,10 @@
           <a:bodyPr wrap="square">
             <a:normAutofit/>
           </a:bodyPr>
-          <a:p/>
+          <a:lstStyle/>
+          <a:p>
+            <a:endParaRPr/>
+          </a:p>
         </p:txBody>
       </p:sp>
       <p:sp>
@@ -7985,7 +7975,7 @@
         </p:spPr>
         <p:txBody>
           <a:bodyPr wrap="square" lIns="25400" tIns="25400" rIns="25400" bIns="25400" rtlCol="0" anchor="t">
-            <a:normAutofit/>
+            <a:normAutofit lnSpcReduction="10000"/>
           </a:bodyPr>
           <a:lstStyle/>
           <a:p>
@@ -8026,7 +8016,7 @@
         </p:spPr>
         <p:txBody>
           <a:bodyPr wrap="square" lIns="25400" tIns="25400" rIns="25400" bIns="25400" rtlCol="0" anchor="t">
-            <a:normAutofit/>
+            <a:normAutofit fontScale="92500" lnSpcReduction="10000"/>
           </a:bodyPr>
           <a:lstStyle/>
           <a:p>
@@ -8036,28 +8026,6 @@
               </a:lnSpc>
               <a:buNone/>
             </a:pPr>
-            <a:r>
-              <a:rPr lang="en-US" sz="2625" dirty="0">
-                <a:solidFill>
-                  <a:srgbClr val="000000"/>
-                </a:solidFill>
-                <a:latin typeface="Bookman Old Style" pitchFamily="34" charset="0"/>
-                <a:ea typeface="Bookman Old Style" pitchFamily="34" charset="-122"/>
-                <a:cs typeface="Bookman Old Style" pitchFamily="34" charset="-120"/>
-              </a:rPr>
-              <a:t/>
-            </a:r>
-            <a:r>
-              <a:rPr lang="en-US" sz="2625" i="1" dirty="0">
-                <a:solidFill>
-                  <a:srgbClr val="000000"/>
-                </a:solidFill>
-                <a:latin typeface="Bookman Old Style" pitchFamily="34" charset="0"/>
-                <a:ea typeface="Bookman Old Style" pitchFamily="34" charset="-122"/>
-                <a:cs typeface="Bookman Old Style" pitchFamily="34" charset="-120"/>
-              </a:rPr>
-              <a:t/>
-            </a:r>
             <a:r>
               <a:rPr lang="en-US" sz="2625" dirty="0">
                 <a:solidFill>
@@ -8132,7 +8100,10 @@
           <a:bodyPr wrap="square">
             <a:normAutofit/>
           </a:bodyPr>
-          <a:p/>
+          <a:lstStyle/>
+          <a:p>
+            <a:endParaRPr/>
+          </a:p>
         </p:txBody>
       </p:sp>
       <p:sp>
@@ -8154,7 +8125,7 @@
         </p:spPr>
         <p:txBody>
           <a:bodyPr wrap="square" lIns="25400" tIns="25400" rIns="25400" bIns="25400" rtlCol="0" anchor="t">
-            <a:normAutofit/>
+            <a:normAutofit lnSpcReduction="10000"/>
           </a:bodyPr>
           <a:lstStyle/>
           <a:p>
@@ -8195,7 +8166,7 @@
         </p:spPr>
         <p:txBody>
           <a:bodyPr wrap="square" lIns="25400" tIns="25400" rIns="25400" bIns="25400" rtlCol="0" anchor="t">
-            <a:normAutofit/>
+            <a:normAutofit fontScale="92500" lnSpcReduction="10000"/>
           </a:bodyPr>
           <a:lstStyle/>
           <a:p>
@@ -8279,7 +8250,10 @@
           <a:bodyPr wrap="square">
             <a:normAutofit/>
           </a:bodyPr>
-          <a:p/>
+          <a:lstStyle/>
+          <a:p>
+            <a:endParaRPr/>
+          </a:p>
         </p:txBody>
       </p:sp>
       <p:sp>
@@ -8301,7 +8275,7 @@
         </p:spPr>
         <p:txBody>
           <a:bodyPr wrap="square" lIns="25400" tIns="25400" rIns="25400" bIns="25400" rtlCol="0" anchor="t">
-            <a:normAutofit/>
+            <a:normAutofit lnSpcReduction="10000"/>
           </a:bodyPr>
           <a:lstStyle/>
           <a:p>
@@ -8342,7 +8316,7 @@
         </p:spPr>
         <p:txBody>
           <a:bodyPr wrap="square" lIns="25400" tIns="25400" rIns="25400" bIns="25400" rtlCol="0" anchor="t">
-            <a:normAutofit/>
+            <a:normAutofit fontScale="92500" lnSpcReduction="10000"/>
           </a:bodyPr>
           <a:lstStyle/>
           <a:p>
@@ -8408,7 +8382,7 @@
         </p:spPr>
         <p:txBody>
           <a:bodyPr wrap="square" lIns="25400" tIns="25400" rIns="25400" bIns="25400" rtlCol="0" anchor="t">
-            <a:normAutofit/>
+            <a:normAutofit lnSpcReduction="10000"/>
           </a:bodyPr>
           <a:lstStyle/>
           <a:p>
@@ -8416,7 +8390,7 @@
               <a:buNone/>
             </a:pPr>
             <a:r>
-              <a:rPr lang="en-US" sz="1800" kern="0" spc="75" dirty="0" smtClean="0">
+              <a:rPr lang="en-US" sz="1800" kern="0" spc="75" dirty="0">
                 <a:solidFill>
                   <a:srgbClr val="8A92A4"/>
                 </a:solidFill>
@@ -8424,29 +8398,7 @@
                 <a:ea typeface="Bookman Old Style" pitchFamily="34" charset="-122"/>
                 <a:cs typeface="Bookman Old Style" pitchFamily="34" charset="-120"/>
               </a:rPr>
-              <a:t>13 </a:t>
-            </a:r>
-            <a:r>
-              <a:rPr lang="en-US" sz="1800" kern="0" spc="75" dirty="0">
-                <a:solidFill>
-                  <a:srgbClr val="8A92A4"/>
-                </a:solidFill>
-                <a:latin typeface="Bookman Old Style" pitchFamily="34" charset="0"/>
-                <a:ea typeface="Bookman Old Style" pitchFamily="34" charset="-122"/>
-                <a:cs typeface="Bookman Old Style" pitchFamily="34" charset="-120"/>
-              </a:rPr>
-              <a:t>/ </a:t>
-            </a:r>
-            <a:r>
-              <a:rPr lang="en-US" sz="1800" kern="0" spc="75" dirty="0" smtClean="0">
-                <a:solidFill>
-                  <a:srgbClr val="8A92A4"/>
-                </a:solidFill>
-                <a:latin typeface="Bookman Old Style" pitchFamily="34" charset="0"/>
-                <a:ea typeface="Bookman Old Style" pitchFamily="34" charset="-122"/>
-                <a:cs typeface="Bookman Old Style" pitchFamily="34" charset="-120"/>
-              </a:rPr>
-              <a:t>14</a:t>
+              <a:t>13 / 14</a:t>
             </a:r>
             <a:endParaRPr lang="en-US" sz="1800" dirty="0"/>
           </a:p>
@@ -8457,13 +8409,6 @@
   <p:clrMapOvr>
     <a:masterClrMapping/>
   </p:clrMapOvr>
-  <p:timing>
-    <p:tnLst>
-      <p:par>
-        <p:cTn id="1" dur="indefinite" restart="never" nodeType="tmRoot"/>
-      </p:par>
-    </p:tnLst>
-  </p:timing>
 </p:sld>
 </file>
 
@@ -8526,7 +8471,7 @@
         </p:spPr>
         <p:txBody>
           <a:bodyPr wrap="square" lIns="25400" tIns="25400" rIns="25400" bIns="25400" rtlCol="0" anchor="t">
-            <a:normAutofit/>
+            <a:normAutofit lnSpcReduction="10000"/>
           </a:bodyPr>
           <a:lstStyle/>
           <a:p>
@@ -8534,7 +8479,7 @@
               <a:buNone/>
             </a:pPr>
             <a:r>
-              <a:rPr lang="en-US" sz="2000" b="1" kern="0" spc="450" dirty="0" smtClean="0">
+              <a:rPr lang="en-US" sz="2000" b="1" kern="0" spc="450" dirty="0">
                 <a:solidFill>
                   <a:srgbClr val="C8202E"/>
                 </a:solidFill>
@@ -8542,18 +8487,7 @@
                 <a:ea typeface="Bookman Old Style" pitchFamily="34" charset="-122"/>
                 <a:cs typeface="Bookman Old Style" pitchFamily="34" charset="-120"/>
               </a:rPr>
-              <a:t>MINI PROJECT </a:t>
-            </a:r>
-            <a:r>
-              <a:rPr lang="en-US" sz="2000" b="1" kern="0" spc="450" dirty="0">
-                <a:solidFill>
-                  <a:srgbClr val="C8202E"/>
-                </a:solidFill>
-                <a:latin typeface="Bookman Old Style" pitchFamily="34" charset="0"/>
-                <a:ea typeface="Bookman Old Style" pitchFamily="34" charset="-122"/>
-                <a:cs typeface="Bookman Old Style" pitchFamily="34" charset="-120"/>
-              </a:rPr>
-              <a:t>REVIEW — 1</a:t>
+              <a:t>MINI PROJECT REVIEW — 1</a:t>
             </a:r>
             <a:endParaRPr lang="en-US" sz="2000" dirty="0"/>
           </a:p>
@@ -8578,7 +8512,7 @@
         </p:spPr>
         <p:txBody>
           <a:bodyPr wrap="square" lIns="25400" tIns="25400" rIns="25400" bIns="25400" rtlCol="0" anchor="t">
-            <a:normAutofit/>
+            <a:normAutofit fontScale="92500" lnSpcReduction="20000"/>
           </a:bodyPr>
           <a:lstStyle/>
           <a:p>
@@ -8622,7 +8556,7 @@
         </p:spPr>
         <p:txBody>
           <a:bodyPr wrap="square" lIns="25400" tIns="25400" rIns="25400" bIns="25400" rtlCol="0" anchor="t">
-            <a:normAutofit/>
+            <a:normAutofit lnSpcReduction="10000"/>
           </a:bodyPr>
           <a:lstStyle/>
           <a:p>
@@ -8667,9 +8601,12 @@
         </p:spPr>
         <p:txBody>
           <a:bodyPr wrap="square">
-            <a:normAutofit/>
-          </a:bodyPr>
-          <a:p/>
+            <a:normAutofit fontScale="25000" lnSpcReduction="20000"/>
+          </a:bodyPr>
+          <a:lstStyle/>
+          <a:p>
+            <a:endParaRPr/>
+          </a:p>
         </p:txBody>
       </p:sp>
       <p:sp>
@@ -8691,7 +8628,7 @@
         </p:spPr>
         <p:txBody>
           <a:bodyPr wrap="square" lIns="25400" tIns="25400" rIns="25400" bIns="25400" rtlCol="0" anchor="t">
-            <a:normAutofit/>
+            <a:normAutofit lnSpcReduction="10000"/>
           </a:bodyPr>
           <a:lstStyle/>
           <a:p>
@@ -8732,7 +8669,7 @@
         </p:spPr>
         <p:txBody>
           <a:bodyPr wrap="square" lIns="25400" tIns="25400" rIns="25400" bIns="25400" rtlCol="0" anchor="t">
-            <a:normAutofit/>
+            <a:normAutofit lnSpcReduction="10000"/>
           </a:bodyPr>
           <a:lstStyle/>
           <a:p>
@@ -8773,7 +8710,7 @@
         </p:spPr>
         <p:txBody>
           <a:bodyPr wrap="square" lIns="25400" tIns="25400" rIns="25400" bIns="25400" rtlCol="0" anchor="t">
-            <a:normAutofit/>
+            <a:normAutofit lnSpcReduction="10000"/>
           </a:bodyPr>
           <a:lstStyle/>
           <a:p>
@@ -8789,13 +8726,6 @@
   <p:clrMapOvr>
     <a:masterClrMapping/>
   </p:clrMapOvr>
-  <p:timing>
-    <p:tnLst>
-      <p:par>
-        <p:cTn id="1" dur="indefinite" restart="never" nodeType="tmRoot"/>
-      </p:par>
-    </p:tnLst>
-  </p:timing>
 </p:sld>
 </file>
 
@@ -8862,9 +8792,12 @@
         </p:spPr>
         <p:txBody>
           <a:bodyPr wrap="square">
-            <a:normAutofit/>
-          </a:bodyPr>
-          <a:p/>
+            <a:normAutofit fontScale="25000" lnSpcReduction="20000"/>
+          </a:bodyPr>
+          <a:lstStyle/>
+          <a:p>
+            <a:endParaRPr/>
+          </a:p>
         </p:txBody>
       </p:sp>
       <p:sp>
@@ -8886,7 +8819,7 @@
         </p:spPr>
         <p:txBody>
           <a:bodyPr wrap="square" lIns="25400" tIns="25400" rIns="25400" bIns="25400" rtlCol="0" anchor="t">
-            <a:normAutofit/>
+            <a:normAutofit lnSpcReduction="10000"/>
           </a:bodyPr>
           <a:lstStyle/>
           <a:p>
@@ -8927,7 +8860,7 @@
         </p:spPr>
         <p:txBody>
           <a:bodyPr wrap="square" lIns="25400" tIns="25400" rIns="25400" bIns="25400" rtlCol="0" anchor="t">
-            <a:normAutofit/>
+            <a:normAutofit fontScale="92500" lnSpcReduction="20000"/>
           </a:bodyPr>
           <a:lstStyle/>
           <a:p>
@@ -8984,7 +8917,10 @@
           <a:bodyPr wrap="square">
             <a:normAutofit/>
           </a:bodyPr>
-          <a:p/>
+          <a:lstStyle/>
+          <a:p>
+            <a:endParaRPr/>
+          </a:p>
         </p:txBody>
       </p:sp>
       <p:sp>
@@ -9008,9 +8944,12 @@
         </p:spPr>
         <p:txBody>
           <a:bodyPr wrap="square">
-            <a:normAutofit/>
-          </a:bodyPr>
-          <a:p/>
+            <a:normAutofit lnSpcReduction="10000"/>
+          </a:bodyPr>
+          <a:lstStyle/>
+          <a:p>
+            <a:endParaRPr/>
+          </a:p>
         </p:txBody>
       </p:sp>
       <p:sp>
@@ -9073,7 +9012,7 @@
         </p:spPr>
         <p:txBody>
           <a:bodyPr wrap="square" lIns="25400" tIns="25400" rIns="25400" bIns="25400" rtlCol="0" anchor="t">
-            <a:normAutofit/>
+            <a:normAutofit lnSpcReduction="10000"/>
           </a:bodyPr>
           <a:lstStyle/>
           <a:p>
@@ -9127,7 +9066,10 @@
           <a:bodyPr wrap="square">
             <a:normAutofit/>
           </a:bodyPr>
-          <a:p/>
+          <a:lstStyle/>
+          <a:p>
+            <a:endParaRPr/>
+          </a:p>
         </p:txBody>
       </p:sp>
       <p:sp>
@@ -9151,9 +9093,12 @@
         </p:spPr>
         <p:txBody>
           <a:bodyPr wrap="square">
-            <a:normAutofit/>
-          </a:bodyPr>
-          <a:p/>
+            <a:normAutofit lnSpcReduction="10000"/>
+          </a:bodyPr>
+          <a:lstStyle/>
+          <a:p>
+            <a:endParaRPr/>
+          </a:p>
         </p:txBody>
       </p:sp>
       <p:sp>
@@ -9216,7 +9161,7 @@
         </p:spPr>
         <p:txBody>
           <a:bodyPr wrap="square" lIns="25400" tIns="25400" rIns="25400" bIns="25400" rtlCol="0" anchor="t">
-            <a:normAutofit/>
+            <a:normAutofit lnSpcReduction="10000"/>
           </a:bodyPr>
           <a:lstStyle/>
           <a:p>
@@ -9270,7 +9215,10 @@
           <a:bodyPr wrap="square">
             <a:normAutofit/>
           </a:bodyPr>
-          <a:p/>
+          <a:lstStyle/>
+          <a:p>
+            <a:endParaRPr/>
+          </a:p>
         </p:txBody>
       </p:sp>
       <p:sp>
@@ -9294,9 +9242,12 @@
         </p:spPr>
         <p:txBody>
           <a:bodyPr wrap="square">
-            <a:normAutofit/>
-          </a:bodyPr>
-          <a:p/>
+            <a:normAutofit lnSpcReduction="10000"/>
+          </a:bodyPr>
+          <a:lstStyle/>
+          <a:p>
+            <a:endParaRPr/>
+          </a:p>
         </p:txBody>
       </p:sp>
       <p:sp>
@@ -9359,7 +9310,7 @@
         </p:spPr>
         <p:txBody>
           <a:bodyPr wrap="square" lIns="25400" tIns="25400" rIns="25400" bIns="25400" rtlCol="0" anchor="t">
-            <a:normAutofit/>
+            <a:normAutofit lnSpcReduction="10000"/>
           </a:bodyPr>
           <a:lstStyle/>
           <a:p>
@@ -9413,7 +9364,10 @@
           <a:bodyPr wrap="square">
             <a:normAutofit/>
           </a:bodyPr>
-          <a:p/>
+          <a:lstStyle/>
+          <a:p>
+            <a:endParaRPr/>
+          </a:p>
         </p:txBody>
       </p:sp>
       <p:sp>
@@ -9437,9 +9391,12 @@
         </p:spPr>
         <p:txBody>
           <a:bodyPr wrap="square">
-            <a:normAutofit/>
-          </a:bodyPr>
-          <a:p/>
+            <a:normAutofit lnSpcReduction="10000"/>
+          </a:bodyPr>
+          <a:lstStyle/>
+          <a:p>
+            <a:endParaRPr/>
+          </a:p>
         </p:txBody>
       </p:sp>
       <p:sp>
@@ -9502,7 +9459,7 @@
         </p:spPr>
         <p:txBody>
           <a:bodyPr wrap="square" lIns="25400" tIns="25400" rIns="25400" bIns="25400" rtlCol="0" anchor="t">
-            <a:normAutofit/>
+            <a:normAutofit lnSpcReduction="10000"/>
           </a:bodyPr>
           <a:lstStyle/>
           <a:p>
@@ -9556,7 +9513,10 @@
           <a:bodyPr wrap="square">
             <a:normAutofit/>
           </a:bodyPr>
-          <a:p/>
+          <a:lstStyle/>
+          <a:p>
+            <a:endParaRPr/>
+          </a:p>
         </p:txBody>
       </p:sp>
       <p:sp>
@@ -9580,9 +9540,12 @@
         </p:spPr>
         <p:txBody>
           <a:bodyPr wrap="square">
-            <a:normAutofit/>
-          </a:bodyPr>
-          <a:p/>
+            <a:normAutofit lnSpcReduction="10000"/>
+          </a:bodyPr>
+          <a:lstStyle/>
+          <a:p>
+            <a:endParaRPr/>
+          </a:p>
         </p:txBody>
       </p:sp>
       <p:sp>
@@ -9645,7 +9608,7 @@
         </p:spPr>
         <p:txBody>
           <a:bodyPr wrap="square" lIns="25400" tIns="25400" rIns="25400" bIns="25400" rtlCol="0" anchor="t">
-            <a:normAutofit/>
+            <a:normAutofit lnSpcReduction="10000"/>
           </a:bodyPr>
           <a:lstStyle/>
           <a:p>
@@ -9699,7 +9662,10 @@
           <a:bodyPr wrap="square">
             <a:normAutofit/>
           </a:bodyPr>
-          <a:p/>
+          <a:lstStyle/>
+          <a:p>
+            <a:endParaRPr/>
+          </a:p>
         </p:txBody>
       </p:sp>
       <p:sp>
@@ -9723,9 +9689,12 @@
         </p:spPr>
         <p:txBody>
           <a:bodyPr wrap="square">
-            <a:normAutofit/>
-          </a:bodyPr>
-          <a:p/>
+            <a:normAutofit lnSpcReduction="10000"/>
+          </a:bodyPr>
+          <a:lstStyle/>
+          <a:p>
+            <a:endParaRPr/>
+          </a:p>
         </p:txBody>
       </p:sp>
       <p:sp>
@@ -9788,7 +9757,7 @@
         </p:spPr>
         <p:txBody>
           <a:bodyPr wrap="square" lIns="25400" tIns="25400" rIns="25400" bIns="25400" rtlCol="0" anchor="t">
-            <a:normAutofit/>
+            <a:normAutofit lnSpcReduction="10000"/>
           </a:bodyPr>
           <a:lstStyle/>
           <a:p>
@@ -9842,7 +9811,10 @@
           <a:bodyPr wrap="square">
             <a:normAutofit/>
           </a:bodyPr>
-          <a:p/>
+          <a:lstStyle/>
+          <a:p>
+            <a:endParaRPr/>
+          </a:p>
         </p:txBody>
       </p:sp>
       <p:sp>
@@ -9866,9 +9838,12 @@
         </p:spPr>
         <p:txBody>
           <a:bodyPr wrap="square">
-            <a:normAutofit/>
-          </a:bodyPr>
-          <a:p/>
+            <a:normAutofit lnSpcReduction="10000"/>
+          </a:bodyPr>
+          <a:lstStyle/>
+          <a:p>
+            <a:endParaRPr/>
+          </a:p>
         </p:txBody>
       </p:sp>
       <p:sp>
@@ -9931,7 +9906,7 @@
         </p:spPr>
         <p:txBody>
           <a:bodyPr wrap="square" lIns="25400" tIns="25400" rIns="25400" bIns="25400" rtlCol="0" anchor="t">
-            <a:normAutofit/>
+            <a:normAutofit lnSpcReduction="10000"/>
           </a:bodyPr>
           <a:lstStyle/>
           <a:p>
@@ -9985,7 +9960,10 @@
           <a:bodyPr wrap="square">
             <a:normAutofit/>
           </a:bodyPr>
-          <a:p/>
+          <a:lstStyle/>
+          <a:p>
+            <a:endParaRPr/>
+          </a:p>
         </p:txBody>
       </p:sp>
       <p:sp>
@@ -10009,9 +9987,12 @@
         </p:spPr>
         <p:txBody>
           <a:bodyPr wrap="square">
-            <a:normAutofit/>
-          </a:bodyPr>
-          <a:p/>
+            <a:normAutofit lnSpcReduction="10000"/>
+          </a:bodyPr>
+          <a:lstStyle/>
+          <a:p>
+            <a:endParaRPr/>
+          </a:p>
         </p:txBody>
       </p:sp>
       <p:sp>
@@ -10074,7 +10055,7 @@
         </p:spPr>
         <p:txBody>
           <a:bodyPr wrap="square" lIns="25400" tIns="25400" rIns="25400" bIns="25400" rtlCol="0" anchor="t">
-            <a:normAutofit/>
+            <a:normAutofit lnSpcReduction="10000"/>
           </a:bodyPr>
           <a:lstStyle/>
           <a:p>
@@ -10128,7 +10109,10 @@
           <a:bodyPr wrap="square">
             <a:normAutofit/>
           </a:bodyPr>
-          <a:p/>
+          <a:lstStyle/>
+          <a:p>
+            <a:endParaRPr/>
+          </a:p>
         </p:txBody>
       </p:sp>
       <p:sp>
@@ -10152,9 +10136,12 @@
         </p:spPr>
         <p:txBody>
           <a:bodyPr wrap="square">
-            <a:normAutofit/>
-          </a:bodyPr>
-          <a:p/>
+            <a:normAutofit lnSpcReduction="10000"/>
+          </a:bodyPr>
+          <a:lstStyle/>
+          <a:p>
+            <a:endParaRPr/>
+          </a:p>
         </p:txBody>
       </p:sp>
       <p:sp>
@@ -10217,7 +10204,7 @@
         </p:spPr>
         <p:txBody>
           <a:bodyPr wrap="square" lIns="25400" tIns="25400" rIns="25400" bIns="25400" rtlCol="0" anchor="t">
-            <a:normAutofit/>
+            <a:normAutofit lnSpcReduction="10000"/>
           </a:bodyPr>
           <a:lstStyle/>
           <a:p>
@@ -10271,7 +10258,10 @@
           <a:bodyPr wrap="square">
             <a:normAutofit/>
           </a:bodyPr>
-          <a:p/>
+          <a:lstStyle/>
+          <a:p>
+            <a:endParaRPr/>
+          </a:p>
         </p:txBody>
       </p:sp>
       <p:sp>
@@ -10295,9 +10285,12 @@
         </p:spPr>
         <p:txBody>
           <a:bodyPr wrap="square">
-            <a:normAutofit/>
-          </a:bodyPr>
-          <a:p/>
+            <a:normAutofit lnSpcReduction="10000"/>
+          </a:bodyPr>
+          <a:lstStyle/>
+          <a:p>
+            <a:endParaRPr/>
+          </a:p>
         </p:txBody>
       </p:sp>
       <p:sp>
@@ -10360,7 +10353,7 @@
         </p:spPr>
         <p:txBody>
           <a:bodyPr wrap="square" lIns="25400" tIns="25400" rIns="25400" bIns="25400" rtlCol="0" anchor="t">
-            <a:normAutofit/>
+            <a:normAutofit lnSpcReduction="10000"/>
           </a:bodyPr>
           <a:lstStyle/>
           <a:p>
@@ -10401,7 +10394,7 @@
         </p:spPr>
         <p:txBody>
           <a:bodyPr wrap="square" lIns="25400" tIns="25400" rIns="25400" bIns="25400" rtlCol="0" anchor="t">
-            <a:normAutofit/>
+            <a:normAutofit lnSpcReduction="10000"/>
           </a:bodyPr>
           <a:lstStyle/>
           <a:p>
@@ -10417,18 +10410,7 @@
                 <a:ea typeface="Bookman Old Style" pitchFamily="34" charset="-122"/>
                 <a:cs typeface="Bookman Old Style" pitchFamily="34" charset="-120"/>
               </a:rPr>
-              <a:t>2 / </a:t>
-            </a:r>
-            <a:r>
-              <a:rPr lang="en-US" sz="1800" kern="0" spc="75" dirty="0" smtClean="0">
-                <a:solidFill>
-                  <a:srgbClr val="8A92A4"/>
-                </a:solidFill>
-                <a:latin typeface="Bookman Old Style" pitchFamily="34" charset="0"/>
-                <a:ea typeface="Bookman Old Style" pitchFamily="34" charset="-122"/>
-                <a:cs typeface="Bookman Old Style" pitchFamily="34" charset="-120"/>
-              </a:rPr>
-              <a:t>14</a:t>
+              <a:t>2 / 14</a:t>
             </a:r>
             <a:endParaRPr lang="en-US" sz="1800" dirty="0"/>
           </a:p>
@@ -10439,13 +10421,6 @@
   <p:clrMapOvr>
     <a:masterClrMapping/>
   </p:clrMapOvr>
-  <p:timing>
-    <p:tnLst>
-      <p:par>
-        <p:cTn id="1" dur="indefinite" restart="never" nodeType="tmRoot"/>
-      </p:par>
-    </p:tnLst>
-  </p:timing>
 </p:sld>
 </file>
 
@@ -10512,9 +10487,12 @@
         </p:spPr>
         <p:txBody>
           <a:bodyPr wrap="square">
-            <a:normAutofit/>
-          </a:bodyPr>
-          <a:p/>
+            <a:normAutofit fontScale="25000" lnSpcReduction="20000"/>
+          </a:bodyPr>
+          <a:lstStyle/>
+          <a:p>
+            <a:endParaRPr/>
+          </a:p>
         </p:txBody>
       </p:sp>
       <p:sp>
@@ -10536,7 +10514,7 @@
         </p:spPr>
         <p:txBody>
           <a:bodyPr wrap="square" lIns="25400" tIns="25400" rIns="25400" bIns="25400" rtlCol="0" anchor="t">
-            <a:normAutofit/>
+            <a:normAutofit lnSpcReduction="10000"/>
           </a:bodyPr>
           <a:lstStyle/>
           <a:p>
@@ -10577,7 +10555,7 @@
         </p:spPr>
         <p:txBody>
           <a:bodyPr wrap="square" lIns="25400" tIns="25400" rIns="25400" bIns="25400" rtlCol="0" anchor="t">
-            <a:normAutofit/>
+            <a:normAutofit fontScale="92500" lnSpcReduction="20000"/>
           </a:bodyPr>
           <a:lstStyle/>
           <a:p>
@@ -10610,7 +10588,7 @@
         </p:nvSpPr>
         <p:spPr>
           <a:xfrm>
-            <a:off x="1143000" y="3171825"/>
+            <a:off x="1143000" y="3005565"/>
             <a:ext cx="133350" cy="133350"/>
           </a:xfrm>
           <a:prstGeom prst="ellipse">
@@ -10623,9 +10601,12 @@
         </p:spPr>
         <p:txBody>
           <a:bodyPr wrap="square">
-            <a:normAutofit/>
-          </a:bodyPr>
-          <a:p/>
+            <a:normAutofit fontScale="25000" lnSpcReduction="20000"/>
+          </a:bodyPr>
+          <a:lstStyle/>
+          <a:p>
+            <a:endParaRPr/>
+          </a:p>
         </p:txBody>
       </p:sp>
       <p:sp>
@@ -10636,18 +10617,18 @@
         </p:nvSpPr>
         <p:spPr>
           <a:xfrm>
-            <a:off x="1485900" y="3048000"/>
-            <a:ext cx="9359456" cy="1006078"/>
-          </a:xfrm>
-          <a:prstGeom prst="rect">
-            <a:avLst/>
-          </a:prstGeom>
-          <a:noFill/>
-          <a:ln/>
-        </p:spPr>
-        <p:txBody>
-          <a:bodyPr wrap="square" lIns="25400" tIns="25400" rIns="25400" bIns="25400" rtlCol="0" anchor="t">
-            <a:normAutofit/>
+            <a:off x="1485900" y="2833092"/>
+            <a:ext cx="9359456" cy="1220986"/>
+          </a:xfrm>
+          <a:prstGeom prst="rect">
+            <a:avLst/>
+          </a:prstGeom>
+          <a:noFill/>
+          <a:ln/>
+        </p:spPr>
+        <p:txBody>
+          <a:bodyPr wrap="square" lIns="25400" tIns="25400" rIns="25400" bIns="25400" rtlCol="0" anchor="t">
+            <a:noAutofit/>
           </a:bodyPr>
           <a:lstStyle/>
           <a:p>
@@ -10658,7 +10639,7 @@
               <a:buNone/>
             </a:pPr>
             <a:r>
-              <a:rPr lang="en-US" sz="2775" dirty="0">
+              <a:rPr lang="en-US" sz="2600" dirty="0">
                 <a:solidFill>
                   <a:srgbClr val="000000"/>
                 </a:solidFill>
@@ -10669,7 +10650,7 @@
               <a:t>Road accidents remain one of the leading causes of preventable death worldwide — most crashes cluster around specific </a:t>
             </a:r>
             <a:r>
-              <a:rPr lang="en-US" sz="2775" b="1" dirty="0">
+              <a:rPr lang="en-US" sz="2600" b="1" dirty="0">
                 <a:solidFill>
                   <a:srgbClr val="000000"/>
                 </a:solidFill>
@@ -10680,7 +10661,7 @@
               <a:t>high-risk </a:t>
             </a:r>
             <a:r>
-              <a:rPr lang="en-US" sz="2775" dirty="0">
+              <a:rPr lang="en-US" sz="2600" dirty="0">
                 <a:solidFill>
                   <a:srgbClr val="000000"/>
                 </a:solidFill>
@@ -10691,7 +10672,7 @@
               <a:t>locations and </a:t>
             </a:r>
             <a:r>
-              <a:rPr lang="en-US" sz="2775" b="1" dirty="0">
+              <a:rPr lang="en-US" sz="2600" b="1" dirty="0">
                 <a:solidFill>
                   <a:srgbClr val="000000"/>
                 </a:solidFill>
@@ -10702,7 +10683,7 @@
               <a:t>conditions</a:t>
             </a:r>
             <a:r>
-              <a:rPr lang="en-US" sz="2775" dirty="0">
+              <a:rPr lang="en-US" sz="2600" dirty="0">
                 <a:solidFill>
                   <a:srgbClr val="000000"/>
                 </a:solidFill>
@@ -10712,7 +10693,7 @@
               </a:rPr>
               <a:t>.</a:t>
             </a:r>
-            <a:endParaRPr lang="en-US" sz="2775" dirty="0"/>
+            <a:endParaRPr lang="en-US" sz="2600" dirty="0"/>
           </a:p>
         </p:txBody>
       </p:sp>
@@ -10724,7 +10705,7 @@
         </p:nvSpPr>
         <p:spPr>
           <a:xfrm>
-            <a:off x="1143000" y="4387453"/>
+            <a:off x="1143000" y="4789242"/>
             <a:ext cx="133350" cy="133350"/>
           </a:xfrm>
           <a:prstGeom prst="ellipse">
@@ -10737,9 +10718,12 @@
         </p:spPr>
         <p:txBody>
           <a:bodyPr wrap="square">
-            <a:normAutofit/>
-          </a:bodyPr>
-          <a:p/>
+            <a:normAutofit fontScale="25000" lnSpcReduction="20000"/>
+          </a:bodyPr>
+          <a:lstStyle/>
+          <a:p>
+            <a:endParaRPr/>
+          </a:p>
         </p:txBody>
       </p:sp>
       <p:sp>
@@ -10750,18 +10734,18 @@
         </p:nvSpPr>
         <p:spPr>
           <a:xfrm>
-            <a:off x="1485900" y="4263628"/>
-            <a:ext cx="9359456" cy="1475780"/>
-          </a:xfrm>
-          <a:prstGeom prst="rect">
-            <a:avLst/>
-          </a:prstGeom>
-          <a:noFill/>
-          <a:ln/>
-        </p:spPr>
-        <p:txBody>
-          <a:bodyPr wrap="square" lIns="25400" tIns="25400" rIns="25400" bIns="25400" rtlCol="0" anchor="t">
-            <a:normAutofit/>
+            <a:off x="1485900" y="4518422"/>
+            <a:ext cx="9359456" cy="1220986"/>
+          </a:xfrm>
+          <a:prstGeom prst="rect">
+            <a:avLst/>
+          </a:prstGeom>
+          <a:noFill/>
+          <a:ln/>
+        </p:spPr>
+        <p:txBody>
+          <a:bodyPr wrap="square" lIns="25400" tIns="25400" rIns="25400" bIns="25400" rtlCol="0" anchor="t">
+            <a:normAutofit fontScale="92500"/>
           </a:bodyPr>
           <a:lstStyle/>
           <a:p>
@@ -10807,9 +10791,12 @@
         </p:spPr>
         <p:txBody>
           <a:bodyPr wrap="square">
-            <a:normAutofit/>
-          </a:bodyPr>
-          <a:p/>
+            <a:normAutofit fontScale="25000" lnSpcReduction="20000"/>
+          </a:bodyPr>
+          <a:lstStyle/>
+          <a:p>
+            <a:endParaRPr/>
+          </a:p>
         </p:txBody>
       </p:sp>
       <p:sp>
@@ -10820,7 +10807,7 @@
         </p:nvSpPr>
         <p:spPr>
           <a:xfrm>
-            <a:off x="1485900" y="5948958"/>
+            <a:off x="1485900" y="5879683"/>
             <a:ext cx="9359456" cy="996553"/>
           </a:xfrm>
           <a:prstGeom prst="rect">
@@ -10831,7 +10818,7 @@
         </p:spPr>
         <p:txBody>
           <a:bodyPr wrap="square" lIns="25400" tIns="25400" rIns="25400" bIns="25400" rtlCol="0" anchor="t">
-            <a:normAutofit/>
+            <a:normAutofit fontScale="92500" lnSpcReduction="20000"/>
           </a:bodyPr>
           <a:lstStyle/>
           <a:p>
@@ -10877,9 +10864,12 @@
         </p:spPr>
         <p:txBody>
           <a:bodyPr wrap="square">
-            <a:normAutofit/>
-          </a:bodyPr>
-          <a:p/>
+            <a:normAutofit fontScale="25000" lnSpcReduction="20000"/>
+          </a:bodyPr>
+          <a:lstStyle/>
+          <a:p>
+            <a:endParaRPr/>
+          </a:p>
         </p:txBody>
       </p:sp>
       <p:sp>
@@ -10890,7 +10880,7 @@
         </p:nvSpPr>
         <p:spPr>
           <a:xfrm>
-            <a:off x="1485900" y="7155061"/>
+            <a:off x="1458190" y="7085786"/>
             <a:ext cx="9359456" cy="996553"/>
           </a:xfrm>
           <a:prstGeom prst="rect">
@@ -10901,7 +10891,7 @@
         </p:spPr>
         <p:txBody>
           <a:bodyPr wrap="square" lIns="25400" tIns="25400" rIns="25400" bIns="25400" rtlCol="0" anchor="t">
-            <a:normAutofit/>
+            <a:normAutofit fontScale="85000" lnSpcReduction="10000"/>
           </a:bodyPr>
           <a:lstStyle/>
           <a:p>
@@ -10934,7 +10924,7 @@
         </p:nvSpPr>
         <p:spPr>
           <a:xfrm>
-            <a:off x="11049000" y="2971800"/>
+            <a:off x="11049000" y="2943225"/>
             <a:ext cx="6096000" cy="1152525"/>
           </a:xfrm>
           <a:prstGeom prst="roundRect">
@@ -10963,7 +10953,10 @@
           <a:bodyPr wrap="square">
             <a:normAutofit/>
           </a:bodyPr>
-          <a:p/>
+          <a:lstStyle/>
+          <a:p>
+            <a:endParaRPr/>
+          </a:p>
         </p:txBody>
       </p:sp>
       <p:sp>
@@ -10974,18 +10967,18 @@
         </p:nvSpPr>
         <p:spPr>
           <a:xfrm>
-            <a:off x="13063686" y="3238500"/>
-            <a:ext cx="2273290" cy="390525"/>
-          </a:xfrm>
-          <a:prstGeom prst="rect">
-            <a:avLst/>
-          </a:prstGeom>
-          <a:noFill/>
-          <a:ln/>
-        </p:spPr>
-        <p:txBody>
-          <a:bodyPr wrap="square" lIns="25400" tIns="25400" rIns="25400" bIns="25400" rtlCol="0" anchor="t">
-            <a:normAutofit/>
+            <a:off x="12585948" y="3171825"/>
+            <a:ext cx="3429906" cy="447674"/>
+          </a:xfrm>
+          <a:prstGeom prst="rect">
+            <a:avLst/>
+          </a:prstGeom>
+          <a:noFill/>
+          <a:ln/>
+        </p:spPr>
+        <p:txBody>
+          <a:bodyPr wrap="square" lIns="25400" tIns="25400" rIns="25400" bIns="25400" rtlCol="0" anchor="t">
+            <a:noAutofit/>
           </a:bodyPr>
           <a:lstStyle/>
           <a:p>
@@ -10993,7 +10986,7 @@
               <a:buNone/>
             </a:pPr>
             <a:r>
-              <a:rPr lang="en-US" sz="2400" b="1" dirty="0">
+              <a:rPr lang="en-US" b="1" dirty="0">
                 <a:solidFill>
                   <a:srgbClr val="1E2A55"/>
                 </a:solidFill>
@@ -11003,7 +10996,7 @@
               </a:rPr>
               <a:t>Accident &amp; Traffic Data</a:t>
             </a:r>
-            <a:endParaRPr lang="en-US" sz="2400" dirty="0"/>
+            <a:endParaRPr lang="en-US" dirty="0"/>
           </a:p>
         </p:txBody>
       </p:sp>
@@ -11015,18 +11008,18 @@
         </p:nvSpPr>
         <p:spPr>
           <a:xfrm>
-            <a:off x="13063686" y="3590925"/>
-            <a:ext cx="2273290" cy="304800"/>
-          </a:xfrm>
-          <a:prstGeom prst="rect">
-            <a:avLst/>
-          </a:prstGeom>
-          <a:noFill/>
-          <a:ln/>
-        </p:spPr>
-        <p:txBody>
-          <a:bodyPr wrap="square" lIns="25400" tIns="25400" rIns="25400" bIns="25400" rtlCol="0" anchor="t">
-            <a:normAutofit/>
+            <a:off x="12382304" y="3543300"/>
+            <a:ext cx="3356450" cy="447674"/>
+          </a:xfrm>
+          <a:prstGeom prst="rect">
+            <a:avLst/>
+          </a:prstGeom>
+          <a:noFill/>
+          <a:ln/>
+        </p:spPr>
+        <p:txBody>
+          <a:bodyPr wrap="square" lIns="25400" tIns="25400" rIns="25400" bIns="25400" rtlCol="0" anchor="t">
+            <a:noAutofit/>
           </a:bodyPr>
           <a:lstStyle/>
           <a:p>
@@ -11034,7 +11027,7 @@
               <a:buNone/>
             </a:pPr>
             <a:r>
-              <a:rPr lang="en-US" sz="1800" dirty="0">
+              <a:rPr lang="en-US" dirty="0">
                 <a:solidFill>
                   <a:srgbClr val="000000"/>
                 </a:solidFill>
@@ -11044,7 +11037,7 @@
               </a:rPr>
               <a:t>Historical records + live feeds</a:t>
             </a:r>
-            <a:endParaRPr lang="en-US" sz="1800" dirty="0"/>
+            <a:endParaRPr lang="en-US" dirty="0"/>
           </a:p>
         </p:txBody>
       </p:sp>
@@ -11067,7 +11060,7 @@
         </p:spPr>
         <p:txBody>
           <a:bodyPr wrap="square" lIns="25400" tIns="25400" rIns="25400" bIns="25400" rtlCol="0" anchor="t">
-            <a:normAutofit/>
+            <a:normAutofit fontScale="92500" lnSpcReduction="20000"/>
           </a:bodyPr>
           <a:lstStyle/>
           <a:p>
@@ -11129,7 +11122,10 @@
           <a:bodyPr wrap="square">
             <a:normAutofit/>
           </a:bodyPr>
-          <a:p/>
+          <a:lstStyle/>
+          <a:p>
+            <a:endParaRPr/>
+          </a:p>
         </p:txBody>
       </p:sp>
       <p:sp>
@@ -11151,7 +11147,7 @@
         </p:spPr>
         <p:txBody>
           <a:bodyPr wrap="square" lIns="25400" tIns="25400" rIns="25400" bIns="25400" rtlCol="0" anchor="t">
-            <a:normAutofit/>
+            <a:normAutofit lnSpcReduction="10000"/>
           </a:bodyPr>
           <a:lstStyle/>
           <a:p>
@@ -11192,7 +11188,7 @@
         </p:spPr>
         <p:txBody>
           <a:bodyPr wrap="square" lIns="25400" tIns="25400" rIns="25400" bIns="25400" rtlCol="0" anchor="t">
-            <a:normAutofit/>
+            <a:normAutofit fontScale="92500" lnSpcReduction="10000"/>
           </a:bodyPr>
           <a:lstStyle/>
           <a:p>
@@ -11233,7 +11229,7 @@
         </p:spPr>
         <p:txBody>
           <a:bodyPr wrap="square" lIns="25400" tIns="25400" rIns="25400" bIns="25400" rtlCol="0" anchor="t">
-            <a:normAutofit/>
+            <a:normAutofit fontScale="92500" lnSpcReduction="20000"/>
           </a:bodyPr>
           <a:lstStyle/>
           <a:p>
@@ -11290,7 +11286,10 @@
           <a:bodyPr wrap="square">
             <a:normAutofit/>
           </a:bodyPr>
-          <a:p/>
+          <a:lstStyle/>
+          <a:p>
+            <a:endParaRPr/>
+          </a:p>
         </p:txBody>
       </p:sp>
       <p:sp>
@@ -11312,7 +11311,7 @@
         </p:spPr>
         <p:txBody>
           <a:bodyPr wrap="square" lIns="25400" tIns="25400" rIns="25400" bIns="25400" rtlCol="0" anchor="t">
-            <a:normAutofit/>
+            <a:normAutofit fontScale="92500"/>
           </a:bodyPr>
           <a:lstStyle/>
           <a:p>
@@ -11353,7 +11352,7 @@
         </p:spPr>
         <p:txBody>
           <a:bodyPr wrap="square" lIns="25400" tIns="25400" rIns="25400" bIns="25400" rtlCol="0" anchor="t">
-            <a:normAutofit/>
+            <a:normAutofit fontScale="85000" lnSpcReduction="10000"/>
           </a:bodyPr>
           <a:lstStyle/>
           <a:p>
@@ -11400,7 +11399,10 @@
           <a:bodyPr wrap="square">
             <a:normAutofit/>
           </a:bodyPr>
-          <a:p/>
+          <a:lstStyle/>
+          <a:p>
+            <a:endParaRPr/>
+          </a:p>
         </p:txBody>
       </p:sp>
       <p:sp>
@@ -11426,7 +11428,10 @@
           <a:bodyPr wrap="square">
             <a:normAutofit/>
           </a:bodyPr>
-          <a:p/>
+          <a:lstStyle/>
+          <a:p>
+            <a:endParaRPr/>
+          </a:p>
         </p:txBody>
       </p:sp>
       <p:sp>
@@ -11448,7 +11453,7 @@
         </p:spPr>
         <p:txBody>
           <a:bodyPr wrap="square" lIns="25400" tIns="25400" rIns="25400" bIns="25400" rtlCol="0" anchor="t">
-            <a:normAutofit/>
+            <a:normAutofit fontScale="92500" lnSpcReduction="20000"/>
           </a:bodyPr>
           <a:lstStyle/>
           <a:p>
@@ -11547,7 +11552,7 @@
         </p:spPr>
         <p:txBody>
           <a:bodyPr wrap="square" lIns="25400" tIns="25400" rIns="25400" bIns="25400" rtlCol="0" anchor="t">
-            <a:normAutofit/>
+            <a:normAutofit lnSpcReduction="10000"/>
           </a:bodyPr>
           <a:lstStyle/>
           <a:p>
@@ -11563,18 +11568,7 @@
                 <a:ea typeface="Bookman Old Style" pitchFamily="34" charset="-122"/>
                 <a:cs typeface="Bookman Old Style" pitchFamily="34" charset="-120"/>
               </a:rPr>
-              <a:t>3 / </a:t>
-            </a:r>
-            <a:r>
-              <a:rPr lang="en-US" sz="1800" kern="0" spc="75" dirty="0" smtClean="0">
-                <a:solidFill>
-                  <a:srgbClr val="8A92A4"/>
-                </a:solidFill>
-                <a:latin typeface="Bookman Old Style" pitchFamily="34" charset="0"/>
-                <a:ea typeface="Bookman Old Style" pitchFamily="34" charset="-122"/>
-                <a:cs typeface="Bookman Old Style" pitchFamily="34" charset="-120"/>
-              </a:rPr>
-              <a:t>14</a:t>
+              <a:t>3 / 14</a:t>
             </a:r>
             <a:endParaRPr lang="en-US" sz="1800" dirty="0"/>
           </a:p>
@@ -11585,13 +11579,6 @@
   <p:clrMapOvr>
     <a:masterClrMapping/>
   </p:clrMapOvr>
-  <p:timing>
-    <p:tnLst>
-      <p:par>
-        <p:cTn id="1" dur="indefinite" restart="never" nodeType="tmRoot"/>
-      </p:par>
-    </p:tnLst>
-  </p:timing>
 </p:sld>
 </file>
 
@@ -11658,9 +11645,12 @@
         </p:spPr>
         <p:txBody>
           <a:bodyPr wrap="square">
-            <a:normAutofit/>
-          </a:bodyPr>
-          <a:p/>
+            <a:normAutofit fontScale="25000" lnSpcReduction="20000"/>
+          </a:bodyPr>
+          <a:lstStyle/>
+          <a:p>
+            <a:endParaRPr/>
+          </a:p>
         </p:txBody>
       </p:sp>
       <p:sp>
@@ -11682,7 +11672,7 @@
         </p:spPr>
         <p:txBody>
           <a:bodyPr wrap="square" lIns="25400" tIns="25400" rIns="25400" bIns="25400" rtlCol="0" anchor="t">
-            <a:normAutofit/>
+            <a:normAutofit lnSpcReduction="10000"/>
           </a:bodyPr>
           <a:lstStyle/>
           <a:p>
@@ -11723,7 +11713,7 @@
         </p:spPr>
         <p:txBody>
           <a:bodyPr wrap="square" lIns="25400" tIns="25400" rIns="25400" bIns="25400" rtlCol="0" anchor="t">
-            <a:normAutofit/>
+            <a:normAutofit fontScale="92500" lnSpcReduction="20000"/>
           </a:bodyPr>
           <a:lstStyle/>
           <a:p>
@@ -11785,7 +11775,10 @@
           <a:bodyPr wrap="square">
             <a:normAutofit/>
           </a:bodyPr>
-          <a:p/>
+          <a:lstStyle/>
+          <a:p>
+            <a:endParaRPr/>
+          </a:p>
         </p:txBody>
       </p:sp>
       <p:sp>
@@ -11807,7 +11800,7 @@
         </p:spPr>
         <p:txBody>
           <a:bodyPr wrap="square" lIns="25400" tIns="25400" rIns="25400" bIns="25400" rtlCol="0" anchor="t">
-            <a:normAutofit/>
+            <a:normAutofit fontScale="85000" lnSpcReduction="10000"/>
           </a:bodyPr>
           <a:lstStyle/>
           <a:p>
@@ -11848,7 +11841,7 @@
         </p:spPr>
         <p:txBody>
           <a:bodyPr wrap="square" lIns="25400" tIns="25400" rIns="25400" bIns="25400" rtlCol="0" anchor="t">
-            <a:normAutofit/>
+            <a:normAutofit fontScale="85000" lnSpcReduction="10000"/>
           </a:bodyPr>
           <a:lstStyle/>
           <a:p>
@@ -11910,7 +11903,10 @@
           <a:bodyPr wrap="square">
             <a:normAutofit/>
           </a:bodyPr>
-          <a:p/>
+          <a:lstStyle/>
+          <a:p>
+            <a:endParaRPr/>
+          </a:p>
         </p:txBody>
       </p:sp>
       <p:sp>
@@ -11932,7 +11928,7 @@
         </p:spPr>
         <p:txBody>
           <a:bodyPr wrap="square" lIns="25400" tIns="25400" rIns="25400" bIns="25400" rtlCol="0" anchor="t">
-            <a:normAutofit/>
+            <a:normAutofit fontScale="70000" lnSpcReduction="20000"/>
           </a:bodyPr>
           <a:lstStyle/>
           <a:p>
@@ -11973,7 +11969,7 @@
         </p:spPr>
         <p:txBody>
           <a:bodyPr wrap="square" lIns="25400" tIns="25400" rIns="25400" bIns="25400" rtlCol="0" anchor="t">
-            <a:normAutofit/>
+            <a:normAutofit fontScale="92500" lnSpcReduction="20000"/>
           </a:bodyPr>
           <a:lstStyle/>
           <a:p>
@@ -12035,7 +12031,10 @@
           <a:bodyPr wrap="square">
             <a:normAutofit/>
           </a:bodyPr>
-          <a:p/>
+          <a:lstStyle/>
+          <a:p>
+            <a:endParaRPr/>
+          </a:p>
         </p:txBody>
       </p:sp>
       <p:sp>
@@ -12057,7 +12056,7 @@
         </p:spPr>
         <p:txBody>
           <a:bodyPr wrap="square" lIns="25400" tIns="25400" rIns="25400" bIns="25400" rtlCol="0" anchor="t">
-            <a:normAutofit/>
+            <a:normAutofit fontScale="85000" lnSpcReduction="10000"/>
           </a:bodyPr>
           <a:lstStyle/>
           <a:p>
@@ -12098,7 +12097,7 @@
         </p:spPr>
         <p:txBody>
           <a:bodyPr wrap="square" lIns="25400" tIns="25400" rIns="25400" bIns="25400" rtlCol="0" anchor="t">
-            <a:normAutofit/>
+            <a:normAutofit fontScale="92500" lnSpcReduction="20000"/>
           </a:bodyPr>
           <a:lstStyle/>
           <a:p>
@@ -12160,7 +12159,10 @@
           <a:bodyPr wrap="square">
             <a:normAutofit/>
           </a:bodyPr>
-          <a:p/>
+          <a:lstStyle/>
+          <a:p>
+            <a:endParaRPr/>
+          </a:p>
         </p:txBody>
       </p:sp>
       <p:sp>
@@ -12182,7 +12184,7 @@
         </p:spPr>
         <p:txBody>
           <a:bodyPr wrap="square" lIns="25400" tIns="25400" rIns="25400" bIns="25400" rtlCol="0" anchor="t">
-            <a:normAutofit/>
+            <a:normAutofit fontScale="70000" lnSpcReduction="20000"/>
           </a:bodyPr>
           <a:lstStyle/>
           <a:p>
@@ -12223,7 +12225,7 @@
         </p:spPr>
         <p:txBody>
           <a:bodyPr wrap="square" lIns="25400" tIns="25400" rIns="25400" bIns="25400" rtlCol="0" anchor="t">
-            <a:normAutofit/>
+            <a:normAutofit fontScale="92500" lnSpcReduction="20000"/>
           </a:bodyPr>
           <a:lstStyle/>
           <a:p>
@@ -12267,7 +12269,7 @@
         </p:spPr>
         <p:txBody>
           <a:bodyPr wrap="square" lIns="25400" tIns="25400" rIns="25400" bIns="25400" rtlCol="0" anchor="t">
-            <a:normAutofit/>
+            <a:normAutofit lnSpcReduction="10000"/>
           </a:bodyPr>
           <a:lstStyle/>
           <a:p>
@@ -12283,18 +12285,7 @@
                 <a:ea typeface="Bookman Old Style" pitchFamily="34" charset="-122"/>
                 <a:cs typeface="Bookman Old Style" pitchFamily="34" charset="-120"/>
               </a:rPr>
-              <a:t>4 / </a:t>
-            </a:r>
-            <a:r>
-              <a:rPr lang="en-US" sz="1800" kern="0" spc="75" dirty="0" smtClean="0">
-                <a:solidFill>
-                  <a:srgbClr val="8A92A4"/>
-                </a:solidFill>
-                <a:latin typeface="Bookman Old Style" pitchFamily="34" charset="0"/>
-                <a:ea typeface="Bookman Old Style" pitchFamily="34" charset="-122"/>
-                <a:cs typeface="Bookman Old Style" pitchFamily="34" charset="-120"/>
-              </a:rPr>
-              <a:t>14</a:t>
+              <a:t>4 / 14</a:t>
             </a:r>
             <a:endParaRPr lang="en-US" sz="1800" dirty="0"/>
           </a:p>
@@ -12305,13 +12296,6 @@
   <p:clrMapOvr>
     <a:masterClrMapping/>
   </p:clrMapOvr>
-  <p:timing>
-    <p:tnLst>
-      <p:par>
-        <p:cTn id="1" dur="indefinite" restart="never" nodeType="tmRoot"/>
-      </p:par>
-    </p:tnLst>
-  </p:timing>
 </p:sld>
 </file>
 
@@ -12378,9 +12362,12 @@
         </p:spPr>
         <p:txBody>
           <a:bodyPr wrap="square">
-            <a:normAutofit/>
-          </a:bodyPr>
-          <a:p/>
+            <a:normAutofit fontScale="25000" lnSpcReduction="20000"/>
+          </a:bodyPr>
+          <a:lstStyle/>
+          <a:p>
+            <a:endParaRPr/>
+          </a:p>
         </p:txBody>
       </p:sp>
       <p:sp>
@@ -12402,7 +12389,7 @@
         </p:spPr>
         <p:txBody>
           <a:bodyPr wrap="square" lIns="25400" tIns="25400" rIns="25400" bIns="25400" rtlCol="0" anchor="t">
-            <a:normAutofit/>
+            <a:normAutofit lnSpcReduction="10000"/>
           </a:bodyPr>
           <a:lstStyle/>
           <a:p>
@@ -12443,7 +12430,7 @@
         </p:spPr>
         <p:txBody>
           <a:bodyPr wrap="square" lIns="25400" tIns="25400" rIns="25400" bIns="25400" rtlCol="0" anchor="t">
-            <a:normAutofit/>
+            <a:normAutofit fontScale="92500" lnSpcReduction="20000"/>
           </a:bodyPr>
           <a:lstStyle/>
           <a:p>
@@ -12500,7 +12487,10 @@
           <a:bodyPr wrap="square">
             <a:normAutofit/>
           </a:bodyPr>
-          <a:p/>
+          <a:lstStyle/>
+          <a:p>
+            <a:endParaRPr/>
+          </a:p>
         </p:txBody>
       </p:sp>
       <p:sp>
@@ -12522,7 +12512,7 @@
         </p:spPr>
         <p:txBody>
           <a:bodyPr wrap="square" lIns="25400" tIns="25400" rIns="25400" bIns="25400" rtlCol="0" anchor="t">
-            <a:normAutofit/>
+            <a:normAutofit fontScale="77500" lnSpcReduction="20000"/>
           </a:bodyPr>
           <a:lstStyle/>
           <a:p>
@@ -12672,7 +12662,10 @@
           <a:bodyPr wrap="square">
             <a:normAutofit/>
           </a:bodyPr>
-          <a:p/>
+          <a:lstStyle/>
+          <a:p>
+            <a:endParaRPr/>
+          </a:p>
         </p:txBody>
       </p:sp>
       <p:sp>
@@ -12694,7 +12687,7 @@
         </p:spPr>
         <p:txBody>
           <a:bodyPr wrap="square" lIns="25400" tIns="25400" rIns="25400" bIns="25400" rtlCol="0" anchor="t">
-            <a:normAutofit/>
+            <a:normAutofit lnSpcReduction="10000"/>
           </a:bodyPr>
           <a:lstStyle/>
           <a:p>
@@ -12735,7 +12728,7 @@
         </p:spPr>
         <p:txBody>
           <a:bodyPr wrap="square" lIns="25400" tIns="25400" rIns="25400" bIns="25400" rtlCol="0" anchor="t">
-            <a:normAutofit/>
+            <a:normAutofit lnSpcReduction="10000"/>
           </a:bodyPr>
           <a:lstStyle/>
           <a:p>
@@ -12776,7 +12769,7 @@
         </p:spPr>
         <p:txBody>
           <a:bodyPr wrap="square" lIns="25400" tIns="25400" rIns="25400" bIns="25400" rtlCol="0" anchor="t">
-            <a:normAutofit/>
+            <a:normAutofit fontScale="92500" lnSpcReduction="20000"/>
           </a:bodyPr>
           <a:lstStyle/>
           <a:p>
@@ -12838,7 +12831,10 @@
           <a:bodyPr wrap="square">
             <a:normAutofit/>
           </a:bodyPr>
-          <a:p/>
+          <a:lstStyle/>
+          <a:p>
+            <a:endParaRPr/>
+          </a:p>
         </p:txBody>
       </p:sp>
       <p:sp>
@@ -12860,7 +12856,7 @@
         </p:spPr>
         <p:txBody>
           <a:bodyPr wrap="square" lIns="25400" tIns="25400" rIns="25400" bIns="25400" rtlCol="0" anchor="t">
-            <a:normAutofit/>
+            <a:normAutofit lnSpcReduction="10000"/>
           </a:bodyPr>
           <a:lstStyle/>
           <a:p>
@@ -12901,7 +12897,7 @@
         </p:spPr>
         <p:txBody>
           <a:bodyPr wrap="square" lIns="25400" tIns="25400" rIns="25400" bIns="25400" rtlCol="0" anchor="t">
-            <a:normAutofit/>
+            <a:normAutofit lnSpcReduction="10000"/>
           </a:bodyPr>
           <a:lstStyle/>
           <a:p>
@@ -12942,7 +12938,7 @@
         </p:spPr>
         <p:txBody>
           <a:bodyPr wrap="square" lIns="25400" tIns="25400" rIns="25400" bIns="25400" rtlCol="0" anchor="t">
-            <a:normAutofit/>
+            <a:normAutofit fontScale="92500" lnSpcReduction="20000"/>
           </a:bodyPr>
           <a:lstStyle/>
           <a:p>
@@ -12999,7 +12995,10 @@
           <a:bodyPr wrap="square">
             <a:normAutofit/>
           </a:bodyPr>
-          <a:p/>
+          <a:lstStyle/>
+          <a:p>
+            <a:endParaRPr/>
+          </a:p>
         </p:txBody>
       </p:sp>
       <p:sp>
@@ -13021,7 +13020,7 @@
         </p:spPr>
         <p:txBody>
           <a:bodyPr wrap="square" lIns="25400" tIns="25400" rIns="25400" bIns="25400" rtlCol="0" anchor="t">
-            <a:normAutofit/>
+            <a:normAutofit lnSpcReduction="10000"/>
           </a:bodyPr>
           <a:lstStyle/>
           <a:p>
@@ -13062,7 +13061,7 @@
         </p:spPr>
         <p:txBody>
           <a:bodyPr wrap="square" lIns="25400" tIns="25400" rIns="25400" bIns="25400" rtlCol="0" anchor="t">
-            <a:normAutofit/>
+            <a:normAutofit lnSpcReduction="10000"/>
           </a:bodyPr>
           <a:lstStyle/>
           <a:p>
@@ -13114,7 +13113,10 @@
           <a:bodyPr wrap="square">
             <a:normAutofit/>
           </a:bodyPr>
-          <a:p/>
+          <a:lstStyle/>
+          <a:p>
+            <a:endParaRPr/>
+          </a:p>
         </p:txBody>
       </p:sp>
       <p:sp>
@@ -13136,7 +13138,7 @@
         </p:spPr>
         <p:txBody>
           <a:bodyPr wrap="square" lIns="25400" tIns="25400" rIns="25400" bIns="25400" rtlCol="0" anchor="t">
-            <a:normAutofit/>
+            <a:normAutofit lnSpcReduction="10000"/>
           </a:bodyPr>
           <a:lstStyle/>
           <a:p>
@@ -13177,7 +13179,7 @@
         </p:spPr>
         <p:txBody>
           <a:bodyPr wrap="square" lIns="25400" tIns="25400" rIns="25400" bIns="25400" rtlCol="0" anchor="t">
-            <a:normAutofit/>
+            <a:normAutofit lnSpcReduction="10000"/>
           </a:bodyPr>
           <a:lstStyle/>
           <a:p>
@@ -13229,7 +13231,10 @@
           <a:bodyPr wrap="square">
             <a:normAutofit/>
           </a:bodyPr>
-          <a:p/>
+          <a:lstStyle/>
+          <a:p>
+            <a:endParaRPr/>
+          </a:p>
         </p:txBody>
       </p:sp>
       <p:sp>
@@ -13251,7 +13256,7 @@
         </p:spPr>
         <p:txBody>
           <a:bodyPr wrap="square" lIns="25400" tIns="25400" rIns="25400" bIns="25400" rtlCol="0" anchor="t">
-            <a:normAutofit/>
+            <a:normAutofit lnSpcReduction="10000"/>
           </a:bodyPr>
           <a:lstStyle/>
           <a:p>
@@ -13292,7 +13297,7 @@
         </p:spPr>
         <p:txBody>
           <a:bodyPr wrap="square" lIns="25400" tIns="25400" rIns="25400" bIns="25400" rtlCol="0" anchor="t">
-            <a:normAutofit/>
+            <a:normAutofit fontScale="70000" lnSpcReduction="20000"/>
           </a:bodyPr>
           <a:lstStyle/>
           <a:p>
@@ -13344,7 +13349,10 @@
           <a:bodyPr wrap="square">
             <a:normAutofit/>
           </a:bodyPr>
-          <a:p/>
+          <a:lstStyle/>
+          <a:p>
+            <a:endParaRPr/>
+          </a:p>
         </p:txBody>
       </p:sp>
       <p:sp>
@@ -13366,7 +13374,7 @@
         </p:spPr>
         <p:txBody>
           <a:bodyPr wrap="square" lIns="25400" tIns="25400" rIns="25400" bIns="25400" rtlCol="0" anchor="t">
-            <a:normAutofit/>
+            <a:normAutofit lnSpcReduction="10000"/>
           </a:bodyPr>
           <a:lstStyle/>
           <a:p>
@@ -13407,7 +13415,7 @@
         </p:spPr>
         <p:txBody>
           <a:bodyPr wrap="square" lIns="25400" tIns="25400" rIns="25400" bIns="25400" rtlCol="0" anchor="t">
-            <a:normAutofit/>
+            <a:normAutofit lnSpcReduction="10000"/>
           </a:bodyPr>
           <a:lstStyle/>
           <a:p>
@@ -13448,7 +13456,7 @@
         </p:spPr>
         <p:txBody>
           <a:bodyPr wrap="square" lIns="25400" tIns="25400" rIns="25400" bIns="25400" rtlCol="0" anchor="t">
-            <a:normAutofit/>
+            <a:normAutofit lnSpcReduction="10000"/>
           </a:bodyPr>
           <a:lstStyle/>
           <a:p>
@@ -13464,18 +13472,7 @@
                 <a:ea typeface="Bookman Old Style" pitchFamily="34" charset="-122"/>
                 <a:cs typeface="Bookman Old Style" pitchFamily="34" charset="-120"/>
               </a:rPr>
-              <a:t>5 / </a:t>
-            </a:r>
-            <a:r>
-              <a:rPr lang="en-US" sz="1800" kern="0" spc="75" dirty="0" smtClean="0">
-                <a:solidFill>
-                  <a:srgbClr val="8A92A4"/>
-                </a:solidFill>
-                <a:latin typeface="Bookman Old Style" pitchFamily="34" charset="0"/>
-                <a:ea typeface="Bookman Old Style" pitchFamily="34" charset="-122"/>
-                <a:cs typeface="Bookman Old Style" pitchFamily="34" charset="-120"/>
-              </a:rPr>
-              <a:t>14</a:t>
+              <a:t>5 / 14</a:t>
             </a:r>
             <a:endParaRPr lang="en-US" sz="1800" dirty="0"/>
           </a:p>
@@ -13486,13 +13483,6 @@
   <p:clrMapOvr>
     <a:masterClrMapping/>
   </p:clrMapOvr>
-  <p:timing>
-    <p:tnLst>
-      <p:par>
-        <p:cTn id="1" dur="indefinite" restart="never" nodeType="tmRoot"/>
-      </p:par>
-    </p:tnLst>
-  </p:timing>
 </p:sld>
 </file>
 
@@ -13559,9 +13549,12 @@
         </p:spPr>
         <p:txBody>
           <a:bodyPr wrap="square">
-            <a:normAutofit/>
-          </a:bodyPr>
-          <a:p/>
+            <a:normAutofit fontScale="25000" lnSpcReduction="20000"/>
+          </a:bodyPr>
+          <a:lstStyle/>
+          <a:p>
+            <a:endParaRPr/>
+          </a:p>
         </p:txBody>
       </p:sp>
       <p:sp>
@@ -13583,7 +13576,7 @@
         </p:spPr>
         <p:txBody>
           <a:bodyPr wrap="square" lIns="25400" tIns="25400" rIns="25400" bIns="25400" rtlCol="0" anchor="t">
-            <a:normAutofit/>
+            <a:normAutofit lnSpcReduction="10000"/>
           </a:bodyPr>
           <a:lstStyle/>
           <a:p>
@@ -13624,7 +13617,7 @@
         </p:spPr>
         <p:txBody>
           <a:bodyPr wrap="square" lIns="25400" tIns="25400" rIns="25400" bIns="25400" rtlCol="0" anchor="t">
-            <a:normAutofit/>
+            <a:normAutofit fontScale="92500" lnSpcReduction="20000"/>
           </a:bodyPr>
           <a:lstStyle/>
           <a:p>
@@ -13678,7 +13671,10 @@
           <a:bodyPr wrap="square">
             <a:normAutofit/>
           </a:bodyPr>
-          <a:p/>
+          <a:lstStyle/>
+          <a:p>
+            <a:endParaRPr/>
+          </a:p>
         </p:txBody>
       </p:sp>
       <p:sp>
@@ -13704,7 +13700,10 @@
           <a:bodyPr wrap="square">
             <a:normAutofit/>
           </a:bodyPr>
-          <a:p/>
+          <a:lstStyle/>
+          <a:p>
+            <a:endParaRPr/>
+          </a:p>
         </p:txBody>
       </p:sp>
       <p:sp>
@@ -13726,7 +13725,7 @@
         </p:spPr>
         <p:txBody>
           <a:bodyPr wrap="square" lIns="25400" tIns="25400" rIns="25400" bIns="25400" rtlCol="0" anchor="ctr">
-            <a:normAutofit/>
+            <a:normAutofit lnSpcReduction="10000"/>
           </a:bodyPr>
           <a:lstStyle/>
           <a:p>
@@ -13767,7 +13766,7 @@
         </p:spPr>
         <p:txBody>
           <a:bodyPr wrap="square" lIns="25400" tIns="25400" rIns="25400" bIns="25400" rtlCol="0" anchor="ctr">
-            <a:normAutofit/>
+            <a:normAutofit lnSpcReduction="10000"/>
           </a:bodyPr>
           <a:lstStyle/>
           <a:p>
@@ -13808,7 +13807,7 @@
         </p:spPr>
         <p:txBody>
           <a:bodyPr wrap="square" lIns="25400" tIns="25400" rIns="25400" bIns="25400" rtlCol="0" anchor="ctr">
-            <a:normAutofit/>
+            <a:normAutofit lnSpcReduction="10000"/>
           </a:bodyPr>
           <a:lstStyle/>
           <a:p>
@@ -13853,7 +13852,10 @@
           <a:bodyPr wrap="square">
             <a:normAutofit/>
           </a:bodyPr>
-          <a:p/>
+          <a:lstStyle/>
+          <a:p>
+            <a:endParaRPr/>
+          </a:p>
         </p:txBody>
       </p:sp>
       <p:sp>
@@ -13875,7 +13877,7 @@
         </p:spPr>
         <p:txBody>
           <a:bodyPr wrap="square" lIns="25400" tIns="25400" rIns="25400" bIns="25400" rtlCol="0" anchor="ctr">
-            <a:normAutofit/>
+            <a:normAutofit lnSpcReduction="10000"/>
           </a:bodyPr>
           <a:lstStyle/>
           <a:p>
@@ -13920,7 +13922,10 @@
           <a:bodyPr wrap="square">
             <a:normAutofit/>
           </a:bodyPr>
-          <a:p/>
+          <a:lstStyle/>
+          <a:p>
+            <a:endParaRPr/>
+          </a:p>
         </p:txBody>
       </p:sp>
       <p:sp>
@@ -13983,7 +13988,7 @@
         </p:spPr>
         <p:txBody>
           <a:bodyPr wrap="square" lIns="25400" tIns="25400" rIns="25400" bIns="25400" rtlCol="0" anchor="t">
-            <a:normAutofit/>
+            <a:normAutofit lnSpcReduction="10000"/>
           </a:bodyPr>
           <a:lstStyle/>
           <a:p>
@@ -14069,7 +14074,10 @@
           <a:bodyPr wrap="square">
             <a:normAutofit/>
           </a:bodyPr>
-          <a:p/>
+          <a:lstStyle/>
+          <a:p>
+            <a:endParaRPr/>
+          </a:p>
         </p:txBody>
       </p:sp>
       <p:sp>
@@ -14136,7 +14144,10 @@
           <a:bodyPr wrap="square">
             <a:normAutofit/>
           </a:bodyPr>
-          <a:p/>
+          <a:lstStyle/>
+          <a:p>
+            <a:endParaRPr/>
+          </a:p>
         </p:txBody>
       </p:sp>
       <p:sp>
@@ -14158,7 +14169,7 @@
         </p:spPr>
         <p:txBody>
           <a:bodyPr wrap="square" lIns="25400" tIns="25400" rIns="25400" bIns="25400" rtlCol="0" anchor="t">
-            <a:normAutofit/>
+            <a:normAutofit lnSpcReduction="10000"/>
           </a:bodyPr>
           <a:lstStyle/>
           <a:p>
@@ -14199,7 +14210,7 @@
         </p:spPr>
         <p:txBody>
           <a:bodyPr wrap="square" lIns="25400" tIns="25400" rIns="25400" bIns="25400" rtlCol="0" anchor="t">
-            <a:normAutofit/>
+            <a:normAutofit fontScale="77500" lnSpcReduction="20000"/>
           </a:bodyPr>
           <a:lstStyle/>
           <a:p>
@@ -14240,7 +14251,7 @@
         </p:spPr>
         <p:txBody>
           <a:bodyPr wrap="square" lIns="25400" tIns="25400" rIns="25400" bIns="25400" rtlCol="0" anchor="t">
-            <a:normAutofit/>
+            <a:normAutofit lnSpcReduction="10000"/>
           </a:bodyPr>
           <a:lstStyle/>
           <a:p>
@@ -14285,7 +14296,10 @@
           <a:bodyPr wrap="square">
             <a:normAutofit/>
           </a:bodyPr>
-          <a:p/>
+          <a:lstStyle/>
+          <a:p>
+            <a:endParaRPr/>
+          </a:p>
         </p:txBody>
       </p:sp>
       <p:sp>
@@ -14307,7 +14321,7 @@
         </p:spPr>
         <p:txBody>
           <a:bodyPr wrap="square" lIns="25400" tIns="25400" rIns="25400" bIns="25400" rtlCol="0" anchor="t">
-            <a:normAutofit/>
+            <a:normAutofit lnSpcReduction="10000"/>
           </a:bodyPr>
           <a:lstStyle/>
           <a:p>
@@ -14352,7 +14366,10 @@
           <a:bodyPr wrap="square">
             <a:normAutofit/>
           </a:bodyPr>
-          <a:p/>
+          <a:lstStyle/>
+          <a:p>
+            <a:endParaRPr/>
+          </a:p>
         </p:txBody>
       </p:sp>
       <p:sp>
@@ -14374,12 +14391,12 @@
         </p:spPr>
         <p:txBody>
           <a:bodyPr wrap="square" lIns="25400" tIns="25400" rIns="25400" bIns="25400" rtlCol="0" anchor="t">
-            <a:normAutofit/>
-          </a:bodyPr>
-          <a:lstStyle/>
-          <a:p>
-            <a:r>
-              <a:rPr lang="en-US" dirty="0" smtClean="0"/>
+            <a:normAutofit fontScale="77500" lnSpcReduction="20000"/>
+          </a:bodyPr>
+          <a:lstStyle/>
+          <a:p>
+            <a:r>
+              <a:rPr lang="en-US" dirty="0"/>
               <a:t> </a:t>
             </a:r>
             <a:r>
@@ -14415,7 +14432,7 @@
         </p:spPr>
         <p:txBody>
           <a:bodyPr wrap="square" lIns="25400" tIns="25400" rIns="25400" bIns="25400" rtlCol="0" anchor="t">
-            <a:normAutofit/>
+            <a:normAutofit fontScale="85000" lnSpcReduction="10000"/>
           </a:bodyPr>
           <a:lstStyle/>
           <a:p>
@@ -14456,7 +14473,7 @@
         </p:spPr>
         <p:txBody>
           <a:bodyPr wrap="square" lIns="25400" tIns="25400" rIns="25400" bIns="25400" rtlCol="0" anchor="t">
-            <a:normAutofit/>
+            <a:normAutofit fontScale="92500"/>
           </a:bodyPr>
           <a:lstStyle/>
           <a:p>
@@ -14501,7 +14518,10 @@
           <a:bodyPr wrap="square">
             <a:normAutofit/>
           </a:bodyPr>
-          <a:p/>
+          <a:lstStyle/>
+          <a:p>
+            <a:endParaRPr/>
+          </a:p>
         </p:txBody>
       </p:sp>
       <p:sp>
@@ -14523,7 +14543,7 @@
         </p:spPr>
         <p:txBody>
           <a:bodyPr wrap="square" lIns="25400" tIns="25400" rIns="25400" bIns="25400" rtlCol="0" anchor="t">
-            <a:normAutofit/>
+            <a:normAutofit lnSpcReduction="10000"/>
           </a:bodyPr>
           <a:lstStyle/>
           <a:p>
@@ -14568,7 +14588,10 @@
           <a:bodyPr wrap="square">
             <a:normAutofit/>
           </a:bodyPr>
-          <a:p/>
+          <a:lstStyle/>
+          <a:p>
+            <a:endParaRPr/>
+          </a:p>
         </p:txBody>
       </p:sp>
       <p:sp>
@@ -14590,12 +14613,12 @@
         </p:spPr>
         <p:txBody>
           <a:bodyPr wrap="square" lIns="25400" tIns="25400" rIns="25400" bIns="25400" rtlCol="0" anchor="t">
-            <a:normAutofit/>
-          </a:bodyPr>
-          <a:lstStyle/>
-          <a:p>
-            <a:r>
-              <a:rPr lang="en-US" sz="1875" b="1" dirty="0" err="1" smtClean="0">
+            <a:normAutofit lnSpcReduction="10000"/>
+          </a:bodyPr>
+          <a:lstStyle/>
+          <a:p>
+            <a:r>
+              <a:rPr lang="en-US" sz="1875" b="1" dirty="0" err="1">
                 <a:solidFill>
                   <a:srgbClr val="000000"/>
                 </a:solidFill>
@@ -14606,7 +14629,7 @@
               <a:t>Telematics interpretable ML</a:t>
             </a:r>
             <a:r>
-              <a:rPr lang="en-US" sz="1875" b="1" dirty="0" smtClean="0">
+              <a:rPr lang="en-US" sz="1875" b="1" dirty="0">
                 <a:solidFill>
                   <a:srgbClr val="000000"/>
                 </a:solidFill>
@@ -14661,7 +14684,7 @@
         </p:spPr>
         <p:txBody>
           <a:bodyPr wrap="square" lIns="25400" tIns="25400" rIns="25400" bIns="25400" rtlCol="0" anchor="t">
-            <a:normAutofit/>
+            <a:normAutofit fontScale="92500"/>
           </a:bodyPr>
           <a:lstStyle/>
           <a:p>
@@ -14702,7 +14725,7 @@
         </p:spPr>
         <p:txBody>
           <a:bodyPr wrap="square" lIns="25400" tIns="25400" rIns="25400" bIns="25400" rtlCol="0" anchor="t">
-            <a:normAutofit/>
+            <a:normAutofit fontScale="92500"/>
           </a:bodyPr>
           <a:lstStyle/>
           <a:p>
@@ -14747,7 +14770,10 @@
           <a:bodyPr wrap="square">
             <a:normAutofit/>
           </a:bodyPr>
-          <a:p/>
+          <a:lstStyle/>
+          <a:p>
+            <a:endParaRPr/>
+          </a:p>
         </p:txBody>
       </p:sp>
       <p:sp>
@@ -14769,7 +14795,7 @@
         </p:spPr>
         <p:txBody>
           <a:bodyPr wrap="square" lIns="25400" tIns="25400" rIns="25400" bIns="25400" rtlCol="0" anchor="t">
-            <a:normAutofit/>
+            <a:normAutofit fontScale="92500"/>
           </a:bodyPr>
           <a:lstStyle/>
           <a:p>
@@ -14816,7 +14842,10 @@
           <a:bodyPr wrap="square">
             <a:normAutofit/>
           </a:bodyPr>
-          <a:p/>
+          <a:lstStyle/>
+          <a:p>
+            <a:endParaRPr/>
+          </a:p>
         </p:txBody>
       </p:sp>
       <p:sp>
@@ -14842,7 +14871,10 @@
           <a:bodyPr wrap="square">
             <a:normAutofit/>
           </a:bodyPr>
-          <a:p/>
+          <a:lstStyle/>
+          <a:p>
+            <a:endParaRPr/>
+          </a:p>
         </p:txBody>
       </p:sp>
       <p:sp>
@@ -14864,7 +14896,7 @@
         </p:spPr>
         <p:txBody>
           <a:bodyPr wrap="square" lIns="25400" tIns="25400" rIns="25400" bIns="25400" rtlCol="0" anchor="t">
-            <a:normAutofit/>
+            <a:normAutofit fontScale="92500" lnSpcReduction="10000"/>
           </a:bodyPr>
           <a:lstStyle/>
           <a:p>
@@ -14941,7 +14973,7 @@
         </p:spPr>
         <p:txBody>
           <a:bodyPr wrap="square" lIns="25400" tIns="25400" rIns="25400" bIns="25400" rtlCol="0" anchor="t">
-            <a:normAutofit/>
+            <a:normAutofit lnSpcReduction="10000"/>
           </a:bodyPr>
           <a:lstStyle/>
           <a:p>
@@ -14957,18 +14989,7 @@
                 <a:ea typeface="Bookman Old Style" pitchFamily="34" charset="-122"/>
                 <a:cs typeface="Bookman Old Style" pitchFamily="34" charset="-120"/>
               </a:rPr>
-              <a:t>6 / </a:t>
-            </a:r>
-            <a:r>
-              <a:rPr lang="en-US" sz="1800" kern="0" spc="75" dirty="0" smtClean="0">
-                <a:solidFill>
-                  <a:srgbClr val="8A92A4"/>
-                </a:solidFill>
-                <a:latin typeface="Bookman Old Style" pitchFamily="34" charset="0"/>
-                <a:ea typeface="Bookman Old Style" pitchFamily="34" charset="-122"/>
-                <a:cs typeface="Bookman Old Style" pitchFamily="34" charset="-120"/>
-              </a:rPr>
-              <a:t>14</a:t>
+              <a:t>6 / 14</a:t>
             </a:r>
             <a:endParaRPr lang="en-US" sz="1800" dirty="0"/>
           </a:p>
@@ -14979,13 +15000,6 @@
   <p:clrMapOvr>
     <a:masterClrMapping/>
   </p:clrMapOvr>
-  <p:timing>
-    <p:tnLst>
-      <p:par>
-        <p:cTn id="1" dur="indefinite" restart="never" nodeType="tmRoot"/>
-      </p:par>
-    </p:tnLst>
-  </p:timing>
 </p:sld>
 </file>
 
@@ -15052,9 +15066,12 @@
         </p:spPr>
         <p:txBody>
           <a:bodyPr wrap="square">
-            <a:normAutofit/>
-          </a:bodyPr>
-          <a:p/>
+            <a:normAutofit fontScale="25000" lnSpcReduction="20000"/>
+          </a:bodyPr>
+          <a:lstStyle/>
+          <a:p>
+            <a:endParaRPr/>
+          </a:p>
         </p:txBody>
       </p:sp>
       <p:sp>
@@ -15076,7 +15093,7 @@
         </p:spPr>
         <p:txBody>
           <a:bodyPr wrap="square" lIns="25400" tIns="25400" rIns="25400" bIns="25400" rtlCol="0" anchor="t">
-            <a:normAutofit/>
+            <a:normAutofit lnSpcReduction="10000"/>
           </a:bodyPr>
           <a:lstStyle/>
           <a:p>
@@ -15117,7 +15134,7 @@
         </p:spPr>
         <p:txBody>
           <a:bodyPr wrap="square" lIns="25400" tIns="25400" rIns="25400" bIns="25400" rtlCol="0" anchor="t">
-            <a:normAutofit/>
+            <a:normAutofit fontScale="92500" lnSpcReduction="20000"/>
           </a:bodyPr>
           <a:lstStyle/>
           <a:p>
@@ -15179,7 +15196,10 @@
           <a:bodyPr wrap="square">
             <a:normAutofit/>
           </a:bodyPr>
-          <a:p/>
+          <a:lstStyle/>
+          <a:p>
+            <a:endParaRPr/>
+          </a:p>
         </p:txBody>
       </p:sp>
       <p:sp>
@@ -15207,7 +15227,10 @@
           <a:bodyPr wrap="square">
             <a:normAutofit/>
           </a:bodyPr>
-          <a:p/>
+          <a:lstStyle/>
+          <a:p>
+            <a:endParaRPr/>
+          </a:p>
         </p:txBody>
       </p:sp>
       <p:sp>
@@ -15270,7 +15293,7 @@
         </p:spPr>
         <p:txBody>
           <a:bodyPr wrap="square" lIns="25400" tIns="25400" rIns="25400" bIns="25400" rtlCol="0" anchor="t">
-            <a:normAutofit/>
+            <a:normAutofit lnSpcReduction="10000"/>
           </a:bodyPr>
           <a:lstStyle/>
           <a:p>
@@ -15311,7 +15334,7 @@
         </p:spPr>
         <p:txBody>
           <a:bodyPr wrap="square" lIns="25400" tIns="25400" rIns="25400" bIns="25400" rtlCol="0" anchor="t">
-            <a:normAutofit/>
+            <a:normAutofit fontScale="92500" lnSpcReduction="10000"/>
           </a:bodyPr>
           <a:lstStyle/>
           <a:p>
@@ -15373,7 +15396,10 @@
           <a:bodyPr wrap="square">
             <a:normAutofit/>
           </a:bodyPr>
-          <a:p/>
+          <a:lstStyle/>
+          <a:p>
+            <a:endParaRPr/>
+          </a:p>
         </p:txBody>
       </p:sp>
       <p:sp>
@@ -15401,7 +15427,10 @@
           <a:bodyPr wrap="square">
             <a:normAutofit/>
           </a:bodyPr>
-          <a:p/>
+          <a:lstStyle/>
+          <a:p>
+            <a:endParaRPr/>
+          </a:p>
         </p:txBody>
       </p:sp>
       <p:sp>
@@ -15464,7 +15493,7 @@
         </p:spPr>
         <p:txBody>
           <a:bodyPr wrap="square" lIns="25400" tIns="25400" rIns="25400" bIns="25400" rtlCol="0" anchor="t">
-            <a:normAutofit/>
+            <a:normAutofit lnSpcReduction="10000"/>
           </a:bodyPr>
           <a:lstStyle/>
           <a:p>
@@ -15567,7 +15596,10 @@
           <a:bodyPr wrap="square">
             <a:normAutofit/>
           </a:bodyPr>
-          <a:p/>
+          <a:lstStyle/>
+          <a:p>
+            <a:endParaRPr/>
+          </a:p>
         </p:txBody>
       </p:sp>
       <p:sp>
@@ -15595,7 +15627,10 @@
           <a:bodyPr wrap="square">
             <a:normAutofit/>
           </a:bodyPr>
-          <a:p/>
+          <a:lstStyle/>
+          <a:p>
+            <a:endParaRPr/>
+          </a:p>
         </p:txBody>
       </p:sp>
       <p:sp>
@@ -15658,7 +15693,7 @@
         </p:spPr>
         <p:txBody>
           <a:bodyPr wrap="square" lIns="25400" tIns="25400" rIns="25400" bIns="25400" rtlCol="0" anchor="t">
-            <a:normAutofit/>
+            <a:normAutofit lnSpcReduction="10000"/>
           </a:bodyPr>
           <a:lstStyle/>
           <a:p>
@@ -15699,7 +15734,7 @@
         </p:spPr>
         <p:txBody>
           <a:bodyPr wrap="square" lIns="25400" tIns="25400" rIns="25400" bIns="25400" rtlCol="0" anchor="t">
-            <a:normAutofit/>
+            <a:normAutofit fontScale="70000" lnSpcReduction="20000"/>
           </a:bodyPr>
           <a:lstStyle/>
           <a:p>
@@ -15761,7 +15796,10 @@
           <a:bodyPr wrap="square">
             <a:normAutofit/>
           </a:bodyPr>
-          <a:p/>
+          <a:lstStyle/>
+          <a:p>
+            <a:endParaRPr/>
+          </a:p>
         </p:txBody>
       </p:sp>
       <p:sp>
@@ -15789,7 +15827,10 @@
           <a:bodyPr wrap="square">
             <a:normAutofit/>
           </a:bodyPr>
-          <a:p/>
+          <a:lstStyle/>
+          <a:p>
+            <a:endParaRPr/>
+          </a:p>
         </p:txBody>
       </p:sp>
       <p:sp>
@@ -15852,7 +15893,7 @@
         </p:spPr>
         <p:txBody>
           <a:bodyPr wrap="square" lIns="25400" tIns="25400" rIns="25400" bIns="25400" rtlCol="0" anchor="t">
-            <a:normAutofit/>
+            <a:normAutofit lnSpcReduction="10000"/>
           </a:bodyPr>
           <a:lstStyle/>
           <a:p>
@@ -15893,7 +15934,7 @@
         </p:spPr>
         <p:txBody>
           <a:bodyPr wrap="square" lIns="25400" tIns="25400" rIns="25400" bIns="25400" rtlCol="0" anchor="t">
-            <a:normAutofit/>
+            <a:normAutofit fontScale="92500" lnSpcReduction="10000"/>
           </a:bodyPr>
           <a:lstStyle/>
           <a:p>
@@ -15950,7 +15991,10 @@
           <a:bodyPr wrap="square">
             <a:normAutofit/>
           </a:bodyPr>
-          <a:p/>
+          <a:lstStyle/>
+          <a:p>
+            <a:endParaRPr/>
+          </a:p>
         </p:txBody>
       </p:sp>
       <p:sp>
@@ -15972,7 +16016,7 @@
         </p:spPr>
         <p:txBody>
           <a:bodyPr wrap="square" lIns="25400" tIns="25400" rIns="25400" bIns="25400" rtlCol="0" anchor="t">
-            <a:normAutofit/>
+            <a:normAutofit lnSpcReduction="10000"/>
           </a:bodyPr>
           <a:lstStyle/>
           <a:p>
@@ -16019,7 +16063,10 @@
           <a:bodyPr wrap="square">
             <a:normAutofit/>
           </a:bodyPr>
-          <a:p/>
+          <a:lstStyle/>
+          <a:p>
+            <a:endParaRPr/>
+          </a:p>
         </p:txBody>
       </p:sp>
       <p:sp>
@@ -16041,7 +16088,7 @@
         </p:spPr>
         <p:txBody>
           <a:bodyPr wrap="square" lIns="25400" tIns="25400" rIns="25400" bIns="25400" rtlCol="0" anchor="t">
-            <a:normAutofit/>
+            <a:normAutofit fontScale="92500" lnSpcReduction="10000"/>
           </a:bodyPr>
           <a:lstStyle/>
           <a:p>
@@ -16151,7 +16198,7 @@
         </p:spPr>
         <p:txBody>
           <a:bodyPr wrap="square" lIns="25400" tIns="25400" rIns="25400" bIns="25400" rtlCol="0" anchor="t">
-            <a:normAutofit/>
+            <a:normAutofit lnSpcReduction="10000"/>
           </a:bodyPr>
           <a:lstStyle/>
           <a:p>
@@ -16167,18 +16214,7 @@
                 <a:ea typeface="Bookman Old Style" pitchFamily="34" charset="-122"/>
                 <a:cs typeface="Bookman Old Style" pitchFamily="34" charset="-120"/>
               </a:rPr>
-              <a:t>7 / </a:t>
-            </a:r>
-            <a:r>
-              <a:rPr lang="en-US" sz="1800" kern="0" spc="75" dirty="0" smtClean="0">
-                <a:solidFill>
-                  <a:srgbClr val="8A92A4"/>
-                </a:solidFill>
-                <a:latin typeface="Bookman Old Style" pitchFamily="34" charset="0"/>
-                <a:ea typeface="Bookman Old Style" pitchFamily="34" charset="-122"/>
-                <a:cs typeface="Bookman Old Style" pitchFamily="34" charset="-120"/>
-              </a:rPr>
-              <a:t>14</a:t>
+              <a:t>7 / 14</a:t>
             </a:r>
             <a:endParaRPr lang="en-US" sz="1800" dirty="0"/>
           </a:p>
@@ -16189,13 +16225,6 @@
   <p:clrMapOvr>
     <a:masterClrMapping/>
   </p:clrMapOvr>
-  <p:timing>
-    <p:tnLst>
-      <p:par>
-        <p:cTn id="1" dur="indefinite" restart="never" nodeType="tmRoot"/>
-      </p:par>
-    </p:tnLst>
-  </p:timing>
 </p:sld>
 </file>
 
@@ -16262,9 +16291,12 @@
         </p:spPr>
         <p:txBody>
           <a:bodyPr wrap="square">
-            <a:normAutofit/>
-          </a:bodyPr>
-          <a:p/>
+            <a:normAutofit fontScale="25000" lnSpcReduction="20000"/>
+          </a:bodyPr>
+          <a:lstStyle/>
+          <a:p>
+            <a:endParaRPr/>
+          </a:p>
         </p:txBody>
       </p:sp>
       <p:sp>
@@ -16286,7 +16318,7 @@
         </p:spPr>
         <p:txBody>
           <a:bodyPr wrap="square" lIns="25400" tIns="25400" rIns="25400" bIns="25400" rtlCol="0" anchor="t">
-            <a:normAutofit/>
+            <a:normAutofit lnSpcReduction="10000"/>
           </a:bodyPr>
           <a:lstStyle/>
           <a:p>
@@ -16327,7 +16359,7 @@
         </p:spPr>
         <p:txBody>
           <a:bodyPr wrap="square" lIns="25400" tIns="25400" rIns="25400" bIns="25400" rtlCol="0" anchor="t">
-            <a:normAutofit/>
+            <a:normAutofit fontScale="92500" lnSpcReduction="20000"/>
           </a:bodyPr>
           <a:lstStyle/>
           <a:p>
@@ -16389,7 +16421,10 @@
           <a:bodyPr wrap="square">
             <a:normAutofit/>
           </a:bodyPr>
-          <a:p/>
+          <a:lstStyle/>
+          <a:p>
+            <a:endParaRPr/>
+          </a:p>
         </p:txBody>
       </p:sp>
       <p:sp>
@@ -16415,7 +16450,10 @@
           <a:bodyPr wrap="square">
             <a:normAutofit/>
           </a:bodyPr>
-          <a:p/>
+          <a:lstStyle/>
+          <a:p>
+            <a:endParaRPr/>
+          </a:p>
         </p:txBody>
       </p:sp>
       <p:sp>
@@ -16478,7 +16516,7 @@
         </p:spPr>
         <p:txBody>
           <a:bodyPr wrap="square" lIns="25400" tIns="25400" rIns="25400" bIns="25400" rtlCol="0" anchor="t">
-            <a:normAutofit/>
+            <a:normAutofit fontScale="92500" lnSpcReduction="20000"/>
           </a:bodyPr>
           <a:lstStyle/>
           <a:p>
@@ -16540,7 +16578,10 @@
           <a:bodyPr wrap="square">
             <a:normAutofit/>
           </a:bodyPr>
-          <a:p/>
+          <a:lstStyle/>
+          <a:p>
+            <a:endParaRPr/>
+          </a:p>
         </p:txBody>
       </p:sp>
       <p:sp>
@@ -16566,7 +16607,10 @@
           <a:bodyPr wrap="square">
             <a:normAutofit/>
           </a:bodyPr>
-          <a:p/>
+          <a:lstStyle/>
+          <a:p>
+            <a:endParaRPr/>
+          </a:p>
         </p:txBody>
       </p:sp>
       <p:sp>
@@ -16629,7 +16673,7 @@
         </p:spPr>
         <p:txBody>
           <a:bodyPr wrap="square" lIns="25400" tIns="25400" rIns="25400" bIns="25400" rtlCol="0" anchor="t">
-            <a:normAutofit/>
+            <a:normAutofit fontScale="92500" lnSpcReduction="20000"/>
           </a:bodyPr>
           <a:lstStyle/>
           <a:p>
@@ -16691,7 +16735,10 @@
           <a:bodyPr wrap="square">
             <a:normAutofit/>
           </a:bodyPr>
-          <a:p/>
+          <a:lstStyle/>
+          <a:p>
+            <a:endParaRPr/>
+          </a:p>
         </p:txBody>
       </p:sp>
       <p:sp>
@@ -16702,7 +16749,7 @@
         </p:nvSpPr>
         <p:spPr>
           <a:xfrm>
-            <a:off x="1438275" y="6368058"/>
+            <a:off x="1341290" y="6368058"/>
             <a:ext cx="590550" cy="590550"/>
           </a:xfrm>
           <a:prstGeom prst="ellipse">
@@ -16717,7 +16764,10 @@
           <a:bodyPr wrap="square">
             <a:normAutofit/>
           </a:bodyPr>
-          <a:p/>
+          <a:lstStyle/>
+          <a:p>
+            <a:endParaRPr/>
+          </a:p>
         </p:txBody>
       </p:sp>
       <p:sp>
@@ -16728,8 +16778,8 @@
         </p:nvSpPr>
         <p:spPr>
           <a:xfrm>
-            <a:off x="1400175" y="6368058"/>
-            <a:ext cx="666750" cy="628650"/>
+            <a:off x="1272015" y="6354203"/>
+            <a:ext cx="725635" cy="628650"/>
           </a:xfrm>
           <a:prstGeom prst="rect">
             <a:avLst/>
@@ -16769,18 +16819,18 @@
         </p:nvSpPr>
         <p:spPr>
           <a:xfrm>
-            <a:off x="2257425" y="5747147"/>
-            <a:ext cx="6612446" cy="1870472"/>
-          </a:xfrm>
-          <a:prstGeom prst="rect">
-            <a:avLst/>
-          </a:prstGeom>
-          <a:noFill/>
-          <a:ln/>
-        </p:spPr>
-        <p:txBody>
-          <a:bodyPr wrap="square" lIns="25400" tIns="25400" rIns="25400" bIns="25400" rtlCol="0" anchor="t">
-            <a:normAutofit/>
+            <a:off x="2049600" y="5747147"/>
+            <a:ext cx="6955346" cy="1870472"/>
+          </a:xfrm>
+          <a:prstGeom prst="rect">
+            <a:avLst/>
+          </a:prstGeom>
+          <a:noFill/>
+          <a:ln/>
+        </p:spPr>
+        <p:txBody>
+          <a:bodyPr wrap="square" lIns="25400" tIns="25400" rIns="25400" bIns="25400" rtlCol="0" anchor="t">
+            <a:noAutofit/>
           </a:bodyPr>
           <a:lstStyle/>
           <a:p>
@@ -16791,7 +16841,7 @@
               <a:buNone/>
             </a:pPr>
             <a:r>
-              <a:rPr lang="en-US" sz="2775" dirty="0">
+              <a:rPr lang="en-US" sz="2400" dirty="0">
                 <a:solidFill>
                   <a:srgbClr val="000000"/>
                 </a:solidFill>
@@ -16801,7 +16851,7 @@
               </a:rPr>
               <a:t>To apply spatial clustering (Uber H3 Spatial Grids/K-Means) for risk-zone identification and a classifier (Random Forest/HistGradientBoosting) for risk scoring.</a:t>
             </a:r>
-            <a:endParaRPr lang="en-US" sz="2775" dirty="0"/>
+            <a:endParaRPr lang="en-US" sz="2400" dirty="0"/>
           </a:p>
         </p:txBody>
       </p:sp>
@@ -16842,7 +16892,10 @@
           <a:bodyPr wrap="square">
             <a:normAutofit/>
           </a:bodyPr>
-          <a:p/>
+          <a:lstStyle/>
+          <a:p>
+            <a:endParaRPr/>
+          </a:p>
         </p:txBody>
       </p:sp>
       <p:sp>
@@ -16868,7 +16921,10 @@
           <a:bodyPr wrap="square">
             <a:normAutofit/>
           </a:bodyPr>
-          <a:p/>
+          <a:lstStyle/>
+          <a:p>
+            <a:endParaRPr/>
+          </a:p>
         </p:txBody>
       </p:sp>
       <p:sp>
@@ -16931,7 +16987,7 @@
         </p:spPr>
         <p:txBody>
           <a:bodyPr wrap="square" lIns="25400" tIns="25400" rIns="25400" bIns="25400" rtlCol="0" anchor="t">
-            <a:normAutofit/>
+            <a:normAutofit fontScale="92500" lnSpcReduction="20000"/>
           </a:bodyPr>
           <a:lstStyle/>
           <a:p>
@@ -16993,7 +17049,10 @@
           <a:bodyPr wrap="square">
             <a:normAutofit/>
           </a:bodyPr>
-          <a:p/>
+          <a:lstStyle/>
+          <a:p>
+            <a:endParaRPr/>
+          </a:p>
         </p:txBody>
       </p:sp>
       <p:sp>
@@ -17019,7 +17078,10 @@
           <a:bodyPr wrap="square">
             <a:normAutofit/>
           </a:bodyPr>
-          <a:p/>
+          <a:lstStyle/>
+          <a:p>
+            <a:endParaRPr/>
+          </a:p>
         </p:txBody>
       </p:sp>
       <p:sp>
@@ -17082,7 +17144,7 @@
         </p:spPr>
         <p:txBody>
           <a:bodyPr wrap="square" lIns="25400" tIns="25400" rIns="25400" bIns="25400" rtlCol="0" anchor="t">
-            <a:normAutofit/>
+            <a:normAutofit fontScale="92500" lnSpcReduction="20000"/>
           </a:bodyPr>
           <a:lstStyle/>
           <a:p>
@@ -17144,7 +17206,10 @@
           <a:bodyPr wrap="square">
             <a:normAutofit/>
           </a:bodyPr>
-          <a:p/>
+          <a:lstStyle/>
+          <a:p>
+            <a:endParaRPr/>
+          </a:p>
         </p:txBody>
       </p:sp>
       <p:sp>
@@ -17155,7 +17220,7 @@
         </p:nvSpPr>
         <p:spPr>
           <a:xfrm>
-            <a:off x="9610725" y="8676233"/>
+            <a:off x="9555305" y="8676233"/>
             <a:ext cx="590550" cy="590550"/>
           </a:xfrm>
           <a:prstGeom prst="ellipse">
@@ -17170,7 +17235,10 @@
           <a:bodyPr wrap="square">
             <a:normAutofit/>
           </a:bodyPr>
-          <a:p/>
+          <a:lstStyle/>
+          <a:p>
+            <a:endParaRPr/>
+          </a:p>
         </p:txBody>
       </p:sp>
       <p:sp>
@@ -17181,7 +17249,7 @@
         </p:nvSpPr>
         <p:spPr>
           <a:xfrm>
-            <a:off x="9572625" y="8676233"/>
+            <a:off x="9517205" y="8676233"/>
             <a:ext cx="666750" cy="628650"/>
           </a:xfrm>
           <a:prstGeom prst="rect">
@@ -17222,18 +17290,18 @@
         </p:nvSpPr>
         <p:spPr>
           <a:xfrm>
-            <a:off x="10429875" y="8513415"/>
-            <a:ext cx="6612446" cy="954286"/>
-          </a:xfrm>
-          <a:prstGeom prst="rect">
-            <a:avLst/>
-          </a:prstGeom>
-          <a:noFill/>
-          <a:ln/>
-        </p:spPr>
-        <p:txBody>
-          <a:bodyPr wrap="square" lIns="25400" tIns="25400" rIns="25400" bIns="25400" rtlCol="0" anchor="t">
-            <a:normAutofit/>
+            <a:off x="10277469" y="8139340"/>
+            <a:ext cx="7210431" cy="1013738"/>
+          </a:xfrm>
+          <a:prstGeom prst="rect">
+            <a:avLst/>
+          </a:prstGeom>
+          <a:noFill/>
+          <a:ln/>
+        </p:spPr>
+        <p:txBody>
+          <a:bodyPr wrap="square" lIns="25400" tIns="25400" rIns="25400" bIns="25400" rtlCol="0" anchor="t">
+            <a:noAutofit/>
           </a:bodyPr>
           <a:lstStyle/>
           <a:p>
@@ -17244,7 +17312,7 @@
               <a:buNone/>
             </a:pPr>
             <a:r>
-              <a:rPr lang="en-US" sz="2775" dirty="0">
+              <a:rPr lang="en-US" sz="2300" dirty="0">
                 <a:solidFill>
                   <a:srgbClr val="000000"/>
                 </a:solidFill>
@@ -17254,7 +17322,7 @@
               </a:rPr>
               <a:t>To compare clustering approaches (K-Means vs Uber H3 Spatial Grids vs heuristic black-spot method) and run a feature-ablation study.</a:t>
             </a:r>
-            <a:endParaRPr lang="en-US" sz="2775" dirty="0"/>
+            <a:endParaRPr lang="en-US" sz="2300" dirty="0"/>
           </a:p>
         </p:txBody>
       </p:sp>
@@ -17277,7 +17345,7 @@
         </p:spPr>
         <p:txBody>
           <a:bodyPr wrap="square" lIns="25400" tIns="25400" rIns="25400" bIns="25400" rtlCol="0" anchor="t">
-            <a:normAutofit/>
+            <a:normAutofit lnSpcReduction="10000"/>
           </a:bodyPr>
           <a:lstStyle/>
           <a:p>
@@ -17293,18 +17361,7 @@
                 <a:ea typeface="Bookman Old Style" pitchFamily="34" charset="-122"/>
                 <a:cs typeface="Bookman Old Style" pitchFamily="34" charset="-120"/>
               </a:rPr>
-              <a:t>8 / </a:t>
-            </a:r>
-            <a:r>
-              <a:rPr lang="en-US" sz="1800" kern="0" spc="75" dirty="0" smtClean="0">
-                <a:solidFill>
-                  <a:srgbClr val="8A92A4"/>
-                </a:solidFill>
-                <a:latin typeface="Bookman Old Style" pitchFamily="34" charset="0"/>
-                <a:ea typeface="Bookman Old Style" pitchFamily="34" charset="-122"/>
-                <a:cs typeface="Bookman Old Style" pitchFamily="34" charset="-120"/>
-              </a:rPr>
-              <a:t>14</a:t>
+              <a:t>8 / 14</a:t>
             </a:r>
             <a:endParaRPr lang="en-US" sz="1800" dirty="0"/>
           </a:p>
@@ -17315,13 +17372,6 @@
   <p:clrMapOvr>
     <a:masterClrMapping/>
   </p:clrMapOvr>
-  <p:timing>
-    <p:tnLst>
-      <p:par>
-        <p:cTn id="1" dur="indefinite" restart="never" nodeType="tmRoot"/>
-      </p:par>
-    </p:tnLst>
-  </p:timing>
 </p:sld>
 </file>
 
@@ -17388,9 +17438,12 @@
         </p:spPr>
         <p:txBody>
           <a:bodyPr wrap="square">
-            <a:normAutofit/>
-          </a:bodyPr>
-          <a:p/>
+            <a:normAutofit fontScale="25000" lnSpcReduction="20000"/>
+          </a:bodyPr>
+          <a:lstStyle/>
+          <a:p>
+            <a:endParaRPr/>
+          </a:p>
         </p:txBody>
       </p:sp>
       <p:sp>
@@ -17412,7 +17465,7 @@
         </p:spPr>
         <p:txBody>
           <a:bodyPr wrap="square" lIns="25400" tIns="25400" rIns="25400" bIns="25400" rtlCol="0" anchor="t">
-            <a:normAutofit/>
+            <a:normAutofit lnSpcReduction="10000"/>
           </a:bodyPr>
           <a:lstStyle/>
           <a:p>
@@ -17453,7 +17506,7 @@
         </p:spPr>
         <p:txBody>
           <a:bodyPr wrap="square" lIns="25400" tIns="25400" rIns="25400" bIns="25400" rtlCol="0" anchor="t">
-            <a:normAutofit/>
+            <a:normAutofit fontScale="92500" lnSpcReduction="20000"/>
           </a:bodyPr>
           <a:lstStyle/>
           <a:p>
@@ -17515,7 +17568,10 @@
           <a:bodyPr wrap="square">
             <a:normAutofit/>
           </a:bodyPr>
-          <a:p/>
+          <a:lstStyle/>
+          <a:p>
+            <a:endParaRPr/>
+          </a:p>
         </p:txBody>
       </p:sp>
       <p:sp>
@@ -17537,7 +17593,7 @@
         </p:spPr>
         <p:txBody>
           <a:bodyPr wrap="square" lIns="25400" tIns="25400" rIns="25400" bIns="25400" rtlCol="0" anchor="t">
-            <a:normAutofit/>
+            <a:normAutofit fontScale="92500" lnSpcReduction="10000"/>
           </a:bodyPr>
           <a:lstStyle/>
           <a:p>
@@ -17581,7 +17637,7 @@
         </p:spPr>
         <p:txBody>
           <a:bodyPr wrap="square" lIns="25400" tIns="25400" rIns="25400" bIns="25400" rtlCol="0" anchor="t">
-            <a:normAutofit/>
+            <a:normAutofit lnSpcReduction="10000"/>
           </a:bodyPr>
           <a:lstStyle/>
           <a:p>
@@ -17622,7 +17678,7 @@
         </p:spPr>
         <p:txBody>
           <a:bodyPr wrap="square" lIns="25400" tIns="25400" rIns="25400" bIns="25400" rtlCol="0" anchor="t">
-            <a:normAutofit/>
+            <a:normAutofit lnSpcReduction="10000"/>
           </a:bodyPr>
           <a:lstStyle/>
           <a:p>
@@ -17681,7 +17737,10 @@
           <a:bodyPr wrap="square">
             <a:normAutofit/>
           </a:bodyPr>
-          <a:p/>
+          <a:lstStyle/>
+          <a:p>
+            <a:endParaRPr/>
+          </a:p>
         </p:txBody>
       </p:sp>
       <p:sp>
@@ -17703,7 +17762,7 @@
         </p:spPr>
         <p:txBody>
           <a:bodyPr wrap="square" lIns="25400" tIns="25400" rIns="25400" bIns="25400" rtlCol="0" anchor="t">
-            <a:normAutofit/>
+            <a:normAutofit fontScale="92500" lnSpcReduction="10000"/>
           </a:bodyPr>
           <a:lstStyle/>
           <a:p>
@@ -17747,7 +17806,7 @@
         </p:spPr>
         <p:txBody>
           <a:bodyPr wrap="square" lIns="25400" tIns="25400" rIns="25400" bIns="25400" rtlCol="0" anchor="t">
-            <a:normAutofit/>
+            <a:normAutofit lnSpcReduction="10000"/>
           </a:bodyPr>
           <a:lstStyle/>
           <a:p>
@@ -17788,7 +17847,7 @@
         </p:spPr>
         <p:txBody>
           <a:bodyPr wrap="square" lIns="25400" tIns="25400" rIns="25400" bIns="25400" rtlCol="0" anchor="t">
-            <a:normAutofit/>
+            <a:normAutofit lnSpcReduction="10000"/>
           </a:bodyPr>
           <a:lstStyle/>
           <a:p>
@@ -17847,7 +17906,10 @@
           <a:bodyPr wrap="square">
             <a:normAutofit/>
           </a:bodyPr>
-          <a:p/>
+          <a:lstStyle/>
+          <a:p>
+            <a:endParaRPr/>
+          </a:p>
         </p:txBody>
       </p:sp>
       <p:sp>
@@ -17869,7 +17931,7 @@
         </p:spPr>
         <p:txBody>
           <a:bodyPr wrap="square" lIns="25400" tIns="25400" rIns="25400" bIns="25400" rtlCol="0" anchor="t">
-            <a:normAutofit/>
+            <a:normAutofit fontScale="55000" lnSpcReduction="20000"/>
           </a:bodyPr>
           <a:lstStyle/>
           <a:p>
@@ -17913,7 +17975,7 @@
         </p:spPr>
         <p:txBody>
           <a:bodyPr wrap="square" lIns="25400" tIns="25400" rIns="25400" bIns="25400" rtlCol="0" anchor="t">
-            <a:normAutofit/>
+            <a:normAutofit lnSpcReduction="10000"/>
           </a:bodyPr>
           <a:lstStyle/>
           <a:p>
@@ -17954,7 +18016,7 @@
         </p:spPr>
         <p:txBody>
           <a:bodyPr wrap="square" lIns="25400" tIns="25400" rIns="25400" bIns="25400" rtlCol="0" anchor="t">
-            <a:normAutofit/>
+            <a:normAutofit lnSpcReduction="10000"/>
           </a:bodyPr>
           <a:lstStyle/>
           <a:p>
@@ -18008,7 +18070,10 @@
           <a:bodyPr wrap="square">
             <a:normAutofit/>
           </a:bodyPr>
-          <a:p/>
+          <a:lstStyle/>
+          <a:p>
+            <a:endParaRPr/>
+          </a:p>
         </p:txBody>
       </p:sp>
       <p:sp>
@@ -18030,7 +18095,7 @@
         </p:spPr>
         <p:txBody>
           <a:bodyPr wrap="square" lIns="25400" tIns="25400" rIns="25400" bIns="25400" rtlCol="0" anchor="t">
-            <a:normAutofit/>
+            <a:normAutofit fontScale="92500" lnSpcReduction="10000"/>
           </a:bodyPr>
           <a:lstStyle/>
           <a:p>
@@ -18074,7 +18139,7 @@
         </p:spPr>
         <p:txBody>
           <a:bodyPr wrap="square" lIns="25400" tIns="25400" rIns="25400" bIns="25400" rtlCol="0" anchor="t">
-            <a:normAutofit/>
+            <a:normAutofit lnSpcReduction="10000"/>
           </a:bodyPr>
           <a:lstStyle/>
           <a:p>
@@ -18115,7 +18180,7 @@
         </p:spPr>
         <p:txBody>
           <a:bodyPr wrap="square" lIns="25400" tIns="25400" rIns="25400" bIns="25400" rtlCol="0" anchor="t">
-            <a:normAutofit/>
+            <a:normAutofit lnSpcReduction="10000"/>
           </a:bodyPr>
           <a:lstStyle/>
           <a:p>
@@ -18174,7 +18239,10 @@
           <a:bodyPr wrap="square">
             <a:normAutofit/>
           </a:bodyPr>
-          <a:p/>
+          <a:lstStyle/>
+          <a:p>
+            <a:endParaRPr/>
+          </a:p>
         </p:txBody>
       </p:sp>
       <p:sp>
@@ -18196,7 +18264,7 @@
         </p:spPr>
         <p:txBody>
           <a:bodyPr wrap="square" lIns="25400" tIns="25400" rIns="25400" bIns="25400" rtlCol="0" anchor="t">
-            <a:normAutofit/>
+            <a:normAutofit fontScale="92500" lnSpcReduction="10000"/>
           </a:bodyPr>
           <a:lstStyle/>
           <a:p>
@@ -18240,7 +18308,7 @@
         </p:spPr>
         <p:txBody>
           <a:bodyPr wrap="square" lIns="25400" tIns="25400" rIns="25400" bIns="25400" rtlCol="0" anchor="t">
-            <a:normAutofit/>
+            <a:normAutofit lnSpcReduction="10000"/>
           </a:bodyPr>
           <a:lstStyle/>
           <a:p>
@@ -18299,7 +18367,10 @@
           <a:bodyPr wrap="square">
             <a:normAutofit/>
           </a:bodyPr>
-          <a:p/>
+          <a:lstStyle/>
+          <a:p>
+            <a:endParaRPr/>
+          </a:p>
         </p:txBody>
       </p:sp>
       <p:sp>
@@ -18321,7 +18392,7 @@
         </p:spPr>
         <p:txBody>
           <a:bodyPr wrap="square" lIns="25400" tIns="25400" rIns="25400" bIns="25400" rtlCol="0" anchor="t">
-            <a:normAutofit/>
+            <a:normAutofit lnSpcReduction="10000"/>
           </a:bodyPr>
           <a:lstStyle/>
           <a:p>
@@ -18362,7 +18433,7 @@
         </p:spPr>
         <p:txBody>
           <a:bodyPr wrap="square" lIns="25400" tIns="25400" rIns="25400" bIns="25400" rtlCol="0" anchor="t">
-            <a:normAutofit/>
+            <a:normAutofit lnSpcReduction="10000"/>
           </a:bodyPr>
           <a:lstStyle/>
           <a:p>
@@ -18393,17 +18464,17 @@
         <p:spPr>
           <a:xfrm>
             <a:off x="1952625" y="5010150"/>
-            <a:ext cx="4878095" cy="409575"/>
-          </a:xfrm>
-          <a:prstGeom prst="rect">
-            <a:avLst/>
-          </a:prstGeom>
-          <a:noFill/>
-          <a:ln/>
-        </p:spPr>
-        <p:txBody>
-          <a:bodyPr wrap="square" lIns="25400" tIns="25400" rIns="25400" bIns="25400" rtlCol="0" anchor="t">
-            <a:normAutofit/>
+            <a:ext cx="5844332" cy="400051"/>
+          </a:xfrm>
+          <a:prstGeom prst="rect">
+            <a:avLst/>
+          </a:prstGeom>
+          <a:noFill/>
+          <a:ln/>
+        </p:spPr>
+        <p:txBody>
+          <a:bodyPr wrap="square" lIns="25400" tIns="25400" rIns="25400" bIns="25400" rtlCol="0" anchor="t">
+            <a:noAutofit/>
           </a:bodyPr>
           <a:lstStyle/>
           <a:p>
@@ -18414,7 +18485,7 @@
               <a:buNone/>
             </a:pPr>
             <a:r>
-              <a:rPr lang="en-US" sz="2250" dirty="0">
+              <a:rPr lang="en-US" sz="2000" dirty="0">
                 <a:solidFill>
                   <a:srgbClr val="000000"/>
                 </a:solidFill>
@@ -18424,7 +18495,7 @@
               </a:rPr>
               <a:t>Collect &amp; geocode historical accident data.</a:t>
             </a:r>
-            <a:endParaRPr lang="en-US" sz="2250" dirty="0"/>
+            <a:endParaRPr lang="en-US" sz="2000" dirty="0"/>
           </a:p>
         </p:txBody>
       </p:sp>
@@ -18436,7 +18507,7 @@
         </p:nvSpPr>
         <p:spPr>
           <a:xfrm>
-            <a:off x="1476375" y="5543550"/>
+            <a:off x="1476375" y="5571260"/>
             <a:ext cx="400050" cy="342900"/>
           </a:xfrm>
           <a:prstGeom prst="rect">
@@ -18447,7 +18518,7 @@
         </p:spPr>
         <p:txBody>
           <a:bodyPr wrap="square" lIns="25400" tIns="25400" rIns="25400" bIns="25400" rtlCol="0" anchor="t">
-            <a:normAutofit/>
+            <a:normAutofit lnSpcReduction="10000"/>
           </a:bodyPr>
           <a:lstStyle/>
           <a:p>
@@ -18488,7 +18559,7 @@
         </p:spPr>
         <p:txBody>
           <a:bodyPr wrap="square" lIns="25400" tIns="25400" rIns="25400" bIns="25400" rtlCol="0" anchor="t">
-            <a:normAutofit/>
+            <a:normAutofit fontScale="85000" lnSpcReduction="10000"/>
           </a:bodyPr>
           <a:lstStyle/>
           <a:p>
@@ -18507,7 +18578,29 @@
                 <a:ea typeface="Bookman Old Style" pitchFamily="34" charset="-122"/>
                 <a:cs typeface="Bookman Old Style" pitchFamily="34" charset="-120"/>
               </a:rPr>
-              <a:t>Cluster accident points into risk zones (Uber H3 Spatial Grids).</a:t>
+              <a:t>Cluster </a:t>
+            </a:r>
+            <a:r>
+              <a:rPr lang="en-US" sz="2400" dirty="0">
+                <a:solidFill>
+                  <a:srgbClr val="000000"/>
+                </a:solidFill>
+                <a:latin typeface="Bookman Old Style" pitchFamily="34" charset="0"/>
+                <a:ea typeface="Bookman Old Style" pitchFamily="34" charset="-122"/>
+                <a:cs typeface="Bookman Old Style" pitchFamily="34" charset="-120"/>
+              </a:rPr>
+              <a:t>accident</a:t>
+            </a:r>
+            <a:r>
+              <a:rPr lang="en-US" sz="2250" dirty="0">
+                <a:solidFill>
+                  <a:srgbClr val="000000"/>
+                </a:solidFill>
+                <a:latin typeface="Bookman Old Style" pitchFamily="34" charset="0"/>
+                <a:ea typeface="Bookman Old Style" pitchFamily="34" charset="-122"/>
+                <a:cs typeface="Bookman Old Style" pitchFamily="34" charset="-120"/>
+              </a:rPr>
+              <a:t> points into risk zones (Uber H3 Spatial Grids).</a:t>
             </a:r>
             <a:endParaRPr lang="en-US" sz="2250" dirty="0"/>
           </a:p>
@@ -18521,7 +18614,7 @@
         </p:nvSpPr>
         <p:spPr>
           <a:xfrm>
-            <a:off x="1476375" y="6048375"/>
+            <a:off x="1476375" y="6089940"/>
             <a:ext cx="400050" cy="342900"/>
           </a:xfrm>
           <a:prstGeom prst="rect">
@@ -18532,7 +18625,7 @@
         </p:spPr>
         <p:txBody>
           <a:bodyPr wrap="square" lIns="25400" tIns="25400" rIns="25400" bIns="25400" rtlCol="0" anchor="t">
-            <a:normAutofit/>
+            <a:normAutofit lnSpcReduction="10000"/>
           </a:bodyPr>
           <a:lstStyle/>
           <a:p>
@@ -18562,7 +18655,7 @@
         </p:nvSpPr>
         <p:spPr>
           <a:xfrm>
-            <a:off x="1952625" y="6019800"/>
+            <a:off x="1952625" y="5992090"/>
             <a:ext cx="7499925" cy="409575"/>
           </a:xfrm>
           <a:prstGeom prst="rect">
@@ -18573,7 +18666,7 @@
         </p:spPr>
         <p:txBody>
           <a:bodyPr wrap="square" lIns="25400" tIns="25400" rIns="25400" bIns="25400" rtlCol="0" anchor="t">
-            <a:normAutofit/>
+            <a:noAutofit/>
           </a:bodyPr>
           <a:lstStyle/>
           <a:p>
@@ -18584,7 +18677,7 @@
               <a:buNone/>
             </a:pPr>
             <a:r>
-              <a:rPr lang="en-US" sz="2250" dirty="0">
+              <a:rPr lang="en-US" sz="2000" dirty="0">
                 <a:solidFill>
                   <a:srgbClr val="000000"/>
                 </a:solidFill>
@@ -18594,7 +18687,7 @@
               </a:rPr>
               <a:t>Train classifier to score zone risk using contextual features.</a:t>
             </a:r>
-            <a:endParaRPr lang="en-US" sz="2250" dirty="0"/>
+            <a:endParaRPr lang="en-US" sz="2000" dirty="0"/>
           </a:p>
         </p:txBody>
       </p:sp>
@@ -18606,7 +18699,7 @@
         </p:nvSpPr>
         <p:spPr>
           <a:xfrm>
-            <a:off x="1476375" y="6553200"/>
+            <a:off x="1476375" y="6608620"/>
             <a:ext cx="400050" cy="342900"/>
           </a:xfrm>
           <a:prstGeom prst="rect">
@@ -18617,7 +18710,7 @@
         </p:spPr>
         <p:txBody>
           <a:bodyPr wrap="square" lIns="25400" tIns="25400" rIns="25400" bIns="25400" rtlCol="0" anchor="t">
-            <a:normAutofit/>
+            <a:normAutofit lnSpcReduction="10000"/>
           </a:bodyPr>
           <a:lstStyle/>
           <a:p>
@@ -18647,7 +18740,7 @@
         </p:nvSpPr>
         <p:spPr>
           <a:xfrm>
-            <a:off x="1952625" y="6524625"/>
+            <a:off x="1952625" y="6524626"/>
             <a:ext cx="7761376" cy="781050"/>
           </a:xfrm>
           <a:prstGeom prst="rect">
@@ -18669,7 +18762,7 @@
               <a:buNone/>
             </a:pPr>
             <a:r>
-              <a:rPr lang="en-US" sz="2250" dirty="0">
+              <a:rPr lang="en-US" sz="2000" dirty="0">
                 <a:solidFill>
                   <a:srgbClr val="000000"/>
                 </a:solidFill>
@@ -18679,7 +18772,7 @@
               </a:rPr>
               <a:t>Fuse with live GPS + weather feed.</a:t>
             </a:r>
-            <a:endParaRPr lang="en-US" sz="2250" dirty="0"/>
+            <a:endParaRPr lang="en-US" sz="2000" dirty="0"/>
           </a:p>
         </p:txBody>
       </p:sp>
@@ -18691,7 +18784,7 @@
         </p:nvSpPr>
         <p:spPr>
           <a:xfrm>
-            <a:off x="1476375" y="7429500"/>
+            <a:off x="1462520" y="7152405"/>
             <a:ext cx="400050" cy="342900"/>
           </a:xfrm>
           <a:prstGeom prst="rect">
@@ -18702,7 +18795,7 @@
         </p:spPr>
         <p:txBody>
           <a:bodyPr wrap="square" lIns="25400" tIns="25400" rIns="25400" bIns="25400" rtlCol="0" anchor="t">
-            <a:normAutofit/>
+            <a:normAutofit lnSpcReduction="10000"/>
           </a:bodyPr>
           <a:lstStyle/>
           <a:p>
@@ -18732,7 +18825,7 @@
         </p:nvSpPr>
         <p:spPr>
           <a:xfrm>
-            <a:off x="1952625" y="7400925"/>
+            <a:off x="1952625" y="7068409"/>
             <a:ext cx="7329830" cy="409575"/>
           </a:xfrm>
           <a:prstGeom prst="rect">
@@ -18743,7 +18836,7 @@
         </p:spPr>
         <p:txBody>
           <a:bodyPr wrap="square" lIns="25400" tIns="25400" rIns="25400" bIns="25400" rtlCol="0" anchor="t">
-            <a:normAutofit/>
+            <a:noAutofit/>
           </a:bodyPr>
           <a:lstStyle/>
           <a:p>
@@ -18754,7 +18847,7 @@
               <a:buNone/>
             </a:pPr>
             <a:r>
-              <a:rPr lang="en-US" sz="2250" dirty="0">
+              <a:rPr lang="en-US" sz="1900" dirty="0">
                 <a:solidFill>
                   <a:srgbClr val="000000"/>
                 </a:solidFill>
@@ -18762,9 +18855,31 @@
                 <a:ea typeface="Bookman Old Style" pitchFamily="34" charset="-122"/>
                 <a:cs typeface="Bookman Old Style" pitchFamily="34" charset="-120"/>
               </a:rPr>
-              <a:t>Trigger alert when the user approaches a high-risk zone; show on map dashboard.</a:t>
-            </a:r>
-            <a:endParaRPr lang="en-US" sz="2250" dirty="0"/>
+              <a:t>Trigger alert </a:t>
+            </a:r>
+            <a:r>
+              <a:rPr lang="en-US" sz="2000" dirty="0">
+                <a:solidFill>
+                  <a:srgbClr val="000000"/>
+                </a:solidFill>
+                <a:latin typeface="Bookman Old Style" pitchFamily="34" charset="0"/>
+                <a:ea typeface="Bookman Old Style" pitchFamily="34" charset="-122"/>
+                <a:cs typeface="Bookman Old Style" pitchFamily="34" charset="-120"/>
+              </a:rPr>
+              <a:t>when</a:t>
+            </a:r>
+            <a:r>
+              <a:rPr lang="en-US" sz="1900" dirty="0">
+                <a:solidFill>
+                  <a:srgbClr val="000000"/>
+                </a:solidFill>
+                <a:latin typeface="Bookman Old Style" pitchFamily="34" charset="0"/>
+                <a:ea typeface="Bookman Old Style" pitchFamily="34" charset="-122"/>
+                <a:cs typeface="Bookman Old Style" pitchFamily="34" charset="-120"/>
+              </a:rPr>
+              <a:t> the user approaches a high-risk zone; show on map dashboard.</a:t>
+            </a:r>
+            <a:endParaRPr lang="en-US" sz="1900" dirty="0"/>
           </a:p>
         </p:txBody>
       </p:sp>
@@ -18800,7 +18915,10 @@
           <a:bodyPr wrap="square">
             <a:normAutofit/>
           </a:bodyPr>
-          <a:p/>
+          <a:lstStyle/>
+          <a:p>
+            <a:endParaRPr/>
+          </a:p>
         </p:txBody>
       </p:sp>
       <p:sp>
@@ -18822,7 +18940,7 @@
         </p:spPr>
         <p:txBody>
           <a:bodyPr wrap="square" lIns="25400" tIns="25400" rIns="25400" bIns="25400" rtlCol="0" anchor="t">
-            <a:normAutofit/>
+            <a:normAutofit lnSpcReduction="10000"/>
           </a:bodyPr>
           <a:lstStyle/>
           <a:p>
@@ -18867,9 +18985,12 @@
         </p:spPr>
         <p:txBody>
           <a:bodyPr wrap="square">
-            <a:normAutofit/>
-          </a:bodyPr>
-          <a:p/>
+            <a:normAutofit fontScale="25000" lnSpcReduction="20000"/>
+          </a:bodyPr>
+          <a:lstStyle/>
+          <a:p>
+            <a:endParaRPr/>
+          </a:p>
         </p:txBody>
       </p:sp>
       <p:sp>
@@ -18880,18 +19001,18 @@
         </p:nvSpPr>
         <p:spPr>
           <a:xfrm>
-            <a:off x="10507117" y="4962525"/>
-            <a:ext cx="1684913" cy="314325"/>
-          </a:xfrm>
-          <a:prstGeom prst="rect">
-            <a:avLst/>
-          </a:prstGeom>
-          <a:noFill/>
-          <a:ln/>
-        </p:spPr>
-        <p:txBody>
-          <a:bodyPr wrap="square" lIns="25400" tIns="25400" rIns="25400" bIns="25400" rtlCol="0" anchor="t">
-            <a:normAutofit/>
+            <a:off x="10507117" y="4962526"/>
+            <a:ext cx="2663532" cy="330780"/>
+          </a:xfrm>
+          <a:prstGeom prst="rect">
+            <a:avLst/>
+          </a:prstGeom>
+          <a:noFill/>
+          <a:ln/>
+        </p:spPr>
+        <p:txBody>
+          <a:bodyPr wrap="square" lIns="25400" tIns="25400" rIns="25400" bIns="25400" rtlCol="0" anchor="t">
+            <a:noAutofit/>
           </a:bodyPr>
           <a:lstStyle/>
           <a:p>
@@ -18899,7 +19020,7 @@
               <a:buNone/>
             </a:pPr>
             <a:r>
-              <a:rPr lang="en-US" sz="1800" dirty="0">
+              <a:rPr lang="en-US" sz="1500" dirty="0">
                 <a:solidFill>
                   <a:srgbClr val="C9D2E8"/>
                 </a:solidFill>
@@ -18909,7 +19030,7 @@
               </a:rPr>
               <a:t>D1 · Road Accident Records</a:t>
             </a:r>
-            <a:endParaRPr lang="en-US" sz="1800" dirty="0"/>
+            <a:endParaRPr lang="en-US" sz="1500" dirty="0"/>
           </a:p>
         </p:txBody>
       </p:sp>
@@ -18932,7 +19053,7 @@
         </p:spPr>
         <p:txBody>
           <a:bodyPr wrap="square" lIns="25400" tIns="25400" rIns="25400" bIns="25400" rtlCol="0" anchor="t">
-            <a:normAutofit/>
+            <a:normAutofit lnSpcReduction="10000"/>
           </a:bodyPr>
           <a:lstStyle/>
           <a:p>
@@ -18977,9 +19098,12 @@
         </p:spPr>
         <p:txBody>
           <a:bodyPr wrap="square">
-            <a:normAutofit/>
-          </a:bodyPr>
-          <a:p/>
+            <a:normAutofit fontScale="25000" lnSpcReduction="20000"/>
+          </a:bodyPr>
+          <a:lstStyle/>
+          <a:p>
+            <a:endParaRPr/>
+          </a:p>
         </p:txBody>
       </p:sp>
       <p:sp>
@@ -18990,18 +19114,18 @@
         </p:nvSpPr>
         <p:spPr>
           <a:xfrm>
-            <a:off x="10507117" y="5467350"/>
-            <a:ext cx="1825541" cy="314325"/>
-          </a:xfrm>
-          <a:prstGeom prst="rect">
-            <a:avLst/>
-          </a:prstGeom>
-          <a:noFill/>
-          <a:ln/>
-        </p:spPr>
-        <p:txBody>
-          <a:bodyPr wrap="square" lIns="25400" tIns="25400" rIns="25400" bIns="25400" rtlCol="0" anchor="t">
-            <a:normAutofit/>
+            <a:off x="10465552" y="5411931"/>
+            <a:ext cx="2968332" cy="386200"/>
+          </a:xfrm>
+          <a:prstGeom prst="rect">
+            <a:avLst/>
+          </a:prstGeom>
+          <a:noFill/>
+          <a:ln/>
+        </p:spPr>
+        <p:txBody>
+          <a:bodyPr wrap="square" lIns="25400" tIns="25400" rIns="25400" bIns="25400" rtlCol="0" anchor="t">
+            <a:noAutofit/>
           </a:bodyPr>
           <a:lstStyle/>
           <a:p>
@@ -19009,7 +19133,7 @@
               <a:buNone/>
             </a:pPr>
             <a:r>
-              <a:rPr lang="en-US" sz="1800" dirty="0">
+              <a:rPr lang="en-US" dirty="0">
                 <a:solidFill>
                   <a:srgbClr val="C9D2E8"/>
                 </a:solidFill>
@@ -19017,9 +19141,9 @@
                 <a:ea typeface="Bookman Old Style" pitchFamily="34" charset="-122"/>
                 <a:cs typeface="Bookman Old Style" pitchFamily="34" charset="-120"/>
               </a:rPr>
-              <a:t>D2 · Live Traffic &amp; Weather</a:t>
-            </a:r>
-            <a:endParaRPr lang="en-US" sz="1800" dirty="0"/>
+              <a:t>D2 Live Traffic &amp; Weather</a:t>
+            </a:r>
+            <a:endParaRPr lang="en-US" dirty="0"/>
           </a:p>
         </p:txBody>
       </p:sp>
@@ -19042,7 +19166,7 @@
         </p:spPr>
         <p:txBody>
           <a:bodyPr wrap="square" lIns="25400" tIns="25400" rIns="25400" bIns="25400" rtlCol="0" anchor="t">
-            <a:normAutofit/>
+            <a:normAutofit fontScale="92500"/>
           </a:bodyPr>
           <a:lstStyle/>
           <a:p>
@@ -19087,9 +19211,12 @@
         </p:spPr>
         <p:txBody>
           <a:bodyPr wrap="square">
-            <a:normAutofit/>
-          </a:bodyPr>
-          <a:p/>
+            <a:normAutofit fontScale="25000" lnSpcReduction="20000"/>
+          </a:bodyPr>
+          <a:lstStyle/>
+          <a:p>
+            <a:endParaRPr/>
+          </a:p>
         </p:txBody>
       </p:sp>
       <p:sp>
@@ -19111,7 +19238,7 @@
         </p:spPr>
         <p:txBody>
           <a:bodyPr wrap="square" lIns="25400" tIns="25400" rIns="25400" bIns="25400" rtlCol="0" anchor="t">
-            <a:normAutofit/>
+            <a:normAutofit lnSpcReduction="10000"/>
           </a:bodyPr>
           <a:lstStyle/>
           <a:p>
@@ -19152,7 +19279,7 @@
         </p:spPr>
         <p:txBody>
           <a:bodyPr wrap="square" lIns="25400" tIns="25400" rIns="25400" bIns="25400" rtlCol="0" anchor="t">
-            <a:normAutofit/>
+            <a:normAutofit fontScale="62500" lnSpcReduction="20000"/>
           </a:bodyPr>
           <a:lstStyle/>
           <a:p>
@@ -19197,9 +19324,12 @@
         </p:spPr>
         <p:txBody>
           <a:bodyPr wrap="square">
-            <a:normAutofit/>
-          </a:bodyPr>
-          <a:p/>
+            <a:normAutofit fontScale="25000" lnSpcReduction="20000"/>
+          </a:bodyPr>
+          <a:lstStyle/>
+          <a:p>
+            <a:endParaRPr/>
+          </a:p>
         </p:txBody>
       </p:sp>
       <p:sp>
@@ -19221,7 +19351,7 @@
         </p:spPr>
         <p:txBody>
           <a:bodyPr wrap="square" lIns="25400" tIns="25400" rIns="25400" bIns="25400" rtlCol="0" anchor="t">
-            <a:normAutofit/>
+            <a:normAutofit lnSpcReduction="10000"/>
           </a:bodyPr>
           <a:lstStyle/>
           <a:p>
@@ -19262,7 +19392,7 @@
         </p:spPr>
         <p:txBody>
           <a:bodyPr wrap="square" lIns="25400" tIns="25400" rIns="25400" bIns="25400" rtlCol="0" anchor="t">
-            <a:normAutofit/>
+            <a:normAutofit fontScale="70000" lnSpcReduction="20000"/>
           </a:bodyPr>
           <a:lstStyle/>
           <a:p>
@@ -19303,7 +19433,7 @@
         </p:spPr>
         <p:txBody>
           <a:bodyPr wrap="square" lIns="25400" tIns="25400" rIns="25400" bIns="25400" rtlCol="0" anchor="t">
-            <a:normAutofit/>
+            <a:normAutofit lnSpcReduction="10000"/>
           </a:bodyPr>
           <a:lstStyle/>
           <a:p>
@@ -19344,7 +19474,7 @@
         </p:spPr>
         <p:txBody>
           <a:bodyPr wrap="square" lIns="25400" tIns="25400" rIns="25400" bIns="25400" rtlCol="0" anchor="t">
-            <a:normAutofit/>
+            <a:normAutofit fontScale="85000" lnSpcReduction="10000"/>
           </a:bodyPr>
           <a:lstStyle/>
           <a:p>
@@ -19385,7 +19515,7 @@
         </p:spPr>
         <p:txBody>
           <a:bodyPr wrap="square" lIns="25400" tIns="25400" rIns="25400" bIns="25400" rtlCol="0" anchor="t">
-            <a:normAutofit/>
+            <a:normAutofit lnSpcReduction="10000"/>
           </a:bodyPr>
           <a:lstStyle/>
           <a:p>
@@ -19401,18 +19531,7 @@
                 <a:ea typeface="Bookman Old Style" pitchFamily="34" charset="-122"/>
                 <a:cs typeface="Bookman Old Style" pitchFamily="34" charset="-120"/>
               </a:rPr>
-              <a:t>9 / </a:t>
-            </a:r>
-            <a:r>
-              <a:rPr lang="en-US" sz="1800" kern="0" spc="75" dirty="0" smtClean="0">
-                <a:solidFill>
-                  <a:srgbClr val="8A92A4"/>
-                </a:solidFill>
-                <a:latin typeface="Bookman Old Style" pitchFamily="34" charset="0"/>
-                <a:ea typeface="Bookman Old Style" pitchFamily="34" charset="-122"/>
-                <a:cs typeface="Bookman Old Style" pitchFamily="34" charset="-120"/>
-              </a:rPr>
-              <a:t>14</a:t>
+              <a:t>9 / 14</a:t>
             </a:r>
             <a:endParaRPr lang="en-US" sz="1800" dirty="0"/>
           </a:p>
@@ -19423,13 +19542,6 @@
   <p:clrMapOvr>
     <a:masterClrMapping/>
   </p:clrMapOvr>
-  <p:timing>
-    <p:tnLst>
-      <p:par>
-        <p:cTn id="1" dur="indefinite" restart="never" nodeType="tmRoot"/>
-      </p:par>
-    </p:tnLst>
-  </p:timing>
 </p:sld>
 </file>
 

--- a/AI_Road_Accident_RiskZone_Detection_Review1_UPDATED_FIXED.pptx
+++ b/AI_Road_Accident_RiskZone_Detection_Review1_UPDATED_FIXED.pptx
@@ -14381,26 +14381,26 @@
         <p:spPr>
           <a:xfrm>
             <a:off x="1352550" y="5886450"/>
-            <a:ext cx="3536472" cy="609600"/>
-          </a:xfrm>
-          <a:prstGeom prst="rect">
-            <a:avLst/>
-          </a:prstGeom>
-          <a:noFill/>
-          <a:ln/>
-        </p:spPr>
-        <p:txBody>
-          <a:bodyPr wrap="square" lIns="25400" tIns="25400" rIns="25400" bIns="25400" rtlCol="0" anchor="t">
-            <a:normAutofit fontScale="77500" lnSpcReduction="20000"/>
-          </a:bodyPr>
-          <a:lstStyle/>
-          <a:p>
-            <a:r>
-              <a:rPr lang="en-US" dirty="0"/>
+            <a:ext cx="3536472" cy="571500"/>
+          </a:xfrm>
+          <a:prstGeom prst="rect">
+            <a:avLst/>
+          </a:prstGeom>
+          <a:noFill/>
+          <a:ln/>
+        </p:spPr>
+        <p:txBody>
+          <a:bodyPr wrap="square" lIns="25400" tIns="25400" rIns="25400" bIns="25400" rtlCol="0" anchor="t">
+            <a:noAutofit/>
+          </a:bodyPr>
+          <a:lstStyle/>
+          <a:p>
+            <a:r>
+              <a:rPr lang="en-US" sz="1600" dirty="0"/>
               <a:t> </a:t>
             </a:r>
             <a:r>
-              <a:rPr lang="en-US" sz="1875" b="1" dirty="0">
+              <a:rPr lang="en-US" sz="1600" b="1" dirty="0">
                 <a:solidFill>
                   <a:srgbClr val="000000"/>
                 </a:solidFill>
